--- a/lendet/2026-2027/mobile/lectures/ushtrimet-04-neon-rideshare-2026.pptx
+++ b/lendet/2026-2027/mobile/lectures/ushtrimet-04-neon-rideshare-2026.pptx
@@ -2,22 +2,22 @@
 <file path=ppt/presentation.xml><?xml version="1.0" encoding="utf-8"?>
 <p:presentation xmlns:p="http://schemas.openxmlformats.org/presentationml/2006/main">
   <p:sldMasterIdLst>
-    <p:sldMasterId xmlns:r="http://schemas.openxmlformats.org/officeDocument/2006/relationships" id="2147483648" r:id="R9eefb569f55843e3"/>
+    <p:sldMasterId xmlns:r="http://schemas.openxmlformats.org/officeDocument/2006/relationships" id="2147483648" r:id="R2c2063e838b44992"/>
   </p:sldMasterIdLst>
   <p:sldIdLst>
-    <p:sldId xmlns:r="http://schemas.openxmlformats.org/officeDocument/2006/relationships" id="256" r:id="Re4bf90ee36fb4b6a"/>
-    <p:sldId xmlns:r="http://schemas.openxmlformats.org/officeDocument/2006/relationships" id="257" r:id="Rf1a67d51592c4243"/>
-    <p:sldId xmlns:r="http://schemas.openxmlformats.org/officeDocument/2006/relationships" id="258" r:id="R5a3ac4fd37df47b1"/>
-    <p:sldId xmlns:r="http://schemas.openxmlformats.org/officeDocument/2006/relationships" id="259" r:id="R2b8d082f90ff4548"/>
-    <p:sldId xmlns:r="http://schemas.openxmlformats.org/officeDocument/2006/relationships" id="260" r:id="Rad20c4b941384cf0"/>
-    <p:sldId xmlns:r="http://schemas.openxmlformats.org/officeDocument/2006/relationships" id="261" r:id="R9685c16a0aa54809"/>
-    <p:sldId xmlns:r="http://schemas.openxmlformats.org/officeDocument/2006/relationships" id="262" r:id="Rc9d8dbcb703e4b06"/>
-    <p:sldId xmlns:r="http://schemas.openxmlformats.org/officeDocument/2006/relationships" id="263" r:id="R54d1fb397fe540ae"/>
-    <p:sldId xmlns:r="http://schemas.openxmlformats.org/officeDocument/2006/relationships" id="264" r:id="R6129dbf3caa64592"/>
-    <p:sldId xmlns:r="http://schemas.openxmlformats.org/officeDocument/2006/relationships" id="265" r:id="R083aeef9ce0b4f5c"/>
-    <p:sldId xmlns:r="http://schemas.openxmlformats.org/officeDocument/2006/relationships" id="266" r:id="Rbd069577d7ff43a9"/>
-    <p:sldId xmlns:r="http://schemas.openxmlformats.org/officeDocument/2006/relationships" id="267" r:id="R01f8d2f721b840f2"/>
-    <p:sldId xmlns:r="http://schemas.openxmlformats.org/officeDocument/2006/relationships" id="268" r:id="Rd04b03b43f034996"/>
+    <p:sldId xmlns:r="http://schemas.openxmlformats.org/officeDocument/2006/relationships" id="256" r:id="R9b694b3a1dd84bca"/>
+    <p:sldId xmlns:r="http://schemas.openxmlformats.org/officeDocument/2006/relationships" id="257" r:id="Rc1b648d342174883"/>
+    <p:sldId xmlns:r="http://schemas.openxmlformats.org/officeDocument/2006/relationships" id="258" r:id="R918075d0d5474f3b"/>
+    <p:sldId xmlns:r="http://schemas.openxmlformats.org/officeDocument/2006/relationships" id="259" r:id="Rdabbb4f79fa84665"/>
+    <p:sldId xmlns:r="http://schemas.openxmlformats.org/officeDocument/2006/relationships" id="260" r:id="Ree851fe884f44a5a"/>
+    <p:sldId xmlns:r="http://schemas.openxmlformats.org/officeDocument/2006/relationships" id="261" r:id="R6a2bbacdc4ac4736"/>
+    <p:sldId xmlns:r="http://schemas.openxmlformats.org/officeDocument/2006/relationships" id="262" r:id="Rdb14bf5cac8e4796"/>
+    <p:sldId xmlns:r="http://schemas.openxmlformats.org/officeDocument/2006/relationships" id="263" r:id="Rf2b7feae221943e2"/>
+    <p:sldId xmlns:r="http://schemas.openxmlformats.org/officeDocument/2006/relationships" id="264" r:id="R4347fc2813e5405a"/>
+    <p:sldId xmlns:r="http://schemas.openxmlformats.org/officeDocument/2006/relationships" id="265" r:id="R9b45034cd55e4f08"/>
+    <p:sldId xmlns:r="http://schemas.openxmlformats.org/officeDocument/2006/relationships" id="266" r:id="Rcb96f4fbca484274"/>
+    <p:sldId xmlns:r="http://schemas.openxmlformats.org/officeDocument/2006/relationships" id="267" r:id="Rb7c869efe88347c7"/>
+    <p:sldId xmlns:r="http://schemas.openxmlformats.org/officeDocument/2006/relationships" id="268" r:id="Rba2fa58258374151"/>
   </p:sldIdLst>
   <p:sldSz cx="12192000" cy="6858000"/>
   <p:notesSz cx="6858000" cy="9144000"/>
@@ -62,7 +62,7 @@
   </p:cSld>
   <p:clrMap bg1="lt1" tx1="dk1" bg2="lt2" tx2="dk2" accent1="accent1" accent2="accent2" accent3="accent3" accent4="accent4" accent5="accent5" accent6="accent6" hlink="hlink" folHlink="folHlink"/>
   <p:sldLayoutIdLst>
-    <p:sldLayoutId xmlns:r="http://schemas.openxmlformats.org/officeDocument/2006/relationships" id="2147483649" r:id="Rbdef295badb54502"/>
+    <p:sldLayoutId xmlns:r="http://schemas.openxmlformats.org/officeDocument/2006/relationships" id="2147483649" r:id="R028ba45b1cac45e7"/>
   </p:sldLayoutIdLst>
   <p:txStyles>
     <p:titleStyle>
@@ -610,10 +610,10 @@
       </p:grpSpPr>
       <p:sp>
         <p:nvSpPr>
-          <p:cNvPr id="7" name="">
-            <a:extLst xmlns:a="http://schemas.openxmlformats.org/drawingml/2006/main">
-              <a:ext uri="{FF2B5EF4-FFF2-40B4-BE49-F238E27FC236}">
-                <a16:creationId xmlns:a16="http://schemas.microsoft.com/office/drawing/2014/main" id="{E5FC45AB-41A4-4FD6-9087-9F2BE276CEF2}"/>
+          <p:cNvPr id="8" name="">
+            <a:extLst xmlns:a="http://schemas.openxmlformats.org/drawingml/2006/main">
+              <a:ext uri="{FF2B5EF4-FFF2-40B4-BE49-F238E27FC236}">
+                <a16:creationId xmlns:a16="http://schemas.microsoft.com/office/drawing/2014/main" id="{C15E9042-B6B5-42FA-A21A-B9314AEEEE1F}"/>
               </a:ext>
             </a:extLst>
           </p:cNvPr>
@@ -670,7 +670,7 @@
           <p:cNvPr id="2" name="">
             <a:extLst xmlns:a="http://schemas.openxmlformats.org/drawingml/2006/main">
               <a:ext uri="{FF2B5EF4-FFF2-40B4-BE49-F238E27FC236}">
-                <a16:creationId xmlns:a16="http://schemas.microsoft.com/office/drawing/2014/main" id="{7713B2D4-CF8F-4A6B-955C-F42236DCD1EE}"/>
+                <a16:creationId xmlns:a16="http://schemas.microsoft.com/office/drawing/2014/main" id="{C408FCC7-6570-4CBC-86D9-1D09C910C581}"/>
               </a:ext>
             </a:extLst>
           </p:cNvPr>
@@ -724,20 +724,20 @@
       </p:sp>
       <p:pic>
         <p:nvPicPr>
-          <p:cNvPr id="9" name=""/>
+          <p:cNvPr id="10" name=""/>
           <p:cNvPicPr>
             <a:picLocks xmlns:a="http://schemas.openxmlformats.org/drawingml/2006/main" noChangeAspect="1"/>
           </p:cNvPicPr>
           <p:nvPr/>
         </p:nvPicPr>
         <p:blipFill>
-          <a:blip xmlns:r="http://schemas.openxmlformats.org/officeDocument/2006/relationships" xmlns:a="http://schemas.openxmlformats.org/drawingml/2006/main" r:embed="Ra21c8b8888ff40a4"/>
+          <a:blip xmlns:r="http://schemas.openxmlformats.org/officeDocument/2006/relationships" xmlns:a="http://schemas.openxmlformats.org/drawingml/2006/main" r:embed="R7924e348fd6548ed"/>
           <a:stretch xmlns:a="http://schemas.openxmlformats.org/drawingml/2006/main"/>
         </p:blipFill>
         <p:spPr>
           <a:xfrm xmlns:a="http://schemas.openxmlformats.org/drawingml/2006/main">
-            <a:off x="609600" y="1283203"/>
-            <a:ext cx="1714500" cy="338718"/>
+            <a:off x="10287000" y="925435"/>
+            <a:ext cx="1238250" cy="244630"/>
           </a:xfrm>
           <a:prstGeom xmlns:a="http://schemas.openxmlformats.org/drawingml/2006/main" prst="rect">
             <a:avLst/>
@@ -749,36 +749,36 @@
           <p:cNvPr id="4" name="">
             <a:extLst xmlns:a="http://schemas.openxmlformats.org/drawingml/2006/main">
               <a:ext uri="{FF2B5EF4-FFF2-40B4-BE49-F238E27FC236}">
-                <a16:creationId xmlns:a16="http://schemas.microsoft.com/office/drawing/2014/main" id="{490C9D12-1359-43DC-AFC8-F96B9F32DC25}"/>
-              </a:ext>
-            </a:extLst>
-          </p:cNvPr>
-          <p:cNvSpPr>
-            <a:spLocks xmlns:a="http://schemas.openxmlformats.org/drawingml/2006/main" noGrp="1"/>
-          </p:cNvSpPr>
-          <p:nvPr/>
-        </p:nvSpPr>
-        <p:spPr>
-          <a:xfrm xmlns:a="http://schemas.openxmlformats.org/drawingml/2006/main">
-            <a:off x="609600" y="2143125"/>
-            <a:ext cx="10953750" cy="1381125"/>
-          </a:xfrm>
-          <a:prstGeom xmlns:a="http://schemas.openxmlformats.org/drawingml/2006/main" prst="rect">
-            <a:avLst/>
-          </a:prstGeom>
-          <a:noFill xmlns:a="http://schemas.openxmlformats.org/drawingml/2006/main"/>
-          <a:ln xmlns:a="http://schemas.openxmlformats.org/drawingml/2006/main" w="0">
-            <a:noFill/>
-          </a:ln>
-        </p:spPr>
-        <p:txBody>
-          <a:bodyPr xmlns:a="http://schemas.openxmlformats.org/drawingml/2006/main">
-            <a:noAutofit/>
-          </a:bodyPr>
-          <a:lstStyle xmlns:a="http://schemas.openxmlformats.org/drawingml/2006/main"/>
-          <a:p xmlns:a="http://schemas.openxmlformats.org/drawingml/2006/main">
-            <a:pPr>
-              <a:defRPr sz="4350" b="1">
+                <a16:creationId xmlns:a16="http://schemas.microsoft.com/office/drawing/2014/main" id="{5ACEA90B-6E5B-4404-9763-369EE7538F03}"/>
+              </a:ext>
+            </a:extLst>
+          </p:cNvPr>
+          <p:cNvSpPr>
+            <a:spLocks xmlns:a="http://schemas.openxmlformats.org/drawingml/2006/main" noGrp="1"/>
+          </p:cNvSpPr>
+          <p:nvPr/>
+        </p:nvSpPr>
+        <p:spPr>
+          <a:xfrm xmlns:a="http://schemas.openxmlformats.org/drawingml/2006/main">
+            <a:off x="609600" y="857250"/>
+            <a:ext cx="9429750" cy="714375"/>
+          </a:xfrm>
+          <a:prstGeom xmlns:a="http://schemas.openxmlformats.org/drawingml/2006/main" prst="rect">
+            <a:avLst/>
+          </a:prstGeom>
+          <a:noFill xmlns:a="http://schemas.openxmlformats.org/drawingml/2006/main"/>
+          <a:ln xmlns:a="http://schemas.openxmlformats.org/drawingml/2006/main" w="0">
+            <a:noFill/>
+          </a:ln>
+        </p:spPr>
+        <p:txBody>
+          <a:bodyPr xmlns:a="http://schemas.openxmlformats.org/drawingml/2006/main">
+            <a:noAutofit/>
+          </a:bodyPr>
+          <a:lstStyle xmlns:a="http://schemas.openxmlformats.org/drawingml/2006/main"/>
+          <a:p xmlns:a="http://schemas.openxmlformats.org/drawingml/2006/main">
+            <a:pPr>
+              <a:defRPr sz="3300" b="1">
                 <a:solidFill>
                   <a:srgbClr val="FFFFFF"/>
                 </a:solidFill>
@@ -788,7 +788,7 @@
               </a:defRPr>
             </a:pPr>
             <a:r>
-              <a:rPr sz="4350" b="1">
+              <a:rPr sz="3300" b="1">
                 <a:solidFill>
                   <a:srgbClr val="FFFFFF"/>
                 </a:solidFill>
@@ -801,51 +801,73 @@
           </a:p>
         </p:txBody>
       </p:sp>
-      <p:sp>
-        <p:nvSpPr>
-          <p:cNvPr id="5" name="">
-            <a:extLst xmlns:a="http://schemas.openxmlformats.org/drawingml/2006/main">
-              <a:ext uri="{FF2B5EF4-FFF2-40B4-BE49-F238E27FC236}">
-                <a16:creationId xmlns:a16="http://schemas.microsoft.com/office/drawing/2014/main" id="{8C175BC0-28CD-4D76-B8F3-49DFDB46DC55}"/>
-              </a:ext>
-            </a:extLst>
-          </p:cNvPr>
-          <p:cNvSpPr>
-            <a:spLocks xmlns:a="http://schemas.openxmlformats.org/drawingml/2006/main" noGrp="1"/>
-          </p:cNvSpPr>
-          <p:nvPr/>
-        </p:nvSpPr>
-        <p:spPr>
-          <a:xfrm xmlns:a="http://schemas.openxmlformats.org/drawingml/2006/main">
-            <a:off x="609600" y="3810000"/>
-            <a:ext cx="10668000" cy="1714500"/>
-          </a:xfrm>
-          <a:prstGeom xmlns:a="http://schemas.openxmlformats.org/drawingml/2006/main" prst="rect">
-            <a:avLst/>
-          </a:prstGeom>
-          <a:noFill xmlns:a="http://schemas.openxmlformats.org/drawingml/2006/main"/>
-          <a:ln xmlns:a="http://schemas.openxmlformats.org/drawingml/2006/main" w="0">
-            <a:noFill/>
-          </a:ln>
-        </p:spPr>
-        <p:txBody>
-          <a:bodyPr xmlns:a="http://schemas.openxmlformats.org/drawingml/2006/main">
-            <a:noAutofit/>
-          </a:bodyPr>
-          <a:lstStyle xmlns:a="http://schemas.openxmlformats.org/drawingml/2006/main"/>
-          <a:p xmlns:a="http://schemas.openxmlformats.org/drawingml/2006/main">
-            <a:pPr>
-              <a:defRPr sz="2250" b="0">
-                <a:solidFill>
-                  <a:srgbClr val="EAF1FF"/>
-                </a:solidFill>
-                <a:latin typeface="Arial"/>
-                <a:ea typeface="Arial"/>
-                <a:cs typeface="Arial"/>
-              </a:defRPr>
-            </a:pPr>
-            <a:r>
-              <a:rPr sz="2250" b="0">
+      <p:pic>
+        <p:nvPicPr>
+          <p:cNvPr id="12" name=""/>
+          <p:cNvPicPr>
+            <a:picLocks xmlns:a="http://schemas.openxmlformats.org/drawingml/2006/main" noChangeAspect="1"/>
+          </p:cNvPicPr>
+          <p:nvPr/>
+        </p:nvPicPr>
+        <p:blipFill>
+          <a:blip xmlns:r="http://schemas.openxmlformats.org/officeDocument/2006/relationships" xmlns:a="http://schemas.openxmlformats.org/drawingml/2006/main" r:embed="R0a00864493f240e3"/>
+          <a:stretch xmlns:a="http://schemas.openxmlformats.org/drawingml/2006/main"/>
+        </p:blipFill>
+        <p:spPr>
+          <a:xfrm xmlns:a="http://schemas.openxmlformats.org/drawingml/2006/main">
+            <a:off x="2659297" y="1666875"/>
+            <a:ext cx="6854356" cy="3857625"/>
+          </a:xfrm>
+          <a:prstGeom xmlns:a="http://schemas.openxmlformats.org/drawingml/2006/main" prst="rect">
+            <a:avLst/>
+          </a:prstGeom>
+        </p:spPr>
+      </p:pic>
+      <p:sp>
+        <p:nvSpPr>
+          <p:cNvPr id="6" name="">
+            <a:extLst xmlns:a="http://schemas.openxmlformats.org/drawingml/2006/main">
+              <a:ext uri="{FF2B5EF4-FFF2-40B4-BE49-F238E27FC236}">
+                <a16:creationId xmlns:a16="http://schemas.microsoft.com/office/drawing/2014/main" id="{9FA75455-B2AB-43A2-ACEE-42778707B470}"/>
+              </a:ext>
+            </a:extLst>
+          </p:cNvPr>
+          <p:cNvSpPr>
+            <a:spLocks xmlns:a="http://schemas.openxmlformats.org/drawingml/2006/main" noGrp="1"/>
+          </p:cNvSpPr>
+          <p:nvPr/>
+        </p:nvSpPr>
+        <p:spPr>
+          <a:xfrm xmlns:a="http://schemas.openxmlformats.org/drawingml/2006/main">
+            <a:off x="609600" y="5667375"/>
+            <a:ext cx="10953750" cy="619125"/>
+          </a:xfrm>
+          <a:prstGeom xmlns:a="http://schemas.openxmlformats.org/drawingml/2006/main" prst="rect">
+            <a:avLst/>
+          </a:prstGeom>
+          <a:noFill xmlns:a="http://schemas.openxmlformats.org/drawingml/2006/main"/>
+          <a:ln xmlns:a="http://schemas.openxmlformats.org/drawingml/2006/main" w="0">
+            <a:noFill/>
+          </a:ln>
+        </p:spPr>
+        <p:txBody>
+          <a:bodyPr xmlns:a="http://schemas.openxmlformats.org/drawingml/2006/main">
+            <a:noAutofit/>
+          </a:bodyPr>
+          <a:lstStyle xmlns:a="http://schemas.openxmlformats.org/drawingml/2006/main"/>
+          <a:p xmlns:a="http://schemas.openxmlformats.org/drawingml/2006/main">
+            <a:pPr>
+              <a:defRPr sz="1725" b="0">
+                <a:solidFill>
+                  <a:srgbClr val="EAF1FF"/>
+                </a:solidFill>
+                <a:latin typeface="Arial"/>
+                <a:ea typeface="Arial"/>
+                <a:cs typeface="Arial"/>
+              </a:defRPr>
+            </a:pPr>
+            <a:r>
+              <a:rPr sz="1725" b="0">
                 <a:solidFill>
                   <a:srgbClr val="EAF1FF"/>
                 </a:solidFill>
@@ -857,23 +879,18 @@
             </a:r>
           </a:p>
           <a:p xmlns:a="http://schemas.openxmlformats.org/drawingml/2006/main">
-            <a:r>
-              <a:t/>
-            </a:r>
-          </a:p>
-          <a:p xmlns:a="http://schemas.openxmlformats.org/drawingml/2006/main">
-            <a:pPr>
-              <a:defRPr sz="2250" b="0">
-                <a:solidFill>
-                  <a:srgbClr val="EAF1FF"/>
-                </a:solidFill>
-                <a:latin typeface="Arial"/>
-                <a:ea typeface="Arial"/>
-                <a:cs typeface="Arial"/>
-              </a:defRPr>
-            </a:pPr>
-            <a:r>
-              <a:rPr sz="2250" b="0">
+            <a:pPr>
+              <a:defRPr sz="1725" b="0">
+                <a:solidFill>
+                  <a:srgbClr val="EAF1FF"/>
+                </a:solidFill>
+                <a:latin typeface="Arial"/>
+                <a:ea typeface="Arial"/>
+                <a:cs typeface="Arial"/>
+              </a:defRPr>
+            </a:pPr>
+            <a:r>
+              <a:rPr sz="1725" b="0">
                 <a:solidFill>
                   <a:srgbClr val="EAF1FF"/>
                 </a:solidFill>
@@ -888,10 +905,10 @@
       </p:sp>
       <p:sp>
         <p:nvSpPr>
-          <p:cNvPr id="6" name="">
-            <a:extLst xmlns:a="http://schemas.openxmlformats.org/drawingml/2006/main">
-              <a:ext uri="{FF2B5EF4-FFF2-40B4-BE49-F238E27FC236}">
-                <a16:creationId xmlns:a16="http://schemas.microsoft.com/office/drawing/2014/main" id="{5D112000-2D19-4FA2-8A3A-7447A4F15746}"/>
+          <p:cNvPr id="7" name="">
+            <a:extLst xmlns:a="http://schemas.openxmlformats.org/drawingml/2006/main">
+              <a:ext uri="{FF2B5EF4-FFF2-40B4-BE49-F238E27FC236}">
+                <a16:creationId xmlns:a16="http://schemas.microsoft.com/office/drawing/2014/main" id="{4F6C8911-DF47-4055-A4E2-CBD5FC5AD429}"/>
               </a:ext>
             </a:extLst>
           </p:cNvPr>
@@ -946,7 +963,7 @@
     </p:spTree>
     <p:extLst>
       <p:ext uri="{BB962C8B-B14F-4D97-AF65-F5344CB8AC3E}">
-        <p14:creationId xmlns:p14="http://schemas.microsoft.com/office/powerpoint/2010/main" val="246310022"/>
+        <p14:creationId xmlns:p14="http://schemas.microsoft.com/office/powerpoint/2010/main" val="183655256"/>
       </p:ext>
     </p:extLst>
   </p:cSld>
@@ -977,7 +994,7 @@
           <p:cNvPr id="7" name="">
             <a:extLst xmlns:a="http://schemas.openxmlformats.org/drawingml/2006/main">
               <a:ext uri="{FF2B5EF4-FFF2-40B4-BE49-F238E27FC236}">
-                <a16:creationId xmlns:a16="http://schemas.microsoft.com/office/drawing/2014/main" id="{79F4D9AC-10C7-4106-9C70-9A8E555CD036}"/>
+                <a16:creationId xmlns:a16="http://schemas.microsoft.com/office/drawing/2014/main" id="{5F506EEA-0846-4298-BDFB-1A3F6DC96B75}"/>
               </a:ext>
             </a:extLst>
           </p:cNvPr>
@@ -1034,7 +1051,7 @@
           <p:cNvPr id="2" name="">
             <a:extLst xmlns:a="http://schemas.openxmlformats.org/drawingml/2006/main">
               <a:ext uri="{FF2B5EF4-FFF2-40B4-BE49-F238E27FC236}">
-                <a16:creationId xmlns:a16="http://schemas.microsoft.com/office/drawing/2014/main" id="{C7F0A88C-25E3-4895-9847-E9E435813F1F}"/>
+                <a16:creationId xmlns:a16="http://schemas.microsoft.com/office/drawing/2014/main" id="{0F601648-76AF-4322-BE24-F0AEF9B23454}"/>
               </a:ext>
             </a:extLst>
           </p:cNvPr>
@@ -1091,7 +1108,7 @@
           <p:cNvPr id="3" name="">
             <a:extLst xmlns:a="http://schemas.openxmlformats.org/drawingml/2006/main">
               <a:ext uri="{FF2B5EF4-FFF2-40B4-BE49-F238E27FC236}">
-                <a16:creationId xmlns:a16="http://schemas.microsoft.com/office/drawing/2014/main" id="{8263489E-1456-42BE-92D8-34E202BB79FB}"/>
+                <a16:creationId xmlns:a16="http://schemas.microsoft.com/office/drawing/2014/main" id="{40EB7405-A989-455F-A547-48FA9CCE23BD}"/>
               </a:ext>
             </a:extLst>
           </p:cNvPr>
@@ -1148,7 +1165,7 @@
           <p:cNvPr id="4" name="">
             <a:extLst xmlns:a="http://schemas.openxmlformats.org/drawingml/2006/main">
               <a:ext uri="{FF2B5EF4-FFF2-40B4-BE49-F238E27FC236}">
-                <a16:creationId xmlns:a16="http://schemas.microsoft.com/office/drawing/2014/main" id="{4E7203C1-A3DD-4FA2-A2EC-889C703DAC51}"/>
+                <a16:creationId xmlns:a16="http://schemas.microsoft.com/office/drawing/2014/main" id="{D072BF3A-CB89-4879-8599-B22247E408C1}"/>
               </a:ext>
             </a:extLst>
           </p:cNvPr>
@@ -1289,7 +1306,7 @@
           <p:cNvPr id="5" name="">
             <a:extLst xmlns:a="http://schemas.openxmlformats.org/drawingml/2006/main">
               <a:ext uri="{FF2B5EF4-FFF2-40B4-BE49-F238E27FC236}">
-                <a16:creationId xmlns:a16="http://schemas.microsoft.com/office/drawing/2014/main" id="{DEC539A8-2128-47C3-A1C9-2CA78F5F5634}"/>
+                <a16:creationId xmlns:a16="http://schemas.microsoft.com/office/drawing/2014/main" id="{01B2AC1C-F811-493E-98D3-EB1B5CCD843D}"/>
               </a:ext>
             </a:extLst>
           </p:cNvPr>
@@ -1346,7 +1363,7 @@
           <p:cNvPr id="6" name="">
             <a:extLst xmlns:a="http://schemas.openxmlformats.org/drawingml/2006/main">
               <a:ext uri="{FF2B5EF4-FFF2-40B4-BE49-F238E27FC236}">
-                <a16:creationId xmlns:a16="http://schemas.microsoft.com/office/drawing/2014/main" id="{D1372C7A-E2F3-4271-AA49-988BA7B72302}"/>
+                <a16:creationId xmlns:a16="http://schemas.microsoft.com/office/drawing/2014/main" id="{8366EDD3-32A3-4FE1-B0D9-47CDC89FA561}"/>
               </a:ext>
             </a:extLst>
           </p:cNvPr>
@@ -1401,7 +1418,7 @@
     </p:spTree>
     <p:extLst>
       <p:ext uri="{BB962C8B-B14F-4D97-AF65-F5344CB8AC3E}">
-        <p14:creationId xmlns:p14="http://schemas.microsoft.com/office/powerpoint/2010/main" val="1955680618"/>
+        <p14:creationId xmlns:p14="http://schemas.microsoft.com/office/powerpoint/2010/main" val="391738303"/>
       </p:ext>
     </p:extLst>
   </p:cSld>
@@ -1432,7 +1449,7 @@
           <p:cNvPr id="5" name="">
             <a:extLst xmlns:a="http://schemas.openxmlformats.org/drawingml/2006/main">
               <a:ext uri="{FF2B5EF4-FFF2-40B4-BE49-F238E27FC236}">
-                <a16:creationId xmlns:a16="http://schemas.microsoft.com/office/drawing/2014/main" id="{11EA69F9-602A-4E1E-9638-2BEC0EA6F573}"/>
+                <a16:creationId xmlns:a16="http://schemas.microsoft.com/office/drawing/2014/main" id="{545CE3D6-B712-48E0-9BB9-C42809E39B32}"/>
               </a:ext>
             </a:extLst>
           </p:cNvPr>
@@ -1489,7 +1506,7 @@
           <p:cNvPr id="2" name="">
             <a:extLst xmlns:a="http://schemas.openxmlformats.org/drawingml/2006/main">
               <a:ext uri="{FF2B5EF4-FFF2-40B4-BE49-F238E27FC236}">
-                <a16:creationId xmlns:a16="http://schemas.microsoft.com/office/drawing/2014/main" id="{213582CD-50D0-4EBC-BCDD-F7313B061EB6}"/>
+                <a16:creationId xmlns:a16="http://schemas.microsoft.com/office/drawing/2014/main" id="{6C3EB503-E4BA-48DE-A44E-8B84E8C08FDF}"/>
               </a:ext>
             </a:extLst>
           </p:cNvPr>
@@ -1546,7 +1563,7 @@
           <p:cNvPr id="3" name="">
             <a:extLst xmlns:a="http://schemas.openxmlformats.org/drawingml/2006/main">
               <a:ext uri="{FF2B5EF4-FFF2-40B4-BE49-F238E27FC236}">
-                <a16:creationId xmlns:a16="http://schemas.microsoft.com/office/drawing/2014/main" id="{02EBECB8-F0BC-49C7-936D-5858FCEF8404}"/>
+                <a16:creationId xmlns:a16="http://schemas.microsoft.com/office/drawing/2014/main" id="{5F06BFC6-EBFE-4FD6-8FFC-6C56471DB531}"/>
               </a:ext>
             </a:extLst>
           </p:cNvPr>
@@ -1603,7 +1620,7 @@
           <p:cNvPr id="4" name="">
             <a:extLst xmlns:a="http://schemas.openxmlformats.org/drawingml/2006/main">
               <a:ext uri="{FF2B5EF4-FFF2-40B4-BE49-F238E27FC236}">
-                <a16:creationId xmlns:a16="http://schemas.microsoft.com/office/drawing/2014/main" id="{59B55D93-EBE0-4D9F-BF71-34F7F3B7BB43}"/>
+                <a16:creationId xmlns:a16="http://schemas.microsoft.com/office/drawing/2014/main" id="{B975BA47-8EC5-4DD8-8D84-D04300230DAC}"/>
               </a:ext>
             </a:extLst>
           </p:cNvPr>
@@ -1742,7 +1759,7 @@
     </p:spTree>
     <p:extLst>
       <p:ext uri="{BB962C8B-B14F-4D97-AF65-F5344CB8AC3E}">
-        <p14:creationId xmlns:p14="http://schemas.microsoft.com/office/powerpoint/2010/main" val="2123960569"/>
+        <p14:creationId xmlns:p14="http://schemas.microsoft.com/office/powerpoint/2010/main" val="1132960440"/>
       </p:ext>
     </p:extLst>
   </p:cSld>
@@ -1773,7 +1790,7 @@
           <p:cNvPr id="6" name="">
             <a:extLst xmlns:a="http://schemas.openxmlformats.org/drawingml/2006/main">
               <a:ext uri="{FF2B5EF4-FFF2-40B4-BE49-F238E27FC236}">
-                <a16:creationId xmlns:a16="http://schemas.microsoft.com/office/drawing/2014/main" id="{8CFAEB60-A29A-4D28-BF41-3EC1FA62BB07}"/>
+                <a16:creationId xmlns:a16="http://schemas.microsoft.com/office/drawing/2014/main" id="{ED9C2379-CB50-4126-B73C-4C22FE2C3FD5}"/>
               </a:ext>
             </a:extLst>
           </p:cNvPr>
@@ -1830,7 +1847,7 @@
           <p:cNvPr id="2" name="">
             <a:extLst xmlns:a="http://schemas.openxmlformats.org/drawingml/2006/main">
               <a:ext uri="{FF2B5EF4-FFF2-40B4-BE49-F238E27FC236}">
-                <a16:creationId xmlns:a16="http://schemas.microsoft.com/office/drawing/2014/main" id="{383CBA14-C8E6-4534-AA3D-C4C2A0CFB97C}"/>
+                <a16:creationId xmlns:a16="http://schemas.microsoft.com/office/drawing/2014/main" id="{59828FCF-80AA-40B7-B968-8249E5B094C7}"/>
               </a:ext>
             </a:extLst>
           </p:cNvPr>
@@ -1887,7 +1904,7 @@
           <p:cNvPr id="3" name="">
             <a:extLst xmlns:a="http://schemas.openxmlformats.org/drawingml/2006/main">
               <a:ext uri="{FF2B5EF4-FFF2-40B4-BE49-F238E27FC236}">
-                <a16:creationId xmlns:a16="http://schemas.microsoft.com/office/drawing/2014/main" id="{3243B064-D66B-4A67-A8DF-2678CB957E21}"/>
+                <a16:creationId xmlns:a16="http://schemas.microsoft.com/office/drawing/2014/main" id="{33FA4260-5D65-433A-9753-645F89E96DAC}"/>
               </a:ext>
             </a:extLst>
           </p:cNvPr>
@@ -1944,7 +1961,7 @@
           <p:cNvPr id="4" name="">
             <a:extLst xmlns:a="http://schemas.openxmlformats.org/drawingml/2006/main">
               <a:ext uri="{FF2B5EF4-FFF2-40B4-BE49-F238E27FC236}">
-                <a16:creationId xmlns:a16="http://schemas.microsoft.com/office/drawing/2014/main" id="{3C2B6A61-C3B2-4311-A687-CA49600881FC}"/>
+                <a16:creationId xmlns:a16="http://schemas.microsoft.com/office/drawing/2014/main" id="{5E922C0A-DAFC-4397-BF4C-9C405FC31BA1}"/>
               </a:ext>
             </a:extLst>
           </p:cNvPr>
@@ -2085,7 +2102,7 @@
           <p:cNvPr id="5" name="">
             <a:extLst xmlns:a="http://schemas.openxmlformats.org/drawingml/2006/main">
               <a:ext uri="{FF2B5EF4-FFF2-40B4-BE49-F238E27FC236}">
-                <a16:creationId xmlns:a16="http://schemas.microsoft.com/office/drawing/2014/main" id="{4248723C-2EAB-46BE-8E87-21ABF3CEDCB2}"/>
+                <a16:creationId xmlns:a16="http://schemas.microsoft.com/office/drawing/2014/main" id="{1F1E1303-B8E5-46AD-805D-88543741A30C}"/>
               </a:ext>
             </a:extLst>
           </p:cNvPr>
@@ -2140,7 +2157,7 @@
     </p:spTree>
     <p:extLst>
       <p:ext uri="{BB962C8B-B14F-4D97-AF65-F5344CB8AC3E}">
-        <p14:creationId xmlns:p14="http://schemas.microsoft.com/office/powerpoint/2010/main" val="49094417"/>
+        <p14:creationId xmlns:p14="http://schemas.microsoft.com/office/powerpoint/2010/main" val="254272183"/>
       </p:ext>
     </p:extLst>
   </p:cSld>
@@ -2171,7 +2188,7 @@
           <p:cNvPr id="6" name="">
             <a:extLst xmlns:a="http://schemas.openxmlformats.org/drawingml/2006/main">
               <a:ext uri="{FF2B5EF4-FFF2-40B4-BE49-F238E27FC236}">
-                <a16:creationId xmlns:a16="http://schemas.microsoft.com/office/drawing/2014/main" id="{2BE419B5-E18D-4995-B072-C7D7C05BE89C}"/>
+                <a16:creationId xmlns:a16="http://schemas.microsoft.com/office/drawing/2014/main" id="{8DA7184C-6B73-4F07-891E-66B582A8B309}"/>
               </a:ext>
             </a:extLst>
           </p:cNvPr>
@@ -2228,7 +2245,7 @@
           <p:cNvPr id="2" name="">
             <a:extLst xmlns:a="http://schemas.openxmlformats.org/drawingml/2006/main">
               <a:ext uri="{FF2B5EF4-FFF2-40B4-BE49-F238E27FC236}">
-                <a16:creationId xmlns:a16="http://schemas.microsoft.com/office/drawing/2014/main" id="{09BFB1B6-F9F6-41D1-9B84-32FB57AF40FA}"/>
+                <a16:creationId xmlns:a16="http://schemas.microsoft.com/office/drawing/2014/main" id="{044DA334-A324-4911-B52C-6A473D16D909}"/>
               </a:ext>
             </a:extLst>
           </p:cNvPr>
@@ -2285,7 +2302,7 @@
           <p:cNvPr id="3" name="">
             <a:extLst xmlns:a="http://schemas.openxmlformats.org/drawingml/2006/main">
               <a:ext uri="{FF2B5EF4-FFF2-40B4-BE49-F238E27FC236}">
-                <a16:creationId xmlns:a16="http://schemas.microsoft.com/office/drawing/2014/main" id="{D91173CE-7215-4DC3-820B-BB9D8D275CE1}"/>
+                <a16:creationId xmlns:a16="http://schemas.microsoft.com/office/drawing/2014/main" id="{21856A39-9E9F-4407-8853-4B73520CF578}"/>
               </a:ext>
             </a:extLst>
           </p:cNvPr>
@@ -2342,7 +2359,7 @@
           <p:cNvPr id="4" name="">
             <a:extLst xmlns:a="http://schemas.openxmlformats.org/drawingml/2006/main">
               <a:ext uri="{FF2B5EF4-FFF2-40B4-BE49-F238E27FC236}">
-                <a16:creationId xmlns:a16="http://schemas.microsoft.com/office/drawing/2014/main" id="{6CB6470D-C59B-4923-AFCD-42D4F9C246C4}"/>
+                <a16:creationId xmlns:a16="http://schemas.microsoft.com/office/drawing/2014/main" id="{9C8C487C-FE8F-4533-A5F6-23FD2CD43B0E}"/>
               </a:ext>
             </a:extLst>
           </p:cNvPr>
@@ -2483,7 +2500,7 @@
           <p:cNvPr id="5" name="">
             <a:extLst xmlns:a="http://schemas.openxmlformats.org/drawingml/2006/main">
               <a:ext uri="{FF2B5EF4-FFF2-40B4-BE49-F238E27FC236}">
-                <a16:creationId xmlns:a16="http://schemas.microsoft.com/office/drawing/2014/main" id="{BB4BDEFB-AA4D-4342-963E-7E7845443124}"/>
+                <a16:creationId xmlns:a16="http://schemas.microsoft.com/office/drawing/2014/main" id="{3863DE54-F2A4-422B-AA0A-7AC0D1FF93A9}"/>
               </a:ext>
             </a:extLst>
           </p:cNvPr>
@@ -2538,7 +2555,7 @@
     </p:spTree>
     <p:extLst>
       <p:ext uri="{BB962C8B-B14F-4D97-AF65-F5344CB8AC3E}">
-        <p14:creationId xmlns:p14="http://schemas.microsoft.com/office/powerpoint/2010/main" val="538239160"/>
+        <p14:creationId xmlns:p14="http://schemas.microsoft.com/office/powerpoint/2010/main" val="2055470955"/>
       </p:ext>
     </p:extLst>
   </p:cSld>
@@ -2569,7 +2586,7 @@
           <p:cNvPr id="5" name="">
             <a:extLst xmlns:a="http://schemas.openxmlformats.org/drawingml/2006/main">
               <a:ext uri="{FF2B5EF4-FFF2-40B4-BE49-F238E27FC236}">
-                <a16:creationId xmlns:a16="http://schemas.microsoft.com/office/drawing/2014/main" id="{A0A6EB6E-412C-46AC-996D-8326252E5F7E}"/>
+                <a16:creationId xmlns:a16="http://schemas.microsoft.com/office/drawing/2014/main" id="{F74E0FA3-6716-452D-BA20-7E67074EA3B7}"/>
               </a:ext>
             </a:extLst>
           </p:cNvPr>
@@ -2626,7 +2643,7 @@
           <p:cNvPr id="2" name="">
             <a:extLst xmlns:a="http://schemas.openxmlformats.org/drawingml/2006/main">
               <a:ext uri="{FF2B5EF4-FFF2-40B4-BE49-F238E27FC236}">
-                <a16:creationId xmlns:a16="http://schemas.microsoft.com/office/drawing/2014/main" id="{4A9DEA3E-8C3A-45E7-A086-12671EE3383B}"/>
+                <a16:creationId xmlns:a16="http://schemas.microsoft.com/office/drawing/2014/main" id="{4D844CCD-A745-4E3C-BAAB-4D4A189464B8}"/>
               </a:ext>
             </a:extLst>
           </p:cNvPr>
@@ -2683,7 +2700,7 @@
           <p:cNvPr id="3" name="">
             <a:extLst xmlns:a="http://schemas.openxmlformats.org/drawingml/2006/main">
               <a:ext uri="{FF2B5EF4-FFF2-40B4-BE49-F238E27FC236}">
-                <a16:creationId xmlns:a16="http://schemas.microsoft.com/office/drawing/2014/main" id="{9536A816-7D57-4D04-AA73-B427013069BE}"/>
+                <a16:creationId xmlns:a16="http://schemas.microsoft.com/office/drawing/2014/main" id="{FDE579B2-796C-4B5A-903C-5FF5DD93C580}"/>
               </a:ext>
             </a:extLst>
           </p:cNvPr>
@@ -2740,7 +2757,7 @@
           <p:cNvPr id="4" name="">
             <a:extLst xmlns:a="http://schemas.openxmlformats.org/drawingml/2006/main">
               <a:ext uri="{FF2B5EF4-FFF2-40B4-BE49-F238E27FC236}">
-                <a16:creationId xmlns:a16="http://schemas.microsoft.com/office/drawing/2014/main" id="{8D3E13F1-FC1B-4C90-B094-4FE0B0345D55}"/>
+                <a16:creationId xmlns:a16="http://schemas.microsoft.com/office/drawing/2014/main" id="{5B599500-4974-49C2-A765-275B7F99428D}"/>
               </a:ext>
             </a:extLst>
           </p:cNvPr>
@@ -2851,7 +2868,7 @@
     </p:spTree>
     <p:extLst>
       <p:ext uri="{BB962C8B-B14F-4D97-AF65-F5344CB8AC3E}">
-        <p14:creationId xmlns:p14="http://schemas.microsoft.com/office/powerpoint/2010/main" val="1594243564"/>
+        <p14:creationId xmlns:p14="http://schemas.microsoft.com/office/powerpoint/2010/main" val="979660183"/>
       </p:ext>
     </p:extLst>
   </p:cSld>
@@ -2882,7 +2899,7 @@
           <p:cNvPr id="6" name="">
             <a:extLst xmlns:a="http://schemas.openxmlformats.org/drawingml/2006/main">
               <a:ext uri="{FF2B5EF4-FFF2-40B4-BE49-F238E27FC236}">
-                <a16:creationId xmlns:a16="http://schemas.microsoft.com/office/drawing/2014/main" id="{2065BB10-FD08-4A05-B43C-EAEB11020F2E}"/>
+                <a16:creationId xmlns:a16="http://schemas.microsoft.com/office/drawing/2014/main" id="{D0A6C441-75C4-40CB-83E1-69642EA71870}"/>
               </a:ext>
             </a:extLst>
           </p:cNvPr>
@@ -2939,7 +2956,7 @@
           <p:cNvPr id="2" name="">
             <a:extLst xmlns:a="http://schemas.openxmlformats.org/drawingml/2006/main">
               <a:ext uri="{FF2B5EF4-FFF2-40B4-BE49-F238E27FC236}">
-                <a16:creationId xmlns:a16="http://schemas.microsoft.com/office/drawing/2014/main" id="{D9B991B2-FDBD-4ABB-AF5B-01BD66C644C1}"/>
+                <a16:creationId xmlns:a16="http://schemas.microsoft.com/office/drawing/2014/main" id="{F4E2862D-FA41-47DB-A5DF-BFE4D2C7BA30}"/>
               </a:ext>
             </a:extLst>
           </p:cNvPr>
@@ -2996,7 +3013,7 @@
           <p:cNvPr id="3" name="">
             <a:extLst xmlns:a="http://schemas.openxmlformats.org/drawingml/2006/main">
               <a:ext uri="{FF2B5EF4-FFF2-40B4-BE49-F238E27FC236}">
-                <a16:creationId xmlns:a16="http://schemas.microsoft.com/office/drawing/2014/main" id="{DD8F841E-CB44-482D-BE0E-1C8700CF4487}"/>
+                <a16:creationId xmlns:a16="http://schemas.microsoft.com/office/drawing/2014/main" id="{27D8B2F6-9003-4DC5-A34C-D810D29581E2}"/>
               </a:ext>
             </a:extLst>
           </p:cNvPr>
@@ -3053,7 +3070,7 @@
           <p:cNvPr id="4" name="">
             <a:extLst xmlns:a="http://schemas.openxmlformats.org/drawingml/2006/main">
               <a:ext uri="{FF2B5EF4-FFF2-40B4-BE49-F238E27FC236}">
-                <a16:creationId xmlns:a16="http://schemas.microsoft.com/office/drawing/2014/main" id="{A27A6763-F617-486D-80A6-306672FA0BB7}"/>
+                <a16:creationId xmlns:a16="http://schemas.microsoft.com/office/drawing/2014/main" id="{00462044-7E43-45AE-9BF9-2A0D76DFDB52}"/>
               </a:ext>
             </a:extLst>
           </p:cNvPr>
@@ -3194,7 +3211,7 @@
           <p:cNvPr id="5" name="">
             <a:extLst xmlns:a="http://schemas.openxmlformats.org/drawingml/2006/main">
               <a:ext uri="{FF2B5EF4-FFF2-40B4-BE49-F238E27FC236}">
-                <a16:creationId xmlns:a16="http://schemas.microsoft.com/office/drawing/2014/main" id="{6856D12B-FD4C-402B-A147-3E9AD8F280BF}"/>
+                <a16:creationId xmlns:a16="http://schemas.microsoft.com/office/drawing/2014/main" id="{6EE5883F-677A-40F4-95E8-464F4C4D0910}"/>
               </a:ext>
             </a:extLst>
           </p:cNvPr>
@@ -3249,7 +3266,7 @@
     </p:spTree>
     <p:extLst>
       <p:ext uri="{BB962C8B-B14F-4D97-AF65-F5344CB8AC3E}">
-        <p14:creationId xmlns:p14="http://schemas.microsoft.com/office/powerpoint/2010/main" val="1209936178"/>
+        <p14:creationId xmlns:p14="http://schemas.microsoft.com/office/powerpoint/2010/main" val="1023654426"/>
       </p:ext>
     </p:extLst>
   </p:cSld>
@@ -3280,7 +3297,7 @@
           <p:cNvPr id="7" name="">
             <a:extLst xmlns:a="http://schemas.openxmlformats.org/drawingml/2006/main">
               <a:ext uri="{FF2B5EF4-FFF2-40B4-BE49-F238E27FC236}">
-                <a16:creationId xmlns:a16="http://schemas.microsoft.com/office/drawing/2014/main" id="{B7112F0B-38CF-417F-8956-1E47FC4D752E}"/>
+                <a16:creationId xmlns:a16="http://schemas.microsoft.com/office/drawing/2014/main" id="{631A586D-FEBA-489A-AFB2-03FFD34FA284}"/>
               </a:ext>
             </a:extLst>
           </p:cNvPr>
@@ -3337,7 +3354,7 @@
           <p:cNvPr id="2" name="">
             <a:extLst xmlns:a="http://schemas.openxmlformats.org/drawingml/2006/main">
               <a:ext uri="{FF2B5EF4-FFF2-40B4-BE49-F238E27FC236}">
-                <a16:creationId xmlns:a16="http://schemas.microsoft.com/office/drawing/2014/main" id="{B34E7267-632A-4D58-9BDC-A4AE436F6ADD}"/>
+                <a16:creationId xmlns:a16="http://schemas.microsoft.com/office/drawing/2014/main" id="{B46B20F7-724C-4081-80EC-D9FD4D9270AB}"/>
               </a:ext>
             </a:extLst>
           </p:cNvPr>
@@ -3394,7 +3411,7 @@
           <p:cNvPr id="3" name="">
             <a:extLst xmlns:a="http://schemas.openxmlformats.org/drawingml/2006/main">
               <a:ext uri="{FF2B5EF4-FFF2-40B4-BE49-F238E27FC236}">
-                <a16:creationId xmlns:a16="http://schemas.microsoft.com/office/drawing/2014/main" id="{7D5896F0-6E80-4F8B-AD85-A09C7F193A4B}"/>
+                <a16:creationId xmlns:a16="http://schemas.microsoft.com/office/drawing/2014/main" id="{60B89869-CF4F-44D9-9566-D152A223BC07}"/>
               </a:ext>
             </a:extLst>
           </p:cNvPr>
@@ -3455,7 +3472,7 @@
           <p:nvPr/>
         </p:nvPicPr>
         <p:blipFill>
-          <a:blip xmlns:r="http://schemas.openxmlformats.org/officeDocument/2006/relationships" xmlns:a="http://schemas.openxmlformats.org/drawingml/2006/main" r:embed="R2f41d167e5894cb7"/>
+          <a:blip xmlns:r="http://schemas.openxmlformats.org/officeDocument/2006/relationships" xmlns:a="http://schemas.openxmlformats.org/drawingml/2006/main" r:embed="R70608a1376a645e4"/>
           <a:stretch xmlns:a="http://schemas.openxmlformats.org/drawingml/2006/main"/>
         </p:blipFill>
         <p:spPr>
@@ -3473,7 +3490,7 @@
           <p:cNvPr id="5" name="">
             <a:extLst xmlns:a="http://schemas.openxmlformats.org/drawingml/2006/main">
               <a:ext uri="{FF2B5EF4-FFF2-40B4-BE49-F238E27FC236}">
-                <a16:creationId xmlns:a16="http://schemas.microsoft.com/office/drawing/2014/main" id="{CC61A605-CC30-459C-A5D9-79B6BDD2E493}"/>
+                <a16:creationId xmlns:a16="http://schemas.microsoft.com/office/drawing/2014/main" id="{A519099D-1E27-4C81-A630-3FC1C0E56379}"/>
               </a:ext>
             </a:extLst>
           </p:cNvPr>
@@ -3530,7 +3547,7 @@
           <p:cNvPr id="6" name="">
             <a:extLst xmlns:a="http://schemas.openxmlformats.org/drawingml/2006/main">
               <a:ext uri="{FF2B5EF4-FFF2-40B4-BE49-F238E27FC236}">
-                <a16:creationId xmlns:a16="http://schemas.microsoft.com/office/drawing/2014/main" id="{B7569A0D-79AA-4379-829A-63AA941B60CB}"/>
+                <a16:creationId xmlns:a16="http://schemas.microsoft.com/office/drawing/2014/main" id="{63BE96A3-9532-41B8-A7B0-8B60231D4999}"/>
               </a:ext>
             </a:extLst>
           </p:cNvPr>
@@ -3585,7 +3602,7 @@
     </p:spTree>
     <p:extLst>
       <p:ext uri="{BB962C8B-B14F-4D97-AF65-F5344CB8AC3E}">
-        <p14:creationId xmlns:p14="http://schemas.microsoft.com/office/powerpoint/2010/main" val="192362296"/>
+        <p14:creationId xmlns:p14="http://schemas.microsoft.com/office/powerpoint/2010/main" val="797856081"/>
       </p:ext>
     </p:extLst>
   </p:cSld>
@@ -3616,7 +3633,7 @@
           <p:cNvPr id="7" name="">
             <a:extLst xmlns:a="http://schemas.openxmlformats.org/drawingml/2006/main">
               <a:ext uri="{FF2B5EF4-FFF2-40B4-BE49-F238E27FC236}">
-                <a16:creationId xmlns:a16="http://schemas.microsoft.com/office/drawing/2014/main" id="{D7CF1BFA-2E73-4A19-A216-8050D78739B1}"/>
+                <a16:creationId xmlns:a16="http://schemas.microsoft.com/office/drawing/2014/main" id="{680C6BF3-E6F0-4576-A2A8-DD4FC6661A08}"/>
               </a:ext>
             </a:extLst>
           </p:cNvPr>
@@ -3673,7 +3690,7 @@
           <p:cNvPr id="2" name="">
             <a:extLst xmlns:a="http://schemas.openxmlformats.org/drawingml/2006/main">
               <a:ext uri="{FF2B5EF4-FFF2-40B4-BE49-F238E27FC236}">
-                <a16:creationId xmlns:a16="http://schemas.microsoft.com/office/drawing/2014/main" id="{8794787B-0D27-4B5A-9215-E1E2B1A13430}"/>
+                <a16:creationId xmlns:a16="http://schemas.microsoft.com/office/drawing/2014/main" id="{BD0D6422-285E-4595-8375-2211DC750318}"/>
               </a:ext>
             </a:extLst>
           </p:cNvPr>
@@ -3730,7 +3747,7 @@
           <p:cNvPr id="3" name="">
             <a:extLst xmlns:a="http://schemas.openxmlformats.org/drawingml/2006/main">
               <a:ext uri="{FF2B5EF4-FFF2-40B4-BE49-F238E27FC236}">
-                <a16:creationId xmlns:a16="http://schemas.microsoft.com/office/drawing/2014/main" id="{B68ECB4E-7EF8-4A3D-8543-8B8255F422E4}"/>
+                <a16:creationId xmlns:a16="http://schemas.microsoft.com/office/drawing/2014/main" id="{FCAAD73E-E923-405A-873B-80534A92875C}"/>
               </a:ext>
             </a:extLst>
           </p:cNvPr>
@@ -3787,7 +3804,7 @@
           <p:cNvPr id="4" name="">
             <a:extLst xmlns:a="http://schemas.openxmlformats.org/drawingml/2006/main">
               <a:ext uri="{FF2B5EF4-FFF2-40B4-BE49-F238E27FC236}">
-                <a16:creationId xmlns:a16="http://schemas.microsoft.com/office/drawing/2014/main" id="{13C3DB66-0789-467E-8D6A-CF4D207F99ED}"/>
+                <a16:creationId xmlns:a16="http://schemas.microsoft.com/office/drawing/2014/main" id="{D5DA81F8-B342-4B8E-9710-E030D7BBB7FD}"/>
               </a:ext>
             </a:extLst>
           </p:cNvPr>
@@ -3928,7 +3945,7 @@
           <p:cNvPr id="5" name="">
             <a:extLst xmlns:a="http://schemas.openxmlformats.org/drawingml/2006/main">
               <a:ext uri="{FF2B5EF4-FFF2-40B4-BE49-F238E27FC236}">
-                <a16:creationId xmlns:a16="http://schemas.microsoft.com/office/drawing/2014/main" id="{C469D072-5D1D-432B-B7A6-0A6E025FA8F3}"/>
+                <a16:creationId xmlns:a16="http://schemas.microsoft.com/office/drawing/2014/main" id="{A2611BA2-158F-4D69-A5CB-4B159D13F4E7}"/>
               </a:ext>
             </a:extLst>
           </p:cNvPr>
@@ -3985,7 +4002,7 @@
           <p:cNvPr id="6" name="">
             <a:extLst xmlns:a="http://schemas.openxmlformats.org/drawingml/2006/main">
               <a:ext uri="{FF2B5EF4-FFF2-40B4-BE49-F238E27FC236}">
-                <a16:creationId xmlns:a16="http://schemas.microsoft.com/office/drawing/2014/main" id="{5CC81785-AAC0-4A8F-8533-B97FEE2EAE05}"/>
+                <a16:creationId xmlns:a16="http://schemas.microsoft.com/office/drawing/2014/main" id="{73E410F0-98DA-4DAB-AD0F-B3204E16A646}"/>
               </a:ext>
             </a:extLst>
           </p:cNvPr>
@@ -4040,7 +4057,7 @@
     </p:spTree>
     <p:extLst>
       <p:ext uri="{BB962C8B-B14F-4D97-AF65-F5344CB8AC3E}">
-        <p14:creationId xmlns:p14="http://schemas.microsoft.com/office/powerpoint/2010/main" val="565577413"/>
+        <p14:creationId xmlns:p14="http://schemas.microsoft.com/office/powerpoint/2010/main" val="17610791"/>
       </p:ext>
     </p:extLst>
   </p:cSld>
@@ -4071,7 +4088,7 @@
           <p:cNvPr id="7" name="">
             <a:extLst xmlns:a="http://schemas.openxmlformats.org/drawingml/2006/main">
               <a:ext uri="{FF2B5EF4-FFF2-40B4-BE49-F238E27FC236}">
-                <a16:creationId xmlns:a16="http://schemas.microsoft.com/office/drawing/2014/main" id="{74FCCACC-A6BB-4361-B6E0-F8003E946E88}"/>
+                <a16:creationId xmlns:a16="http://schemas.microsoft.com/office/drawing/2014/main" id="{AE3DFD84-10EB-4B40-BD79-AC68D3D7F3E2}"/>
               </a:ext>
             </a:extLst>
           </p:cNvPr>
@@ -4128,7 +4145,7 @@
           <p:cNvPr id="2" name="">
             <a:extLst xmlns:a="http://schemas.openxmlformats.org/drawingml/2006/main">
               <a:ext uri="{FF2B5EF4-FFF2-40B4-BE49-F238E27FC236}">
-                <a16:creationId xmlns:a16="http://schemas.microsoft.com/office/drawing/2014/main" id="{DB2A6C42-D580-40EA-B2E9-E5C1ADC18D8E}"/>
+                <a16:creationId xmlns:a16="http://schemas.microsoft.com/office/drawing/2014/main" id="{DEE6A387-7789-445A-9C7C-2CBAC5F4109A}"/>
               </a:ext>
             </a:extLst>
           </p:cNvPr>
@@ -4185,7 +4202,7 @@
           <p:cNvPr id="3" name="">
             <a:extLst xmlns:a="http://schemas.openxmlformats.org/drawingml/2006/main">
               <a:ext uri="{FF2B5EF4-FFF2-40B4-BE49-F238E27FC236}">
-                <a16:creationId xmlns:a16="http://schemas.microsoft.com/office/drawing/2014/main" id="{D7DC3764-FD90-4B27-BE56-55F25F1FC584}"/>
+                <a16:creationId xmlns:a16="http://schemas.microsoft.com/office/drawing/2014/main" id="{0A0BF768-4B5E-47DD-8CE3-13362219F251}"/>
               </a:ext>
             </a:extLst>
           </p:cNvPr>
@@ -4242,7 +4259,7 @@
           <p:cNvPr id="4" name="">
             <a:extLst xmlns:a="http://schemas.openxmlformats.org/drawingml/2006/main">
               <a:ext uri="{FF2B5EF4-FFF2-40B4-BE49-F238E27FC236}">
-                <a16:creationId xmlns:a16="http://schemas.microsoft.com/office/drawing/2014/main" id="{73D74167-8D91-4CB5-A1AC-F884AD4020D3}"/>
+                <a16:creationId xmlns:a16="http://schemas.microsoft.com/office/drawing/2014/main" id="{D3F77735-8576-490E-B03C-05FDFCDA301C}"/>
               </a:ext>
             </a:extLst>
           </p:cNvPr>
@@ -4383,7 +4400,7 @@
           <p:cNvPr id="5" name="">
             <a:extLst xmlns:a="http://schemas.openxmlformats.org/drawingml/2006/main">
               <a:ext uri="{FF2B5EF4-FFF2-40B4-BE49-F238E27FC236}">
-                <a16:creationId xmlns:a16="http://schemas.microsoft.com/office/drawing/2014/main" id="{CA057C8E-C070-4B19-AB27-E6AC67AE089D}"/>
+                <a16:creationId xmlns:a16="http://schemas.microsoft.com/office/drawing/2014/main" id="{EF1B6481-1492-4A21-9CFD-9DBFD2E1AF0D}"/>
               </a:ext>
             </a:extLst>
           </p:cNvPr>
@@ -4440,7 +4457,7 @@
           <p:cNvPr id="6" name="">
             <a:extLst xmlns:a="http://schemas.openxmlformats.org/drawingml/2006/main">
               <a:ext uri="{FF2B5EF4-FFF2-40B4-BE49-F238E27FC236}">
-                <a16:creationId xmlns:a16="http://schemas.microsoft.com/office/drawing/2014/main" id="{3B2DC4FB-CFC8-404B-8DA2-950D3E8E18B5}"/>
+                <a16:creationId xmlns:a16="http://schemas.microsoft.com/office/drawing/2014/main" id="{B37806A8-9DC5-4AE7-BD02-2C93F329F882}"/>
               </a:ext>
             </a:extLst>
           </p:cNvPr>
@@ -4495,7 +4512,7 @@
     </p:spTree>
     <p:extLst>
       <p:ext uri="{BB962C8B-B14F-4D97-AF65-F5344CB8AC3E}">
-        <p14:creationId xmlns:p14="http://schemas.microsoft.com/office/powerpoint/2010/main" val="1067439146"/>
+        <p14:creationId xmlns:p14="http://schemas.microsoft.com/office/powerpoint/2010/main" val="1779055496"/>
       </p:ext>
     </p:extLst>
   </p:cSld>
@@ -4526,7 +4543,7 @@
           <p:cNvPr id="7" name="">
             <a:extLst xmlns:a="http://schemas.openxmlformats.org/drawingml/2006/main">
               <a:ext uri="{FF2B5EF4-FFF2-40B4-BE49-F238E27FC236}">
-                <a16:creationId xmlns:a16="http://schemas.microsoft.com/office/drawing/2014/main" id="{C65B2113-B492-4703-81E3-77A1683537AB}"/>
+                <a16:creationId xmlns:a16="http://schemas.microsoft.com/office/drawing/2014/main" id="{83ABC99A-0FB0-4F24-9866-2545A154602C}"/>
               </a:ext>
             </a:extLst>
           </p:cNvPr>
@@ -4583,7 +4600,7 @@
           <p:cNvPr id="2" name="">
             <a:extLst xmlns:a="http://schemas.openxmlformats.org/drawingml/2006/main">
               <a:ext uri="{FF2B5EF4-FFF2-40B4-BE49-F238E27FC236}">
-                <a16:creationId xmlns:a16="http://schemas.microsoft.com/office/drawing/2014/main" id="{4E08E3FC-FBC1-4CF4-8934-CA9CC8579D57}"/>
+                <a16:creationId xmlns:a16="http://schemas.microsoft.com/office/drawing/2014/main" id="{2C0041AB-F23E-49A3-9BC5-0B780C51FDBD}"/>
               </a:ext>
             </a:extLst>
           </p:cNvPr>
@@ -4640,7 +4657,7 @@
           <p:cNvPr id="3" name="">
             <a:extLst xmlns:a="http://schemas.openxmlformats.org/drawingml/2006/main">
               <a:ext uri="{FF2B5EF4-FFF2-40B4-BE49-F238E27FC236}">
-                <a16:creationId xmlns:a16="http://schemas.microsoft.com/office/drawing/2014/main" id="{FDA063F4-D939-4578-8BE5-35D01BC93FA4}"/>
+                <a16:creationId xmlns:a16="http://schemas.microsoft.com/office/drawing/2014/main" id="{16ED07F4-7DD9-4A64-99F0-97AE802A0844}"/>
               </a:ext>
             </a:extLst>
           </p:cNvPr>
@@ -4697,7 +4714,7 @@
           <p:cNvPr id="4" name="">
             <a:extLst xmlns:a="http://schemas.openxmlformats.org/drawingml/2006/main">
               <a:ext uri="{FF2B5EF4-FFF2-40B4-BE49-F238E27FC236}">
-                <a16:creationId xmlns:a16="http://schemas.microsoft.com/office/drawing/2014/main" id="{CAE7F0A9-371A-4B55-9105-62F2B19F79D8}"/>
+                <a16:creationId xmlns:a16="http://schemas.microsoft.com/office/drawing/2014/main" id="{A27FDB26-1BA4-4EC3-B787-5310A1ABE6AC}"/>
               </a:ext>
             </a:extLst>
           </p:cNvPr>
@@ -4810,7 +4827,7 @@
           <p:cNvPr id="5" name="">
             <a:extLst xmlns:a="http://schemas.openxmlformats.org/drawingml/2006/main">
               <a:ext uri="{FF2B5EF4-FFF2-40B4-BE49-F238E27FC236}">
-                <a16:creationId xmlns:a16="http://schemas.microsoft.com/office/drawing/2014/main" id="{B9C86356-54D6-4543-8585-6425C4D26BEE}"/>
+                <a16:creationId xmlns:a16="http://schemas.microsoft.com/office/drawing/2014/main" id="{35EBBC20-63BA-451A-B163-DC52E7791E89}"/>
               </a:ext>
             </a:extLst>
           </p:cNvPr>
@@ -4867,7 +4884,7 @@
           <p:cNvPr id="6" name="">
             <a:extLst xmlns:a="http://schemas.openxmlformats.org/drawingml/2006/main">
               <a:ext uri="{FF2B5EF4-FFF2-40B4-BE49-F238E27FC236}">
-                <a16:creationId xmlns:a16="http://schemas.microsoft.com/office/drawing/2014/main" id="{9AA4AB89-9184-46E9-A1AF-DB6EE3E74216}"/>
+                <a16:creationId xmlns:a16="http://schemas.microsoft.com/office/drawing/2014/main" id="{799C0196-DDEE-44B6-97EF-4709E15A50F0}"/>
               </a:ext>
             </a:extLst>
           </p:cNvPr>
@@ -4922,7 +4939,7 @@
     </p:spTree>
     <p:extLst>
       <p:ext uri="{BB962C8B-B14F-4D97-AF65-F5344CB8AC3E}">
-        <p14:creationId xmlns:p14="http://schemas.microsoft.com/office/powerpoint/2010/main" val="1147311028"/>
+        <p14:creationId xmlns:p14="http://schemas.microsoft.com/office/powerpoint/2010/main" val="2116920105"/>
       </p:ext>
     </p:extLst>
   </p:cSld>
@@ -4953,7 +4970,7 @@
           <p:cNvPr id="6" name="">
             <a:extLst xmlns:a="http://schemas.openxmlformats.org/drawingml/2006/main">
               <a:ext uri="{FF2B5EF4-FFF2-40B4-BE49-F238E27FC236}">
-                <a16:creationId xmlns:a16="http://schemas.microsoft.com/office/drawing/2014/main" id="{EF543437-5A22-4E1C-B486-B5929A6FDEAA}"/>
+                <a16:creationId xmlns:a16="http://schemas.microsoft.com/office/drawing/2014/main" id="{670BC616-63D4-4336-80A4-E1B9903F224A}"/>
               </a:ext>
             </a:extLst>
           </p:cNvPr>
@@ -5010,7 +5027,7 @@
           <p:cNvPr id="2" name="">
             <a:extLst xmlns:a="http://schemas.openxmlformats.org/drawingml/2006/main">
               <a:ext uri="{FF2B5EF4-FFF2-40B4-BE49-F238E27FC236}">
-                <a16:creationId xmlns:a16="http://schemas.microsoft.com/office/drawing/2014/main" id="{03AD367A-CC8D-45CD-886C-18D1BD029DC8}"/>
+                <a16:creationId xmlns:a16="http://schemas.microsoft.com/office/drawing/2014/main" id="{6AFCA58E-15AF-4FEA-9384-974B1B0C2E0C}"/>
               </a:ext>
             </a:extLst>
           </p:cNvPr>
@@ -5067,7 +5084,7 @@
           <p:cNvPr id="3" name="">
             <a:extLst xmlns:a="http://schemas.openxmlformats.org/drawingml/2006/main">
               <a:ext uri="{FF2B5EF4-FFF2-40B4-BE49-F238E27FC236}">
-                <a16:creationId xmlns:a16="http://schemas.microsoft.com/office/drawing/2014/main" id="{D9D6FED0-96F3-4D49-A6F2-D478FAB7B284}"/>
+                <a16:creationId xmlns:a16="http://schemas.microsoft.com/office/drawing/2014/main" id="{2D21199B-6077-43B6-9CA6-1F20EDC98218}"/>
               </a:ext>
             </a:extLst>
           </p:cNvPr>
@@ -5124,7 +5141,7 @@
           <p:cNvPr id="4" name="">
             <a:extLst xmlns:a="http://schemas.openxmlformats.org/drawingml/2006/main">
               <a:ext uri="{FF2B5EF4-FFF2-40B4-BE49-F238E27FC236}">
-                <a16:creationId xmlns:a16="http://schemas.microsoft.com/office/drawing/2014/main" id="{EFD66CA7-27F6-4700-B1C1-0CB52F029B28}"/>
+                <a16:creationId xmlns:a16="http://schemas.microsoft.com/office/drawing/2014/main" id="{BB90176D-8C5F-4659-97B1-F0FE43666817}"/>
               </a:ext>
             </a:extLst>
           </p:cNvPr>
@@ -5265,7 +5282,7 @@
           <p:cNvPr id="5" name="">
             <a:extLst xmlns:a="http://schemas.openxmlformats.org/drawingml/2006/main">
               <a:ext uri="{FF2B5EF4-FFF2-40B4-BE49-F238E27FC236}">
-                <a16:creationId xmlns:a16="http://schemas.microsoft.com/office/drawing/2014/main" id="{884DC354-AE7B-45D0-98B7-9AFD83FF3EAD}"/>
+                <a16:creationId xmlns:a16="http://schemas.microsoft.com/office/drawing/2014/main" id="{191F6F20-18E2-45B6-A365-9E2CC7360F3C}"/>
               </a:ext>
             </a:extLst>
           </p:cNvPr>
@@ -5320,7 +5337,7 @@
     </p:spTree>
     <p:extLst>
       <p:ext uri="{BB962C8B-B14F-4D97-AF65-F5344CB8AC3E}">
-        <p14:creationId xmlns:p14="http://schemas.microsoft.com/office/powerpoint/2010/main" val="913328794"/>
+        <p14:creationId xmlns:p14="http://schemas.microsoft.com/office/powerpoint/2010/main" val="1073986983"/>
       </p:ext>
     </p:extLst>
   </p:cSld>
@@ -5351,7 +5368,7 @@
           <p:cNvPr id="8" name="">
             <a:extLst xmlns:a="http://schemas.openxmlformats.org/drawingml/2006/main">
               <a:ext uri="{FF2B5EF4-FFF2-40B4-BE49-F238E27FC236}">
-                <a16:creationId xmlns:a16="http://schemas.microsoft.com/office/drawing/2014/main" id="{226EE9CD-D426-46C4-BFDF-B0E168DBAA9E}"/>
+                <a16:creationId xmlns:a16="http://schemas.microsoft.com/office/drawing/2014/main" id="{5AD64DDD-1855-4912-850B-0DB0E2AD3D30}"/>
               </a:ext>
             </a:extLst>
           </p:cNvPr>
@@ -5408,7 +5425,7 @@
           <p:cNvPr id="2" name="">
             <a:extLst xmlns:a="http://schemas.openxmlformats.org/drawingml/2006/main">
               <a:ext uri="{FF2B5EF4-FFF2-40B4-BE49-F238E27FC236}">
-                <a16:creationId xmlns:a16="http://schemas.microsoft.com/office/drawing/2014/main" id="{065028CB-5C5C-4D8F-8BD3-CF266D723562}"/>
+                <a16:creationId xmlns:a16="http://schemas.microsoft.com/office/drawing/2014/main" id="{C7B79A4B-FA4B-4B22-9C3E-2484D5946C30}"/>
               </a:ext>
             </a:extLst>
           </p:cNvPr>
@@ -5465,7 +5482,7 @@
           <p:cNvPr id="3" name="">
             <a:extLst xmlns:a="http://schemas.openxmlformats.org/drawingml/2006/main">
               <a:ext uri="{FF2B5EF4-FFF2-40B4-BE49-F238E27FC236}">
-                <a16:creationId xmlns:a16="http://schemas.microsoft.com/office/drawing/2014/main" id="{3B7D20D7-F987-48F5-A441-C00FD576F7BF}"/>
+                <a16:creationId xmlns:a16="http://schemas.microsoft.com/office/drawing/2014/main" id="{EEC299CE-9FD8-4AD0-B870-D3D49C9AA1D2}"/>
               </a:ext>
             </a:extLst>
           </p:cNvPr>
@@ -5522,7 +5539,7 @@
           <p:cNvPr id="4" name="">
             <a:extLst xmlns:a="http://schemas.openxmlformats.org/drawingml/2006/main">
               <a:ext uri="{FF2B5EF4-FFF2-40B4-BE49-F238E27FC236}">
-                <a16:creationId xmlns:a16="http://schemas.microsoft.com/office/drawing/2014/main" id="{94AB20A6-3C3D-4585-B012-1E03E63904C4}"/>
+                <a16:creationId xmlns:a16="http://schemas.microsoft.com/office/drawing/2014/main" id="{B051D9EB-282A-4F0B-91E1-D8132ADC5182}"/>
               </a:ext>
             </a:extLst>
           </p:cNvPr>
@@ -5635,7 +5652,7 @@
           <p:cNvPr id="5" name="">
             <a:extLst xmlns:a="http://schemas.openxmlformats.org/drawingml/2006/main">
               <a:ext uri="{FF2B5EF4-FFF2-40B4-BE49-F238E27FC236}">
-                <a16:creationId xmlns:a16="http://schemas.microsoft.com/office/drawing/2014/main" id="{8E7070EA-B2E2-4E8A-B638-A501B57DB645}"/>
+                <a16:creationId xmlns:a16="http://schemas.microsoft.com/office/drawing/2014/main" id="{9494D115-56B9-4F8B-BC67-C164069E3192}"/>
               </a:ext>
             </a:extLst>
           </p:cNvPr>
@@ -5692,7 +5709,7 @@
           <p:cNvPr id="6" name="">
             <a:extLst xmlns:a="http://schemas.openxmlformats.org/drawingml/2006/main">
               <a:ext uri="{FF2B5EF4-FFF2-40B4-BE49-F238E27FC236}">
-                <a16:creationId xmlns:a16="http://schemas.microsoft.com/office/drawing/2014/main" id="{5D4D21C8-0A3F-4D6C-B87F-336ECB783069}"/>
+                <a16:creationId xmlns:a16="http://schemas.microsoft.com/office/drawing/2014/main" id="{EB12FE00-3F33-418A-8997-2FE5EC363833}"/>
               </a:ext>
             </a:extLst>
           </p:cNvPr>
@@ -5749,7 +5766,7 @@
           <p:cNvPr id="7" name="">
             <a:extLst xmlns:a="http://schemas.openxmlformats.org/drawingml/2006/main">
               <a:ext uri="{FF2B5EF4-FFF2-40B4-BE49-F238E27FC236}">
-                <a16:creationId xmlns:a16="http://schemas.microsoft.com/office/drawing/2014/main" id="{AEB04FEC-4EB4-4870-AD8B-DD755672DE0B}"/>
+                <a16:creationId xmlns:a16="http://schemas.microsoft.com/office/drawing/2014/main" id="{17776CD0-E7DC-4C8F-8F70-8B7007F146C5}"/>
               </a:ext>
             </a:extLst>
           </p:cNvPr>
@@ -5804,7 +5821,7 @@
     </p:spTree>
     <p:extLst>
       <p:ext uri="{BB962C8B-B14F-4D97-AF65-F5344CB8AC3E}">
-        <p14:creationId xmlns:p14="http://schemas.microsoft.com/office/powerpoint/2010/main" val="1997028617"/>
+        <p14:creationId xmlns:p14="http://schemas.microsoft.com/office/powerpoint/2010/main" val="143011181"/>
       </p:ext>
     </p:extLst>
   </p:cSld>

--- a/lendet/2026-2027/mobile/lectures/ushtrimet-04-neon-rideshare-2026.pptx
+++ b/lendet/2026-2027/mobile/lectures/ushtrimet-04-neon-rideshare-2026.pptx
@@ -2,22 +2,22 @@
 <file path=ppt/presentation.xml><?xml version="1.0" encoding="utf-8"?>
 <p:presentation xmlns:p="http://schemas.openxmlformats.org/presentationml/2006/main">
   <p:sldMasterIdLst>
-    <p:sldMasterId xmlns:r="http://schemas.openxmlformats.org/officeDocument/2006/relationships" id="2147483648" r:id="R2c2063e838b44992"/>
+    <p:sldMasterId xmlns:r="http://schemas.openxmlformats.org/officeDocument/2006/relationships" id="2147483648" r:id="R5a8353bbd7804fcc"/>
   </p:sldMasterIdLst>
   <p:sldIdLst>
-    <p:sldId xmlns:r="http://schemas.openxmlformats.org/officeDocument/2006/relationships" id="256" r:id="R9b694b3a1dd84bca"/>
-    <p:sldId xmlns:r="http://schemas.openxmlformats.org/officeDocument/2006/relationships" id="257" r:id="Rc1b648d342174883"/>
-    <p:sldId xmlns:r="http://schemas.openxmlformats.org/officeDocument/2006/relationships" id="258" r:id="R918075d0d5474f3b"/>
-    <p:sldId xmlns:r="http://schemas.openxmlformats.org/officeDocument/2006/relationships" id="259" r:id="Rdabbb4f79fa84665"/>
-    <p:sldId xmlns:r="http://schemas.openxmlformats.org/officeDocument/2006/relationships" id="260" r:id="Ree851fe884f44a5a"/>
-    <p:sldId xmlns:r="http://schemas.openxmlformats.org/officeDocument/2006/relationships" id="261" r:id="R6a2bbacdc4ac4736"/>
-    <p:sldId xmlns:r="http://schemas.openxmlformats.org/officeDocument/2006/relationships" id="262" r:id="Rdb14bf5cac8e4796"/>
-    <p:sldId xmlns:r="http://schemas.openxmlformats.org/officeDocument/2006/relationships" id="263" r:id="Rf2b7feae221943e2"/>
-    <p:sldId xmlns:r="http://schemas.openxmlformats.org/officeDocument/2006/relationships" id="264" r:id="R4347fc2813e5405a"/>
-    <p:sldId xmlns:r="http://schemas.openxmlformats.org/officeDocument/2006/relationships" id="265" r:id="R9b45034cd55e4f08"/>
-    <p:sldId xmlns:r="http://schemas.openxmlformats.org/officeDocument/2006/relationships" id="266" r:id="Rcb96f4fbca484274"/>
-    <p:sldId xmlns:r="http://schemas.openxmlformats.org/officeDocument/2006/relationships" id="267" r:id="Rb7c869efe88347c7"/>
-    <p:sldId xmlns:r="http://schemas.openxmlformats.org/officeDocument/2006/relationships" id="268" r:id="Rba2fa58258374151"/>
+    <p:sldId xmlns:r="http://schemas.openxmlformats.org/officeDocument/2006/relationships" id="256" r:id="R45dae6410fc04450"/>
+    <p:sldId xmlns:r="http://schemas.openxmlformats.org/officeDocument/2006/relationships" id="257" r:id="Rce1a035b3c194dcd"/>
+    <p:sldId xmlns:r="http://schemas.openxmlformats.org/officeDocument/2006/relationships" id="258" r:id="Rb9c32418e3d8450e"/>
+    <p:sldId xmlns:r="http://schemas.openxmlformats.org/officeDocument/2006/relationships" id="259" r:id="R65843505835844ca"/>
+    <p:sldId xmlns:r="http://schemas.openxmlformats.org/officeDocument/2006/relationships" id="260" r:id="Rde807cc6c0b34a5d"/>
+    <p:sldId xmlns:r="http://schemas.openxmlformats.org/officeDocument/2006/relationships" id="261" r:id="Rd96c6fbdec484e21"/>
+    <p:sldId xmlns:r="http://schemas.openxmlformats.org/officeDocument/2006/relationships" id="262" r:id="R5082aa97ca314ec9"/>
+    <p:sldId xmlns:r="http://schemas.openxmlformats.org/officeDocument/2006/relationships" id="263" r:id="Rc145b3d2a7e74780"/>
+    <p:sldId xmlns:r="http://schemas.openxmlformats.org/officeDocument/2006/relationships" id="264" r:id="R34b3b1565f7b4765"/>
+    <p:sldId xmlns:r="http://schemas.openxmlformats.org/officeDocument/2006/relationships" id="265" r:id="R31d39f9ea44b48e7"/>
+    <p:sldId xmlns:r="http://schemas.openxmlformats.org/officeDocument/2006/relationships" id="266" r:id="R2eb32d5a5b754cef"/>
+    <p:sldId xmlns:r="http://schemas.openxmlformats.org/officeDocument/2006/relationships" id="267" r:id="Rf7670506f3ff490a"/>
+    <p:sldId xmlns:r="http://schemas.openxmlformats.org/officeDocument/2006/relationships" id="268" r:id="R5827cd30c51446f7"/>
   </p:sldIdLst>
   <p:sldSz cx="12192000" cy="6858000"/>
   <p:notesSz cx="6858000" cy="9144000"/>
@@ -62,7 +62,7 @@
   </p:cSld>
   <p:clrMap bg1="lt1" tx1="dk1" bg2="lt2" tx2="dk2" accent1="accent1" accent2="accent2" accent3="accent3" accent4="accent4" accent5="accent5" accent6="accent6" hlink="hlink" folHlink="folHlink"/>
   <p:sldLayoutIdLst>
-    <p:sldLayoutId xmlns:r="http://schemas.openxmlformats.org/officeDocument/2006/relationships" id="2147483649" r:id="R028ba45b1cac45e7"/>
+    <p:sldLayoutId xmlns:r="http://schemas.openxmlformats.org/officeDocument/2006/relationships" id="2147483649" r:id="R7964151b5f1541db"/>
   </p:sldLayoutIdLst>
   <p:txStyles>
     <p:titleStyle>
@@ -613,7 +613,7 @@
           <p:cNvPr id="8" name="">
             <a:extLst xmlns:a="http://schemas.openxmlformats.org/drawingml/2006/main">
               <a:ext uri="{FF2B5EF4-FFF2-40B4-BE49-F238E27FC236}">
-                <a16:creationId xmlns:a16="http://schemas.microsoft.com/office/drawing/2014/main" id="{C15E9042-B6B5-42FA-A21A-B9314AEEEE1F}"/>
+                <a16:creationId xmlns:a16="http://schemas.microsoft.com/office/drawing/2014/main" id="{C7273CD9-8CA9-42A3-8CBE-A5F55AF29394}"/>
               </a:ext>
             </a:extLst>
           </p:cNvPr>
@@ -670,7 +670,7 @@
           <p:cNvPr id="2" name="">
             <a:extLst xmlns:a="http://schemas.openxmlformats.org/drawingml/2006/main">
               <a:ext uri="{FF2B5EF4-FFF2-40B4-BE49-F238E27FC236}">
-                <a16:creationId xmlns:a16="http://schemas.microsoft.com/office/drawing/2014/main" id="{C408FCC7-6570-4CBC-86D9-1D09C910C581}"/>
+                <a16:creationId xmlns:a16="http://schemas.microsoft.com/office/drawing/2014/main" id="{D89FEAB9-1752-42F1-A6B9-DB7E94F5A12A}"/>
               </a:ext>
             </a:extLst>
           </p:cNvPr>
@@ -731,7 +731,7 @@
           <p:nvPr/>
         </p:nvPicPr>
         <p:blipFill>
-          <a:blip xmlns:r="http://schemas.openxmlformats.org/officeDocument/2006/relationships" xmlns:a="http://schemas.openxmlformats.org/drawingml/2006/main" r:embed="R7924e348fd6548ed"/>
+          <a:blip xmlns:r="http://schemas.openxmlformats.org/officeDocument/2006/relationships" xmlns:a="http://schemas.openxmlformats.org/drawingml/2006/main" r:embed="Rf27b915d9ec443ba"/>
           <a:stretch xmlns:a="http://schemas.openxmlformats.org/drawingml/2006/main"/>
         </p:blipFill>
         <p:spPr>
@@ -749,7 +749,7 @@
           <p:cNvPr id="4" name="">
             <a:extLst xmlns:a="http://schemas.openxmlformats.org/drawingml/2006/main">
               <a:ext uri="{FF2B5EF4-FFF2-40B4-BE49-F238E27FC236}">
-                <a16:creationId xmlns:a16="http://schemas.microsoft.com/office/drawing/2014/main" id="{5ACEA90B-6E5B-4404-9763-369EE7538F03}"/>
+                <a16:creationId xmlns:a16="http://schemas.microsoft.com/office/drawing/2014/main" id="{F4B771CA-56FF-4E47-BDDF-9E8F1E4ADB3B}"/>
               </a:ext>
             </a:extLst>
           </p:cNvPr>
@@ -796,7 +796,7 @@
                 <a:ea typeface="Arial"/>
                 <a:cs typeface="Arial"/>
               </a:rPr>
-              <a:t>Sot RideShare lexon nga Neon</a:t>
+              <a:t>Infrastruktura e ushtrimit të javës 4</a:t>
             </a:r>
           </a:p>
         </p:txBody>
@@ -810,13 +810,13 @@
           <p:nvPr/>
         </p:nvPicPr>
         <p:blipFill>
-          <a:blip xmlns:r="http://schemas.openxmlformats.org/officeDocument/2006/relationships" xmlns:a="http://schemas.openxmlformats.org/drawingml/2006/main" r:embed="R0a00864493f240e3"/>
+          <a:blip xmlns:r="http://schemas.openxmlformats.org/officeDocument/2006/relationships" xmlns:a="http://schemas.openxmlformats.org/drawingml/2006/main" r:embed="R051daa573b0a4278"/>
           <a:stretch xmlns:a="http://schemas.openxmlformats.org/drawingml/2006/main"/>
         </p:blipFill>
         <p:spPr>
           <a:xfrm xmlns:a="http://schemas.openxmlformats.org/drawingml/2006/main">
-            <a:off x="2659297" y="1666875"/>
-            <a:ext cx="6854356" cy="3857625"/>
+            <a:off x="609600" y="1770063"/>
+            <a:ext cx="10953750" cy="3651250"/>
           </a:xfrm>
           <a:prstGeom xmlns:a="http://schemas.openxmlformats.org/drawingml/2006/main" prst="rect">
             <a:avLst/>
@@ -828,7 +828,7 @@
           <p:cNvPr id="6" name="">
             <a:extLst xmlns:a="http://schemas.openxmlformats.org/drawingml/2006/main">
               <a:ext uri="{FF2B5EF4-FFF2-40B4-BE49-F238E27FC236}">
-                <a16:creationId xmlns:a16="http://schemas.microsoft.com/office/drawing/2014/main" id="{9FA75455-B2AB-43A2-ACEE-42778707B470}"/>
+                <a16:creationId xmlns:a16="http://schemas.microsoft.com/office/drawing/2014/main" id="{FCC556C1-0C46-47CF-AA35-D3A8C8B591BC}"/>
               </a:ext>
             </a:extLst>
           </p:cNvPr>
@@ -875,7 +875,7 @@
                 <a:ea typeface="Arial"/>
                 <a:cs typeface="Arial"/>
               </a:rPr>
-              <a:t>Ju jeni ekipi i RideShare: shoferi ndryshoi nisjen dhe Arta duhet ta shohë orën e saktë.</a:t>
+              <a:t>Zhvillojmë lokalisht, publikojmë në Vercel dhe lexojmë të dhënat në Neon.</a:t>
             </a:r>
           </a:p>
           <a:p xmlns:a="http://schemas.openxmlformats.org/drawingml/2006/main">
@@ -898,7 +898,7 @@
                 <a:ea typeface="Arial"/>
                 <a:cs typeface="Arial"/>
               </a:rPr>
-              <a:t>Sot: Neon → lista dhe detajet → prova të vërteta → përgjigjja në GitHub.</a:t>
+              <a:t>Ndryshimi i orës shihet pas rifreskimit të listës dhe detajeve.</a:t>
             </a:r>
           </a:p>
         </p:txBody>
@@ -908,7 +908,7 @@
           <p:cNvPr id="7" name="">
             <a:extLst xmlns:a="http://schemas.openxmlformats.org/drawingml/2006/main">
               <a:ext uri="{FF2B5EF4-FFF2-40B4-BE49-F238E27FC236}">
-                <a16:creationId xmlns:a16="http://schemas.microsoft.com/office/drawing/2014/main" id="{4F6C8911-DF47-4055-A4E2-CBD5FC5AD429}"/>
+                <a16:creationId xmlns:a16="http://schemas.microsoft.com/office/drawing/2014/main" id="{001A7120-BB15-4684-87A5-63E851F646BE}"/>
               </a:ext>
             </a:extLst>
           </p:cNvPr>
@@ -963,7 +963,7 @@
     </p:spTree>
     <p:extLst>
       <p:ext uri="{BB962C8B-B14F-4D97-AF65-F5344CB8AC3E}">
-        <p14:creationId xmlns:p14="http://schemas.microsoft.com/office/powerpoint/2010/main" val="183655256"/>
+        <p14:creationId xmlns:p14="http://schemas.microsoft.com/office/powerpoint/2010/main" val="787711310"/>
       </p:ext>
     </p:extLst>
   </p:cSld>
@@ -994,7 +994,7 @@
           <p:cNvPr id="7" name="">
             <a:extLst xmlns:a="http://schemas.openxmlformats.org/drawingml/2006/main">
               <a:ext uri="{FF2B5EF4-FFF2-40B4-BE49-F238E27FC236}">
-                <a16:creationId xmlns:a16="http://schemas.microsoft.com/office/drawing/2014/main" id="{5F506EEA-0846-4298-BDFB-1A3F6DC96B75}"/>
+                <a16:creationId xmlns:a16="http://schemas.microsoft.com/office/drawing/2014/main" id="{3CFF681C-4D02-4D99-8944-5143629EDF2D}"/>
               </a:ext>
             </a:extLst>
           </p:cNvPr>
@@ -1051,7 +1051,7 @@
           <p:cNvPr id="2" name="">
             <a:extLst xmlns:a="http://schemas.openxmlformats.org/drawingml/2006/main">
               <a:ext uri="{FF2B5EF4-FFF2-40B4-BE49-F238E27FC236}">
-                <a16:creationId xmlns:a16="http://schemas.microsoft.com/office/drawing/2014/main" id="{0F601648-76AF-4322-BE24-F0AEF9B23454}"/>
+                <a16:creationId xmlns:a16="http://schemas.microsoft.com/office/drawing/2014/main" id="{026F9C7E-A52A-49B2-8038-937AA7763E23}"/>
               </a:ext>
             </a:extLst>
           </p:cNvPr>
@@ -1108,7 +1108,7 @@
           <p:cNvPr id="3" name="">
             <a:extLst xmlns:a="http://schemas.openxmlformats.org/drawingml/2006/main">
               <a:ext uri="{FF2B5EF4-FFF2-40B4-BE49-F238E27FC236}">
-                <a16:creationId xmlns:a16="http://schemas.microsoft.com/office/drawing/2014/main" id="{40EB7405-A989-455F-A547-48FA9CCE23BD}"/>
+                <a16:creationId xmlns:a16="http://schemas.microsoft.com/office/drawing/2014/main" id="{6BB8C469-E4F8-4A83-B04B-D5F771341ED5}"/>
               </a:ext>
             </a:extLst>
           </p:cNvPr>
@@ -1165,7 +1165,7 @@
           <p:cNvPr id="4" name="">
             <a:extLst xmlns:a="http://schemas.openxmlformats.org/drawingml/2006/main">
               <a:ext uri="{FF2B5EF4-FFF2-40B4-BE49-F238E27FC236}">
-                <a16:creationId xmlns:a16="http://schemas.microsoft.com/office/drawing/2014/main" id="{D072BF3A-CB89-4879-8599-B22247E408C1}"/>
+                <a16:creationId xmlns:a16="http://schemas.microsoft.com/office/drawing/2014/main" id="{17F5016D-2BEF-4526-9934-69BE7BCAD1FF}"/>
               </a:ext>
             </a:extLst>
           </p:cNvPr>
@@ -1306,7 +1306,7 @@
           <p:cNvPr id="5" name="">
             <a:extLst xmlns:a="http://schemas.openxmlformats.org/drawingml/2006/main">
               <a:ext uri="{FF2B5EF4-FFF2-40B4-BE49-F238E27FC236}">
-                <a16:creationId xmlns:a16="http://schemas.microsoft.com/office/drawing/2014/main" id="{01B2AC1C-F811-493E-98D3-EB1B5CCD843D}"/>
+                <a16:creationId xmlns:a16="http://schemas.microsoft.com/office/drawing/2014/main" id="{9AFA3CA3-7F02-4057-8E54-1C924A536376}"/>
               </a:ext>
             </a:extLst>
           </p:cNvPr>
@@ -1363,7 +1363,7 @@
           <p:cNvPr id="6" name="">
             <a:extLst xmlns:a="http://schemas.openxmlformats.org/drawingml/2006/main">
               <a:ext uri="{FF2B5EF4-FFF2-40B4-BE49-F238E27FC236}">
-                <a16:creationId xmlns:a16="http://schemas.microsoft.com/office/drawing/2014/main" id="{8366EDD3-32A3-4FE1-B0D9-47CDC89FA561}"/>
+                <a16:creationId xmlns:a16="http://schemas.microsoft.com/office/drawing/2014/main" id="{598DAFCA-9F05-4259-8150-32AD1D4DE852}"/>
               </a:ext>
             </a:extLst>
           </p:cNvPr>
@@ -1418,7 +1418,7 @@
     </p:spTree>
     <p:extLst>
       <p:ext uri="{BB962C8B-B14F-4D97-AF65-F5344CB8AC3E}">
-        <p14:creationId xmlns:p14="http://schemas.microsoft.com/office/powerpoint/2010/main" val="391738303"/>
+        <p14:creationId xmlns:p14="http://schemas.microsoft.com/office/powerpoint/2010/main" val="1161871516"/>
       </p:ext>
     </p:extLst>
   </p:cSld>
@@ -1449,7 +1449,7 @@
           <p:cNvPr id="5" name="">
             <a:extLst xmlns:a="http://schemas.openxmlformats.org/drawingml/2006/main">
               <a:ext uri="{FF2B5EF4-FFF2-40B4-BE49-F238E27FC236}">
-                <a16:creationId xmlns:a16="http://schemas.microsoft.com/office/drawing/2014/main" id="{545CE3D6-B712-48E0-9BB9-C42809E39B32}"/>
+                <a16:creationId xmlns:a16="http://schemas.microsoft.com/office/drawing/2014/main" id="{0785E32D-EDEE-4863-996F-4CBA6FF086E1}"/>
               </a:ext>
             </a:extLst>
           </p:cNvPr>
@@ -1506,7 +1506,7 @@
           <p:cNvPr id="2" name="">
             <a:extLst xmlns:a="http://schemas.openxmlformats.org/drawingml/2006/main">
               <a:ext uri="{FF2B5EF4-FFF2-40B4-BE49-F238E27FC236}">
-                <a16:creationId xmlns:a16="http://schemas.microsoft.com/office/drawing/2014/main" id="{6C3EB503-E4BA-48DE-A44E-8B84E8C08FDF}"/>
+                <a16:creationId xmlns:a16="http://schemas.microsoft.com/office/drawing/2014/main" id="{22EA28EA-F615-4123-A831-27FFCE17D30A}"/>
               </a:ext>
             </a:extLst>
           </p:cNvPr>
@@ -1563,7 +1563,7 @@
           <p:cNvPr id="3" name="">
             <a:extLst xmlns:a="http://schemas.openxmlformats.org/drawingml/2006/main">
               <a:ext uri="{FF2B5EF4-FFF2-40B4-BE49-F238E27FC236}">
-                <a16:creationId xmlns:a16="http://schemas.microsoft.com/office/drawing/2014/main" id="{5F06BFC6-EBFE-4FD6-8FFC-6C56471DB531}"/>
+                <a16:creationId xmlns:a16="http://schemas.microsoft.com/office/drawing/2014/main" id="{802AC75B-CE66-4B74-BBBD-739531F2DA0E}"/>
               </a:ext>
             </a:extLst>
           </p:cNvPr>
@@ -1620,7 +1620,7 @@
           <p:cNvPr id="4" name="">
             <a:extLst xmlns:a="http://schemas.openxmlformats.org/drawingml/2006/main">
               <a:ext uri="{FF2B5EF4-FFF2-40B4-BE49-F238E27FC236}">
-                <a16:creationId xmlns:a16="http://schemas.microsoft.com/office/drawing/2014/main" id="{B975BA47-8EC5-4DD8-8D84-D04300230DAC}"/>
+                <a16:creationId xmlns:a16="http://schemas.microsoft.com/office/drawing/2014/main" id="{FEEA261B-B6E1-4661-95E6-7F1810F565FB}"/>
               </a:ext>
             </a:extLst>
           </p:cNvPr>
@@ -1759,7 +1759,7 @@
     </p:spTree>
     <p:extLst>
       <p:ext uri="{BB962C8B-B14F-4D97-AF65-F5344CB8AC3E}">
-        <p14:creationId xmlns:p14="http://schemas.microsoft.com/office/powerpoint/2010/main" val="1132960440"/>
+        <p14:creationId xmlns:p14="http://schemas.microsoft.com/office/powerpoint/2010/main" val="1127157747"/>
       </p:ext>
     </p:extLst>
   </p:cSld>
@@ -1790,7 +1790,7 @@
           <p:cNvPr id="6" name="">
             <a:extLst xmlns:a="http://schemas.openxmlformats.org/drawingml/2006/main">
               <a:ext uri="{FF2B5EF4-FFF2-40B4-BE49-F238E27FC236}">
-                <a16:creationId xmlns:a16="http://schemas.microsoft.com/office/drawing/2014/main" id="{ED9C2379-CB50-4126-B73C-4C22FE2C3FD5}"/>
+                <a16:creationId xmlns:a16="http://schemas.microsoft.com/office/drawing/2014/main" id="{E742A94C-B1BD-48EC-87B8-5199E191EC1F}"/>
               </a:ext>
             </a:extLst>
           </p:cNvPr>
@@ -1847,7 +1847,7 @@
           <p:cNvPr id="2" name="">
             <a:extLst xmlns:a="http://schemas.openxmlformats.org/drawingml/2006/main">
               <a:ext uri="{FF2B5EF4-FFF2-40B4-BE49-F238E27FC236}">
-                <a16:creationId xmlns:a16="http://schemas.microsoft.com/office/drawing/2014/main" id="{59828FCF-80AA-40B7-B968-8249E5B094C7}"/>
+                <a16:creationId xmlns:a16="http://schemas.microsoft.com/office/drawing/2014/main" id="{36B9FFCB-9647-4CAE-8A9D-EABC8CD3C2F3}"/>
               </a:ext>
             </a:extLst>
           </p:cNvPr>
@@ -1904,7 +1904,7 @@
           <p:cNvPr id="3" name="">
             <a:extLst xmlns:a="http://schemas.openxmlformats.org/drawingml/2006/main">
               <a:ext uri="{FF2B5EF4-FFF2-40B4-BE49-F238E27FC236}">
-                <a16:creationId xmlns:a16="http://schemas.microsoft.com/office/drawing/2014/main" id="{33FA4260-5D65-433A-9753-645F89E96DAC}"/>
+                <a16:creationId xmlns:a16="http://schemas.microsoft.com/office/drawing/2014/main" id="{32FA8346-C214-4C57-8297-1D70755161A4}"/>
               </a:ext>
             </a:extLst>
           </p:cNvPr>
@@ -1961,7 +1961,7 @@
           <p:cNvPr id="4" name="">
             <a:extLst xmlns:a="http://schemas.openxmlformats.org/drawingml/2006/main">
               <a:ext uri="{FF2B5EF4-FFF2-40B4-BE49-F238E27FC236}">
-                <a16:creationId xmlns:a16="http://schemas.microsoft.com/office/drawing/2014/main" id="{5E922C0A-DAFC-4397-BF4C-9C405FC31BA1}"/>
+                <a16:creationId xmlns:a16="http://schemas.microsoft.com/office/drawing/2014/main" id="{82111B20-E2C2-45C9-968D-DE6C4A823BA3}"/>
               </a:ext>
             </a:extLst>
           </p:cNvPr>
@@ -2102,7 +2102,7 @@
           <p:cNvPr id="5" name="">
             <a:extLst xmlns:a="http://schemas.openxmlformats.org/drawingml/2006/main">
               <a:ext uri="{FF2B5EF4-FFF2-40B4-BE49-F238E27FC236}">
-                <a16:creationId xmlns:a16="http://schemas.microsoft.com/office/drawing/2014/main" id="{1F1E1303-B8E5-46AD-805D-88543741A30C}"/>
+                <a16:creationId xmlns:a16="http://schemas.microsoft.com/office/drawing/2014/main" id="{37B1804D-938A-4933-A795-104C3F64BEE8}"/>
               </a:ext>
             </a:extLst>
           </p:cNvPr>
@@ -2157,7 +2157,7 @@
     </p:spTree>
     <p:extLst>
       <p:ext uri="{BB962C8B-B14F-4D97-AF65-F5344CB8AC3E}">
-        <p14:creationId xmlns:p14="http://schemas.microsoft.com/office/powerpoint/2010/main" val="254272183"/>
+        <p14:creationId xmlns:p14="http://schemas.microsoft.com/office/powerpoint/2010/main" val="268719916"/>
       </p:ext>
     </p:extLst>
   </p:cSld>
@@ -2188,7 +2188,7 @@
           <p:cNvPr id="6" name="">
             <a:extLst xmlns:a="http://schemas.openxmlformats.org/drawingml/2006/main">
               <a:ext uri="{FF2B5EF4-FFF2-40B4-BE49-F238E27FC236}">
-                <a16:creationId xmlns:a16="http://schemas.microsoft.com/office/drawing/2014/main" id="{8DA7184C-6B73-4F07-891E-66B582A8B309}"/>
+                <a16:creationId xmlns:a16="http://schemas.microsoft.com/office/drawing/2014/main" id="{E8B2E8B9-745F-49FA-B2CC-B17BED420476}"/>
               </a:ext>
             </a:extLst>
           </p:cNvPr>
@@ -2245,7 +2245,7 @@
           <p:cNvPr id="2" name="">
             <a:extLst xmlns:a="http://schemas.openxmlformats.org/drawingml/2006/main">
               <a:ext uri="{FF2B5EF4-FFF2-40B4-BE49-F238E27FC236}">
-                <a16:creationId xmlns:a16="http://schemas.microsoft.com/office/drawing/2014/main" id="{044DA334-A324-4911-B52C-6A473D16D909}"/>
+                <a16:creationId xmlns:a16="http://schemas.microsoft.com/office/drawing/2014/main" id="{6E0D8A6D-B60B-4DF9-965D-55048251F444}"/>
               </a:ext>
             </a:extLst>
           </p:cNvPr>
@@ -2302,7 +2302,7 @@
           <p:cNvPr id="3" name="">
             <a:extLst xmlns:a="http://schemas.openxmlformats.org/drawingml/2006/main">
               <a:ext uri="{FF2B5EF4-FFF2-40B4-BE49-F238E27FC236}">
-                <a16:creationId xmlns:a16="http://schemas.microsoft.com/office/drawing/2014/main" id="{21856A39-9E9F-4407-8853-4B73520CF578}"/>
+                <a16:creationId xmlns:a16="http://schemas.microsoft.com/office/drawing/2014/main" id="{630B9D9B-329D-4CDA-BB71-1FFB489AE91D}"/>
               </a:ext>
             </a:extLst>
           </p:cNvPr>
@@ -2359,7 +2359,7 @@
           <p:cNvPr id="4" name="">
             <a:extLst xmlns:a="http://schemas.openxmlformats.org/drawingml/2006/main">
               <a:ext uri="{FF2B5EF4-FFF2-40B4-BE49-F238E27FC236}">
-                <a16:creationId xmlns:a16="http://schemas.microsoft.com/office/drawing/2014/main" id="{9C8C487C-FE8F-4533-A5F6-23FD2CD43B0E}"/>
+                <a16:creationId xmlns:a16="http://schemas.microsoft.com/office/drawing/2014/main" id="{17D6B6F9-D236-4A39-A0F4-EAD86F287E15}"/>
               </a:ext>
             </a:extLst>
           </p:cNvPr>
@@ -2500,7 +2500,7 @@
           <p:cNvPr id="5" name="">
             <a:extLst xmlns:a="http://schemas.openxmlformats.org/drawingml/2006/main">
               <a:ext uri="{FF2B5EF4-FFF2-40B4-BE49-F238E27FC236}">
-                <a16:creationId xmlns:a16="http://schemas.microsoft.com/office/drawing/2014/main" id="{3863DE54-F2A4-422B-AA0A-7AC0D1FF93A9}"/>
+                <a16:creationId xmlns:a16="http://schemas.microsoft.com/office/drawing/2014/main" id="{064F9414-DCD8-40DB-A8E1-46A5D942F97A}"/>
               </a:ext>
             </a:extLst>
           </p:cNvPr>
@@ -2555,7 +2555,7 @@
     </p:spTree>
     <p:extLst>
       <p:ext uri="{BB962C8B-B14F-4D97-AF65-F5344CB8AC3E}">
-        <p14:creationId xmlns:p14="http://schemas.microsoft.com/office/powerpoint/2010/main" val="2055470955"/>
+        <p14:creationId xmlns:p14="http://schemas.microsoft.com/office/powerpoint/2010/main" val="761097468"/>
       </p:ext>
     </p:extLst>
   </p:cSld>
@@ -2586,7 +2586,7 @@
           <p:cNvPr id="5" name="">
             <a:extLst xmlns:a="http://schemas.openxmlformats.org/drawingml/2006/main">
               <a:ext uri="{FF2B5EF4-FFF2-40B4-BE49-F238E27FC236}">
-                <a16:creationId xmlns:a16="http://schemas.microsoft.com/office/drawing/2014/main" id="{F74E0FA3-6716-452D-BA20-7E67074EA3B7}"/>
+                <a16:creationId xmlns:a16="http://schemas.microsoft.com/office/drawing/2014/main" id="{AF92DE81-0CD5-463D-8A41-0E162FEAF61A}"/>
               </a:ext>
             </a:extLst>
           </p:cNvPr>
@@ -2643,7 +2643,7 @@
           <p:cNvPr id="2" name="">
             <a:extLst xmlns:a="http://schemas.openxmlformats.org/drawingml/2006/main">
               <a:ext uri="{FF2B5EF4-FFF2-40B4-BE49-F238E27FC236}">
-                <a16:creationId xmlns:a16="http://schemas.microsoft.com/office/drawing/2014/main" id="{4D844CCD-A745-4E3C-BAAB-4D4A189464B8}"/>
+                <a16:creationId xmlns:a16="http://schemas.microsoft.com/office/drawing/2014/main" id="{C0FCC13D-A6BD-4254-8355-F04AF1E40246}"/>
               </a:ext>
             </a:extLst>
           </p:cNvPr>
@@ -2700,7 +2700,7 @@
           <p:cNvPr id="3" name="">
             <a:extLst xmlns:a="http://schemas.openxmlformats.org/drawingml/2006/main">
               <a:ext uri="{FF2B5EF4-FFF2-40B4-BE49-F238E27FC236}">
-                <a16:creationId xmlns:a16="http://schemas.microsoft.com/office/drawing/2014/main" id="{FDE579B2-796C-4B5A-903C-5FF5DD93C580}"/>
+                <a16:creationId xmlns:a16="http://schemas.microsoft.com/office/drawing/2014/main" id="{7F74C979-B3DE-42D6-84A3-6E8805DB6B07}"/>
               </a:ext>
             </a:extLst>
           </p:cNvPr>
@@ -2757,7 +2757,7 @@
           <p:cNvPr id="4" name="">
             <a:extLst xmlns:a="http://schemas.openxmlformats.org/drawingml/2006/main">
               <a:ext uri="{FF2B5EF4-FFF2-40B4-BE49-F238E27FC236}">
-                <a16:creationId xmlns:a16="http://schemas.microsoft.com/office/drawing/2014/main" id="{5B599500-4974-49C2-A765-275B7F99428D}"/>
+                <a16:creationId xmlns:a16="http://schemas.microsoft.com/office/drawing/2014/main" id="{3E265D0A-3D07-4343-991A-05BAC1EBF0A2}"/>
               </a:ext>
             </a:extLst>
           </p:cNvPr>
@@ -2868,7 +2868,7 @@
     </p:spTree>
     <p:extLst>
       <p:ext uri="{BB962C8B-B14F-4D97-AF65-F5344CB8AC3E}">
-        <p14:creationId xmlns:p14="http://schemas.microsoft.com/office/powerpoint/2010/main" val="979660183"/>
+        <p14:creationId xmlns:p14="http://schemas.microsoft.com/office/powerpoint/2010/main" val="558049447"/>
       </p:ext>
     </p:extLst>
   </p:cSld>
@@ -2899,7 +2899,7 @@
           <p:cNvPr id="6" name="">
             <a:extLst xmlns:a="http://schemas.openxmlformats.org/drawingml/2006/main">
               <a:ext uri="{FF2B5EF4-FFF2-40B4-BE49-F238E27FC236}">
-                <a16:creationId xmlns:a16="http://schemas.microsoft.com/office/drawing/2014/main" id="{D0A6C441-75C4-40CB-83E1-69642EA71870}"/>
+                <a16:creationId xmlns:a16="http://schemas.microsoft.com/office/drawing/2014/main" id="{DA1FBBC8-D8A8-4E97-9AB4-B616F8304D53}"/>
               </a:ext>
             </a:extLst>
           </p:cNvPr>
@@ -2956,7 +2956,7 @@
           <p:cNvPr id="2" name="">
             <a:extLst xmlns:a="http://schemas.openxmlformats.org/drawingml/2006/main">
               <a:ext uri="{FF2B5EF4-FFF2-40B4-BE49-F238E27FC236}">
-                <a16:creationId xmlns:a16="http://schemas.microsoft.com/office/drawing/2014/main" id="{F4E2862D-FA41-47DB-A5DF-BFE4D2C7BA30}"/>
+                <a16:creationId xmlns:a16="http://schemas.microsoft.com/office/drawing/2014/main" id="{24E8089E-64E2-46BE-B394-677A06FC400E}"/>
               </a:ext>
             </a:extLst>
           </p:cNvPr>
@@ -3013,7 +3013,7 @@
           <p:cNvPr id="3" name="">
             <a:extLst xmlns:a="http://schemas.openxmlformats.org/drawingml/2006/main">
               <a:ext uri="{FF2B5EF4-FFF2-40B4-BE49-F238E27FC236}">
-                <a16:creationId xmlns:a16="http://schemas.microsoft.com/office/drawing/2014/main" id="{27D8B2F6-9003-4DC5-A34C-D810D29581E2}"/>
+                <a16:creationId xmlns:a16="http://schemas.microsoft.com/office/drawing/2014/main" id="{05F22069-88D7-498E-A1B4-7810CFEB0251}"/>
               </a:ext>
             </a:extLst>
           </p:cNvPr>
@@ -3070,7 +3070,7 @@
           <p:cNvPr id="4" name="">
             <a:extLst xmlns:a="http://schemas.openxmlformats.org/drawingml/2006/main">
               <a:ext uri="{FF2B5EF4-FFF2-40B4-BE49-F238E27FC236}">
-                <a16:creationId xmlns:a16="http://schemas.microsoft.com/office/drawing/2014/main" id="{00462044-7E43-45AE-9BF9-2A0D76DFDB52}"/>
+                <a16:creationId xmlns:a16="http://schemas.microsoft.com/office/drawing/2014/main" id="{AA59E28C-21B1-4393-B295-767AE5264D16}"/>
               </a:ext>
             </a:extLst>
           </p:cNvPr>
@@ -3211,7 +3211,7 @@
           <p:cNvPr id="5" name="">
             <a:extLst xmlns:a="http://schemas.openxmlformats.org/drawingml/2006/main">
               <a:ext uri="{FF2B5EF4-FFF2-40B4-BE49-F238E27FC236}">
-                <a16:creationId xmlns:a16="http://schemas.microsoft.com/office/drawing/2014/main" id="{6EE5883F-677A-40F4-95E8-464F4C4D0910}"/>
+                <a16:creationId xmlns:a16="http://schemas.microsoft.com/office/drawing/2014/main" id="{B02C6D1E-78FF-44C4-BF9A-12C8007FADEB}"/>
               </a:ext>
             </a:extLst>
           </p:cNvPr>
@@ -3266,7 +3266,7 @@
     </p:spTree>
     <p:extLst>
       <p:ext uri="{BB962C8B-B14F-4D97-AF65-F5344CB8AC3E}">
-        <p14:creationId xmlns:p14="http://schemas.microsoft.com/office/powerpoint/2010/main" val="1023654426"/>
+        <p14:creationId xmlns:p14="http://schemas.microsoft.com/office/powerpoint/2010/main" val="1135461271"/>
       </p:ext>
     </p:extLst>
   </p:cSld>
@@ -3297,7 +3297,7 @@
           <p:cNvPr id="7" name="">
             <a:extLst xmlns:a="http://schemas.openxmlformats.org/drawingml/2006/main">
               <a:ext uri="{FF2B5EF4-FFF2-40B4-BE49-F238E27FC236}">
-                <a16:creationId xmlns:a16="http://schemas.microsoft.com/office/drawing/2014/main" id="{631A586D-FEBA-489A-AFB2-03FFD34FA284}"/>
+                <a16:creationId xmlns:a16="http://schemas.microsoft.com/office/drawing/2014/main" id="{DB7147A2-F8B8-4F9F-A965-F46363D0D9D9}"/>
               </a:ext>
             </a:extLst>
           </p:cNvPr>
@@ -3354,7 +3354,7 @@
           <p:cNvPr id="2" name="">
             <a:extLst xmlns:a="http://schemas.openxmlformats.org/drawingml/2006/main">
               <a:ext uri="{FF2B5EF4-FFF2-40B4-BE49-F238E27FC236}">
-                <a16:creationId xmlns:a16="http://schemas.microsoft.com/office/drawing/2014/main" id="{B46B20F7-724C-4081-80EC-D9FD4D9270AB}"/>
+                <a16:creationId xmlns:a16="http://schemas.microsoft.com/office/drawing/2014/main" id="{6E5F6C22-BDF5-4E24-BA3B-C953EE39B9A5}"/>
               </a:ext>
             </a:extLst>
           </p:cNvPr>
@@ -3411,7 +3411,7 @@
           <p:cNvPr id="3" name="">
             <a:extLst xmlns:a="http://schemas.openxmlformats.org/drawingml/2006/main">
               <a:ext uri="{FF2B5EF4-FFF2-40B4-BE49-F238E27FC236}">
-                <a16:creationId xmlns:a16="http://schemas.microsoft.com/office/drawing/2014/main" id="{60B89869-CF4F-44D9-9566-D152A223BC07}"/>
+                <a16:creationId xmlns:a16="http://schemas.microsoft.com/office/drawing/2014/main" id="{10B355E9-D125-4B9E-9C19-BB5022EBE621}"/>
               </a:ext>
             </a:extLst>
           </p:cNvPr>
@@ -3472,7 +3472,7 @@
           <p:nvPr/>
         </p:nvPicPr>
         <p:blipFill>
-          <a:blip xmlns:r="http://schemas.openxmlformats.org/officeDocument/2006/relationships" xmlns:a="http://schemas.openxmlformats.org/drawingml/2006/main" r:embed="R70608a1376a645e4"/>
+          <a:blip xmlns:r="http://schemas.openxmlformats.org/officeDocument/2006/relationships" xmlns:a="http://schemas.openxmlformats.org/drawingml/2006/main" r:embed="Rdca3715ab4124dac"/>
           <a:stretch xmlns:a="http://schemas.openxmlformats.org/drawingml/2006/main"/>
         </p:blipFill>
         <p:spPr>
@@ -3490,7 +3490,7 @@
           <p:cNvPr id="5" name="">
             <a:extLst xmlns:a="http://schemas.openxmlformats.org/drawingml/2006/main">
               <a:ext uri="{FF2B5EF4-FFF2-40B4-BE49-F238E27FC236}">
-                <a16:creationId xmlns:a16="http://schemas.microsoft.com/office/drawing/2014/main" id="{A519099D-1E27-4C81-A630-3FC1C0E56379}"/>
+                <a16:creationId xmlns:a16="http://schemas.microsoft.com/office/drawing/2014/main" id="{18E35075-A359-43AB-B75E-37E08B432019}"/>
               </a:ext>
             </a:extLst>
           </p:cNvPr>
@@ -3547,7 +3547,7 @@
           <p:cNvPr id="6" name="">
             <a:extLst xmlns:a="http://schemas.openxmlformats.org/drawingml/2006/main">
               <a:ext uri="{FF2B5EF4-FFF2-40B4-BE49-F238E27FC236}">
-                <a16:creationId xmlns:a16="http://schemas.microsoft.com/office/drawing/2014/main" id="{63BE96A3-9532-41B8-A7B0-8B60231D4999}"/>
+                <a16:creationId xmlns:a16="http://schemas.microsoft.com/office/drawing/2014/main" id="{91581363-858F-41D4-B56B-B35AC028C95C}"/>
               </a:ext>
             </a:extLst>
           </p:cNvPr>
@@ -3602,7 +3602,7 @@
     </p:spTree>
     <p:extLst>
       <p:ext uri="{BB962C8B-B14F-4D97-AF65-F5344CB8AC3E}">
-        <p14:creationId xmlns:p14="http://schemas.microsoft.com/office/powerpoint/2010/main" val="797856081"/>
+        <p14:creationId xmlns:p14="http://schemas.microsoft.com/office/powerpoint/2010/main" val="833343398"/>
       </p:ext>
     </p:extLst>
   </p:cSld>
@@ -3633,7 +3633,7 @@
           <p:cNvPr id="7" name="">
             <a:extLst xmlns:a="http://schemas.openxmlformats.org/drawingml/2006/main">
               <a:ext uri="{FF2B5EF4-FFF2-40B4-BE49-F238E27FC236}">
-                <a16:creationId xmlns:a16="http://schemas.microsoft.com/office/drawing/2014/main" id="{680C6BF3-E6F0-4576-A2A8-DD4FC6661A08}"/>
+                <a16:creationId xmlns:a16="http://schemas.microsoft.com/office/drawing/2014/main" id="{5A5EE4AD-7980-44C5-9724-F8CCA972DB2E}"/>
               </a:ext>
             </a:extLst>
           </p:cNvPr>
@@ -3690,7 +3690,7 @@
           <p:cNvPr id="2" name="">
             <a:extLst xmlns:a="http://schemas.openxmlformats.org/drawingml/2006/main">
               <a:ext uri="{FF2B5EF4-FFF2-40B4-BE49-F238E27FC236}">
-                <a16:creationId xmlns:a16="http://schemas.microsoft.com/office/drawing/2014/main" id="{BD0D6422-285E-4595-8375-2211DC750318}"/>
+                <a16:creationId xmlns:a16="http://schemas.microsoft.com/office/drawing/2014/main" id="{F8484376-302B-44C4-A8B4-C0D8B9C56EF8}"/>
               </a:ext>
             </a:extLst>
           </p:cNvPr>
@@ -3747,7 +3747,7 @@
           <p:cNvPr id="3" name="">
             <a:extLst xmlns:a="http://schemas.openxmlformats.org/drawingml/2006/main">
               <a:ext uri="{FF2B5EF4-FFF2-40B4-BE49-F238E27FC236}">
-                <a16:creationId xmlns:a16="http://schemas.microsoft.com/office/drawing/2014/main" id="{FCAAD73E-E923-405A-873B-80534A92875C}"/>
+                <a16:creationId xmlns:a16="http://schemas.microsoft.com/office/drawing/2014/main" id="{00278A39-4A72-4808-B11B-8E1CE918AF1B}"/>
               </a:ext>
             </a:extLst>
           </p:cNvPr>
@@ -3804,7 +3804,7 @@
           <p:cNvPr id="4" name="">
             <a:extLst xmlns:a="http://schemas.openxmlformats.org/drawingml/2006/main">
               <a:ext uri="{FF2B5EF4-FFF2-40B4-BE49-F238E27FC236}">
-                <a16:creationId xmlns:a16="http://schemas.microsoft.com/office/drawing/2014/main" id="{D5DA81F8-B342-4B8E-9710-E030D7BBB7FD}"/>
+                <a16:creationId xmlns:a16="http://schemas.microsoft.com/office/drawing/2014/main" id="{CB5F4152-2708-4414-AC8D-BF7EB351C2F9}"/>
               </a:ext>
             </a:extLst>
           </p:cNvPr>
@@ -3945,7 +3945,7 @@
           <p:cNvPr id="5" name="">
             <a:extLst xmlns:a="http://schemas.openxmlformats.org/drawingml/2006/main">
               <a:ext uri="{FF2B5EF4-FFF2-40B4-BE49-F238E27FC236}">
-                <a16:creationId xmlns:a16="http://schemas.microsoft.com/office/drawing/2014/main" id="{A2611BA2-158F-4D69-A5CB-4B159D13F4E7}"/>
+                <a16:creationId xmlns:a16="http://schemas.microsoft.com/office/drawing/2014/main" id="{3F782F03-58B6-4EF6-AD9F-F97BD51406B8}"/>
               </a:ext>
             </a:extLst>
           </p:cNvPr>
@@ -4002,7 +4002,7 @@
           <p:cNvPr id="6" name="">
             <a:extLst xmlns:a="http://schemas.openxmlformats.org/drawingml/2006/main">
               <a:ext uri="{FF2B5EF4-FFF2-40B4-BE49-F238E27FC236}">
-                <a16:creationId xmlns:a16="http://schemas.microsoft.com/office/drawing/2014/main" id="{73E410F0-98DA-4DAB-AD0F-B3204E16A646}"/>
+                <a16:creationId xmlns:a16="http://schemas.microsoft.com/office/drawing/2014/main" id="{44875FD4-5FC7-4120-8D52-368568FD6C7C}"/>
               </a:ext>
             </a:extLst>
           </p:cNvPr>
@@ -4057,7 +4057,7 @@
     </p:spTree>
     <p:extLst>
       <p:ext uri="{BB962C8B-B14F-4D97-AF65-F5344CB8AC3E}">
-        <p14:creationId xmlns:p14="http://schemas.microsoft.com/office/powerpoint/2010/main" val="17610791"/>
+        <p14:creationId xmlns:p14="http://schemas.microsoft.com/office/powerpoint/2010/main" val="121650410"/>
       </p:ext>
     </p:extLst>
   </p:cSld>
@@ -4088,7 +4088,7 @@
           <p:cNvPr id="7" name="">
             <a:extLst xmlns:a="http://schemas.openxmlformats.org/drawingml/2006/main">
               <a:ext uri="{FF2B5EF4-FFF2-40B4-BE49-F238E27FC236}">
-                <a16:creationId xmlns:a16="http://schemas.microsoft.com/office/drawing/2014/main" id="{AE3DFD84-10EB-4B40-BD79-AC68D3D7F3E2}"/>
+                <a16:creationId xmlns:a16="http://schemas.microsoft.com/office/drawing/2014/main" id="{BD2EAC46-DEB8-4B00-AA9F-0AA22D2897E5}"/>
               </a:ext>
             </a:extLst>
           </p:cNvPr>
@@ -4145,7 +4145,7 @@
           <p:cNvPr id="2" name="">
             <a:extLst xmlns:a="http://schemas.openxmlformats.org/drawingml/2006/main">
               <a:ext uri="{FF2B5EF4-FFF2-40B4-BE49-F238E27FC236}">
-                <a16:creationId xmlns:a16="http://schemas.microsoft.com/office/drawing/2014/main" id="{DEE6A387-7789-445A-9C7C-2CBAC5F4109A}"/>
+                <a16:creationId xmlns:a16="http://schemas.microsoft.com/office/drawing/2014/main" id="{BD89A791-F0B2-4D93-88DC-CEE2120065AF}"/>
               </a:ext>
             </a:extLst>
           </p:cNvPr>
@@ -4202,7 +4202,7 @@
           <p:cNvPr id="3" name="">
             <a:extLst xmlns:a="http://schemas.openxmlformats.org/drawingml/2006/main">
               <a:ext uri="{FF2B5EF4-FFF2-40B4-BE49-F238E27FC236}">
-                <a16:creationId xmlns:a16="http://schemas.microsoft.com/office/drawing/2014/main" id="{0A0BF768-4B5E-47DD-8CE3-13362219F251}"/>
+                <a16:creationId xmlns:a16="http://schemas.microsoft.com/office/drawing/2014/main" id="{0EA866EC-5A28-44DA-9C0D-02CB2472EE8D}"/>
               </a:ext>
             </a:extLst>
           </p:cNvPr>
@@ -4259,7 +4259,7 @@
           <p:cNvPr id="4" name="">
             <a:extLst xmlns:a="http://schemas.openxmlformats.org/drawingml/2006/main">
               <a:ext uri="{FF2B5EF4-FFF2-40B4-BE49-F238E27FC236}">
-                <a16:creationId xmlns:a16="http://schemas.microsoft.com/office/drawing/2014/main" id="{D3F77735-8576-490E-B03C-05FDFCDA301C}"/>
+                <a16:creationId xmlns:a16="http://schemas.microsoft.com/office/drawing/2014/main" id="{940CC4D4-BC93-4265-89FF-FE34B69A8686}"/>
               </a:ext>
             </a:extLst>
           </p:cNvPr>
@@ -4400,7 +4400,7 @@
           <p:cNvPr id="5" name="">
             <a:extLst xmlns:a="http://schemas.openxmlformats.org/drawingml/2006/main">
               <a:ext uri="{FF2B5EF4-FFF2-40B4-BE49-F238E27FC236}">
-                <a16:creationId xmlns:a16="http://schemas.microsoft.com/office/drawing/2014/main" id="{EF1B6481-1492-4A21-9CFD-9DBFD2E1AF0D}"/>
+                <a16:creationId xmlns:a16="http://schemas.microsoft.com/office/drawing/2014/main" id="{5B2F3C51-0C92-4546-882E-4126711237D1}"/>
               </a:ext>
             </a:extLst>
           </p:cNvPr>
@@ -4457,7 +4457,7 @@
           <p:cNvPr id="6" name="">
             <a:extLst xmlns:a="http://schemas.openxmlformats.org/drawingml/2006/main">
               <a:ext uri="{FF2B5EF4-FFF2-40B4-BE49-F238E27FC236}">
-                <a16:creationId xmlns:a16="http://schemas.microsoft.com/office/drawing/2014/main" id="{B37806A8-9DC5-4AE7-BD02-2C93F329F882}"/>
+                <a16:creationId xmlns:a16="http://schemas.microsoft.com/office/drawing/2014/main" id="{CC4862B7-83AC-4BDF-8DED-05636FFB1683}"/>
               </a:ext>
             </a:extLst>
           </p:cNvPr>
@@ -4512,7 +4512,7 @@
     </p:spTree>
     <p:extLst>
       <p:ext uri="{BB962C8B-B14F-4D97-AF65-F5344CB8AC3E}">
-        <p14:creationId xmlns:p14="http://schemas.microsoft.com/office/powerpoint/2010/main" val="1779055496"/>
+        <p14:creationId xmlns:p14="http://schemas.microsoft.com/office/powerpoint/2010/main" val="1922317704"/>
       </p:ext>
     </p:extLst>
   </p:cSld>
@@ -4543,7 +4543,7 @@
           <p:cNvPr id="7" name="">
             <a:extLst xmlns:a="http://schemas.openxmlformats.org/drawingml/2006/main">
               <a:ext uri="{FF2B5EF4-FFF2-40B4-BE49-F238E27FC236}">
-                <a16:creationId xmlns:a16="http://schemas.microsoft.com/office/drawing/2014/main" id="{83ABC99A-0FB0-4F24-9866-2545A154602C}"/>
+                <a16:creationId xmlns:a16="http://schemas.microsoft.com/office/drawing/2014/main" id="{079738BB-8634-4F02-883D-A3E15BA51A0B}"/>
               </a:ext>
             </a:extLst>
           </p:cNvPr>
@@ -4600,7 +4600,7 @@
           <p:cNvPr id="2" name="">
             <a:extLst xmlns:a="http://schemas.openxmlformats.org/drawingml/2006/main">
               <a:ext uri="{FF2B5EF4-FFF2-40B4-BE49-F238E27FC236}">
-                <a16:creationId xmlns:a16="http://schemas.microsoft.com/office/drawing/2014/main" id="{2C0041AB-F23E-49A3-9BC5-0B780C51FDBD}"/>
+                <a16:creationId xmlns:a16="http://schemas.microsoft.com/office/drawing/2014/main" id="{797582E7-F890-4942-B465-977FA9748EDB}"/>
               </a:ext>
             </a:extLst>
           </p:cNvPr>
@@ -4657,7 +4657,7 @@
           <p:cNvPr id="3" name="">
             <a:extLst xmlns:a="http://schemas.openxmlformats.org/drawingml/2006/main">
               <a:ext uri="{FF2B5EF4-FFF2-40B4-BE49-F238E27FC236}">
-                <a16:creationId xmlns:a16="http://schemas.microsoft.com/office/drawing/2014/main" id="{16ED07F4-7DD9-4A64-99F0-97AE802A0844}"/>
+                <a16:creationId xmlns:a16="http://schemas.microsoft.com/office/drawing/2014/main" id="{B2339612-A8A4-47AE-962E-D6B828F7711F}"/>
               </a:ext>
             </a:extLst>
           </p:cNvPr>
@@ -4714,7 +4714,7 @@
           <p:cNvPr id="4" name="">
             <a:extLst xmlns:a="http://schemas.openxmlformats.org/drawingml/2006/main">
               <a:ext uri="{FF2B5EF4-FFF2-40B4-BE49-F238E27FC236}">
-                <a16:creationId xmlns:a16="http://schemas.microsoft.com/office/drawing/2014/main" id="{A27FDB26-1BA4-4EC3-B787-5310A1ABE6AC}"/>
+                <a16:creationId xmlns:a16="http://schemas.microsoft.com/office/drawing/2014/main" id="{0D318B5D-7E47-49C0-A550-6A8403213AB2}"/>
               </a:ext>
             </a:extLst>
           </p:cNvPr>
@@ -4827,7 +4827,7 @@
           <p:cNvPr id="5" name="">
             <a:extLst xmlns:a="http://schemas.openxmlformats.org/drawingml/2006/main">
               <a:ext uri="{FF2B5EF4-FFF2-40B4-BE49-F238E27FC236}">
-                <a16:creationId xmlns:a16="http://schemas.microsoft.com/office/drawing/2014/main" id="{35EBBC20-63BA-451A-B163-DC52E7791E89}"/>
+                <a16:creationId xmlns:a16="http://schemas.microsoft.com/office/drawing/2014/main" id="{C058EF28-E4B2-4193-AAD2-95AC9120CC50}"/>
               </a:ext>
             </a:extLst>
           </p:cNvPr>
@@ -4884,7 +4884,7 @@
           <p:cNvPr id="6" name="">
             <a:extLst xmlns:a="http://schemas.openxmlformats.org/drawingml/2006/main">
               <a:ext uri="{FF2B5EF4-FFF2-40B4-BE49-F238E27FC236}">
-                <a16:creationId xmlns:a16="http://schemas.microsoft.com/office/drawing/2014/main" id="{799C0196-DDEE-44B6-97EF-4709E15A50F0}"/>
+                <a16:creationId xmlns:a16="http://schemas.microsoft.com/office/drawing/2014/main" id="{8D89909A-8457-4E3B-9D3F-5E66C1A375A3}"/>
               </a:ext>
             </a:extLst>
           </p:cNvPr>
@@ -4939,7 +4939,7 @@
     </p:spTree>
     <p:extLst>
       <p:ext uri="{BB962C8B-B14F-4D97-AF65-F5344CB8AC3E}">
-        <p14:creationId xmlns:p14="http://schemas.microsoft.com/office/powerpoint/2010/main" val="2116920105"/>
+        <p14:creationId xmlns:p14="http://schemas.microsoft.com/office/powerpoint/2010/main" val="1268335996"/>
       </p:ext>
     </p:extLst>
   </p:cSld>
@@ -4970,7 +4970,7 @@
           <p:cNvPr id="6" name="">
             <a:extLst xmlns:a="http://schemas.openxmlformats.org/drawingml/2006/main">
               <a:ext uri="{FF2B5EF4-FFF2-40B4-BE49-F238E27FC236}">
-                <a16:creationId xmlns:a16="http://schemas.microsoft.com/office/drawing/2014/main" id="{670BC616-63D4-4336-80A4-E1B9903F224A}"/>
+                <a16:creationId xmlns:a16="http://schemas.microsoft.com/office/drawing/2014/main" id="{912E3ECD-D829-4D5B-92D6-D8FFC95457A8}"/>
               </a:ext>
             </a:extLst>
           </p:cNvPr>
@@ -5027,7 +5027,7 @@
           <p:cNvPr id="2" name="">
             <a:extLst xmlns:a="http://schemas.openxmlformats.org/drawingml/2006/main">
               <a:ext uri="{FF2B5EF4-FFF2-40B4-BE49-F238E27FC236}">
-                <a16:creationId xmlns:a16="http://schemas.microsoft.com/office/drawing/2014/main" id="{6AFCA58E-15AF-4FEA-9384-974B1B0C2E0C}"/>
+                <a16:creationId xmlns:a16="http://schemas.microsoft.com/office/drawing/2014/main" id="{43D41F7F-7047-4F1C-A079-814FA00521E5}"/>
               </a:ext>
             </a:extLst>
           </p:cNvPr>
@@ -5084,7 +5084,7 @@
           <p:cNvPr id="3" name="">
             <a:extLst xmlns:a="http://schemas.openxmlformats.org/drawingml/2006/main">
               <a:ext uri="{FF2B5EF4-FFF2-40B4-BE49-F238E27FC236}">
-                <a16:creationId xmlns:a16="http://schemas.microsoft.com/office/drawing/2014/main" id="{2D21199B-6077-43B6-9CA6-1F20EDC98218}"/>
+                <a16:creationId xmlns:a16="http://schemas.microsoft.com/office/drawing/2014/main" id="{6DCB97ED-8E1C-4BC8-B08F-42C007B8ADC2}"/>
               </a:ext>
             </a:extLst>
           </p:cNvPr>
@@ -5141,7 +5141,7 @@
           <p:cNvPr id="4" name="">
             <a:extLst xmlns:a="http://schemas.openxmlformats.org/drawingml/2006/main">
               <a:ext uri="{FF2B5EF4-FFF2-40B4-BE49-F238E27FC236}">
-                <a16:creationId xmlns:a16="http://schemas.microsoft.com/office/drawing/2014/main" id="{BB90176D-8C5F-4659-97B1-F0FE43666817}"/>
+                <a16:creationId xmlns:a16="http://schemas.microsoft.com/office/drawing/2014/main" id="{45B95C63-61CA-452F-AA34-9D12C0C8766D}"/>
               </a:ext>
             </a:extLst>
           </p:cNvPr>
@@ -5282,7 +5282,7 @@
           <p:cNvPr id="5" name="">
             <a:extLst xmlns:a="http://schemas.openxmlformats.org/drawingml/2006/main">
               <a:ext uri="{FF2B5EF4-FFF2-40B4-BE49-F238E27FC236}">
-                <a16:creationId xmlns:a16="http://schemas.microsoft.com/office/drawing/2014/main" id="{191F6F20-18E2-45B6-A365-9E2CC7360F3C}"/>
+                <a16:creationId xmlns:a16="http://schemas.microsoft.com/office/drawing/2014/main" id="{97FFF9EB-360F-4D1C-9820-9A4B3AD0237D}"/>
               </a:ext>
             </a:extLst>
           </p:cNvPr>
@@ -5337,7 +5337,7 @@
     </p:spTree>
     <p:extLst>
       <p:ext uri="{BB962C8B-B14F-4D97-AF65-F5344CB8AC3E}">
-        <p14:creationId xmlns:p14="http://schemas.microsoft.com/office/powerpoint/2010/main" val="1073986983"/>
+        <p14:creationId xmlns:p14="http://schemas.microsoft.com/office/powerpoint/2010/main" val="1958526874"/>
       </p:ext>
     </p:extLst>
   </p:cSld>
@@ -5368,7 +5368,7 @@
           <p:cNvPr id="8" name="">
             <a:extLst xmlns:a="http://schemas.openxmlformats.org/drawingml/2006/main">
               <a:ext uri="{FF2B5EF4-FFF2-40B4-BE49-F238E27FC236}">
-                <a16:creationId xmlns:a16="http://schemas.microsoft.com/office/drawing/2014/main" id="{5AD64DDD-1855-4912-850B-0DB0E2AD3D30}"/>
+                <a16:creationId xmlns:a16="http://schemas.microsoft.com/office/drawing/2014/main" id="{AE126FAC-AE24-4B55-931F-06D4BF803093}"/>
               </a:ext>
             </a:extLst>
           </p:cNvPr>
@@ -5425,7 +5425,7 @@
           <p:cNvPr id="2" name="">
             <a:extLst xmlns:a="http://schemas.openxmlformats.org/drawingml/2006/main">
               <a:ext uri="{FF2B5EF4-FFF2-40B4-BE49-F238E27FC236}">
-                <a16:creationId xmlns:a16="http://schemas.microsoft.com/office/drawing/2014/main" id="{C7B79A4B-FA4B-4B22-9C3E-2484D5946C30}"/>
+                <a16:creationId xmlns:a16="http://schemas.microsoft.com/office/drawing/2014/main" id="{BC357784-D2E5-4E54-9441-FA74B61392BD}"/>
               </a:ext>
             </a:extLst>
           </p:cNvPr>
@@ -5482,7 +5482,7 @@
           <p:cNvPr id="3" name="">
             <a:extLst xmlns:a="http://schemas.openxmlformats.org/drawingml/2006/main">
               <a:ext uri="{FF2B5EF4-FFF2-40B4-BE49-F238E27FC236}">
-                <a16:creationId xmlns:a16="http://schemas.microsoft.com/office/drawing/2014/main" id="{EEC299CE-9FD8-4AD0-B870-D3D49C9AA1D2}"/>
+                <a16:creationId xmlns:a16="http://schemas.microsoft.com/office/drawing/2014/main" id="{29627D60-F27F-4A03-80F5-286BACCB392F}"/>
               </a:ext>
             </a:extLst>
           </p:cNvPr>
@@ -5539,7 +5539,7 @@
           <p:cNvPr id="4" name="">
             <a:extLst xmlns:a="http://schemas.openxmlformats.org/drawingml/2006/main">
               <a:ext uri="{FF2B5EF4-FFF2-40B4-BE49-F238E27FC236}">
-                <a16:creationId xmlns:a16="http://schemas.microsoft.com/office/drawing/2014/main" id="{B051D9EB-282A-4F0B-91E1-D8132ADC5182}"/>
+                <a16:creationId xmlns:a16="http://schemas.microsoft.com/office/drawing/2014/main" id="{FFA42CC0-1CFE-4A8D-91BC-F5E2D23BABEF}"/>
               </a:ext>
             </a:extLst>
           </p:cNvPr>
@@ -5652,7 +5652,7 @@
           <p:cNvPr id="5" name="">
             <a:extLst xmlns:a="http://schemas.openxmlformats.org/drawingml/2006/main">
               <a:ext uri="{FF2B5EF4-FFF2-40B4-BE49-F238E27FC236}">
-                <a16:creationId xmlns:a16="http://schemas.microsoft.com/office/drawing/2014/main" id="{9494D115-56B9-4F8B-BC67-C164069E3192}"/>
+                <a16:creationId xmlns:a16="http://schemas.microsoft.com/office/drawing/2014/main" id="{0085C520-EE1C-4C25-9B2E-5A8A33269B4C}"/>
               </a:ext>
             </a:extLst>
           </p:cNvPr>
@@ -5709,7 +5709,7 @@
           <p:cNvPr id="6" name="">
             <a:extLst xmlns:a="http://schemas.openxmlformats.org/drawingml/2006/main">
               <a:ext uri="{FF2B5EF4-FFF2-40B4-BE49-F238E27FC236}">
-                <a16:creationId xmlns:a16="http://schemas.microsoft.com/office/drawing/2014/main" id="{EB12FE00-3F33-418A-8997-2FE5EC363833}"/>
+                <a16:creationId xmlns:a16="http://schemas.microsoft.com/office/drawing/2014/main" id="{9A39AF1A-4B87-4FA2-8F47-EFEA51F73FB7}"/>
               </a:ext>
             </a:extLst>
           </p:cNvPr>
@@ -5766,7 +5766,7 @@
           <p:cNvPr id="7" name="">
             <a:extLst xmlns:a="http://schemas.openxmlformats.org/drawingml/2006/main">
               <a:ext uri="{FF2B5EF4-FFF2-40B4-BE49-F238E27FC236}">
-                <a16:creationId xmlns:a16="http://schemas.microsoft.com/office/drawing/2014/main" id="{17776CD0-E7DC-4C8F-8F70-8B7007F146C5}"/>
+                <a16:creationId xmlns:a16="http://schemas.microsoft.com/office/drawing/2014/main" id="{92B5DDBC-AB4A-423C-A7CB-0533901C4740}"/>
               </a:ext>
             </a:extLst>
           </p:cNvPr>
@@ -5821,7 +5821,7 @@
     </p:spTree>
     <p:extLst>
       <p:ext uri="{BB962C8B-B14F-4D97-AF65-F5344CB8AC3E}">
-        <p14:creationId xmlns:p14="http://schemas.microsoft.com/office/powerpoint/2010/main" val="143011181"/>
+        <p14:creationId xmlns:p14="http://schemas.microsoft.com/office/powerpoint/2010/main" val="2140802432"/>
       </p:ext>
     </p:extLst>
   </p:cSld>

--- a/lendet/2026-2027/mobile/lectures/ushtrimet-04-neon-rideshare-2026.pptx
+++ b/lendet/2026-2027/mobile/lectures/ushtrimet-04-neon-rideshare-2026.pptx
@@ -2,22 +2,22 @@
 <file path=ppt/presentation.xml><?xml version="1.0" encoding="utf-8"?>
 <p:presentation xmlns:p="http://schemas.openxmlformats.org/presentationml/2006/main">
   <p:sldMasterIdLst>
-    <p:sldMasterId xmlns:r="http://schemas.openxmlformats.org/officeDocument/2006/relationships" id="2147483648" r:id="R5a8353bbd7804fcc"/>
+    <p:sldMasterId xmlns:r="http://schemas.openxmlformats.org/officeDocument/2006/relationships" id="2147483648" r:id="R70bb337de7fc40d5"/>
   </p:sldMasterIdLst>
   <p:sldIdLst>
-    <p:sldId xmlns:r="http://schemas.openxmlformats.org/officeDocument/2006/relationships" id="256" r:id="R45dae6410fc04450"/>
-    <p:sldId xmlns:r="http://schemas.openxmlformats.org/officeDocument/2006/relationships" id="257" r:id="Rce1a035b3c194dcd"/>
-    <p:sldId xmlns:r="http://schemas.openxmlformats.org/officeDocument/2006/relationships" id="258" r:id="Rb9c32418e3d8450e"/>
-    <p:sldId xmlns:r="http://schemas.openxmlformats.org/officeDocument/2006/relationships" id="259" r:id="R65843505835844ca"/>
-    <p:sldId xmlns:r="http://schemas.openxmlformats.org/officeDocument/2006/relationships" id="260" r:id="Rde807cc6c0b34a5d"/>
-    <p:sldId xmlns:r="http://schemas.openxmlformats.org/officeDocument/2006/relationships" id="261" r:id="Rd96c6fbdec484e21"/>
-    <p:sldId xmlns:r="http://schemas.openxmlformats.org/officeDocument/2006/relationships" id="262" r:id="R5082aa97ca314ec9"/>
-    <p:sldId xmlns:r="http://schemas.openxmlformats.org/officeDocument/2006/relationships" id="263" r:id="Rc145b3d2a7e74780"/>
-    <p:sldId xmlns:r="http://schemas.openxmlformats.org/officeDocument/2006/relationships" id="264" r:id="R34b3b1565f7b4765"/>
-    <p:sldId xmlns:r="http://schemas.openxmlformats.org/officeDocument/2006/relationships" id="265" r:id="R31d39f9ea44b48e7"/>
-    <p:sldId xmlns:r="http://schemas.openxmlformats.org/officeDocument/2006/relationships" id="266" r:id="R2eb32d5a5b754cef"/>
-    <p:sldId xmlns:r="http://schemas.openxmlformats.org/officeDocument/2006/relationships" id="267" r:id="Rf7670506f3ff490a"/>
-    <p:sldId xmlns:r="http://schemas.openxmlformats.org/officeDocument/2006/relationships" id="268" r:id="R5827cd30c51446f7"/>
+    <p:sldId xmlns:r="http://schemas.openxmlformats.org/officeDocument/2006/relationships" id="256" r:id="Rcf993a7ba61e41f2"/>
+    <p:sldId xmlns:r="http://schemas.openxmlformats.org/officeDocument/2006/relationships" id="257" r:id="R6b286193699149ba"/>
+    <p:sldId xmlns:r="http://schemas.openxmlformats.org/officeDocument/2006/relationships" id="258" r:id="R7cd6aced06774b69"/>
+    <p:sldId xmlns:r="http://schemas.openxmlformats.org/officeDocument/2006/relationships" id="259" r:id="Reb81822b182846d1"/>
+    <p:sldId xmlns:r="http://schemas.openxmlformats.org/officeDocument/2006/relationships" id="260" r:id="R36d0a90a43cf4b30"/>
+    <p:sldId xmlns:r="http://schemas.openxmlformats.org/officeDocument/2006/relationships" id="261" r:id="Rf14c8860a7a847e2"/>
+    <p:sldId xmlns:r="http://schemas.openxmlformats.org/officeDocument/2006/relationships" id="262" r:id="R3acbc96ff2ff489d"/>
+    <p:sldId xmlns:r="http://schemas.openxmlformats.org/officeDocument/2006/relationships" id="263" r:id="R63084ded56734fea"/>
+    <p:sldId xmlns:r="http://schemas.openxmlformats.org/officeDocument/2006/relationships" id="264" r:id="Rba79b859b3474401"/>
+    <p:sldId xmlns:r="http://schemas.openxmlformats.org/officeDocument/2006/relationships" id="265" r:id="R597e65534039466f"/>
+    <p:sldId xmlns:r="http://schemas.openxmlformats.org/officeDocument/2006/relationships" id="266" r:id="Rc49aa2f9c54745cd"/>
+    <p:sldId xmlns:r="http://schemas.openxmlformats.org/officeDocument/2006/relationships" id="267" r:id="Rd6bcb2075b454e53"/>
+    <p:sldId xmlns:r="http://schemas.openxmlformats.org/officeDocument/2006/relationships" id="268" r:id="Rc2a2bba2e75f4b3c"/>
   </p:sldIdLst>
   <p:sldSz cx="12192000" cy="6858000"/>
   <p:notesSz cx="6858000" cy="9144000"/>
@@ -62,7 +62,7 @@
   </p:cSld>
   <p:clrMap bg1="lt1" tx1="dk1" bg2="lt2" tx2="dk2" accent1="accent1" accent2="accent2" accent3="accent3" accent4="accent4" accent5="accent5" accent6="accent6" hlink="hlink" folHlink="folHlink"/>
   <p:sldLayoutIdLst>
-    <p:sldLayoutId xmlns:r="http://schemas.openxmlformats.org/officeDocument/2006/relationships" id="2147483649" r:id="R7964151b5f1541db"/>
+    <p:sldLayoutId xmlns:r="http://schemas.openxmlformats.org/officeDocument/2006/relationships" id="2147483649" r:id="R545eff11005c477f"/>
   </p:sldLayoutIdLst>
   <p:txStyles>
     <p:titleStyle>
@@ -610,10 +610,10 @@
       </p:grpSpPr>
       <p:sp>
         <p:nvSpPr>
-          <p:cNvPr id="8" name="">
-            <a:extLst xmlns:a="http://schemas.openxmlformats.org/drawingml/2006/main">
-              <a:ext uri="{FF2B5EF4-FFF2-40B4-BE49-F238E27FC236}">
-                <a16:creationId xmlns:a16="http://schemas.microsoft.com/office/drawing/2014/main" id="{C7273CD9-8CA9-42A3-8CBE-A5F55AF29394}"/>
+          <p:cNvPr id="9" name="">
+            <a:extLst xmlns:a="http://schemas.openxmlformats.org/drawingml/2006/main">
+              <a:ext uri="{FF2B5EF4-FFF2-40B4-BE49-F238E27FC236}">
+                <a16:creationId xmlns:a16="http://schemas.microsoft.com/office/drawing/2014/main" id="{6C063C94-D482-4D64-AE93-E31D91AA31A8}"/>
               </a:ext>
             </a:extLst>
           </p:cNvPr>
@@ -660,7 +660,7 @@
                 <a:ea typeface="Arial"/>
                 <a:cs typeface="Arial"/>
               </a:rPr>
-              <a:t>USHTRIMET 4 · 08.10.2026</a:t>
+              <a:t>USHTRIMET 4 · 08.10.2026 · PARASHIKO PARA KODIT</a:t>
             </a:r>
           </a:p>
         </p:txBody>
@@ -670,7 +670,7 @@
           <p:cNvPr id="2" name="">
             <a:extLst xmlns:a="http://schemas.openxmlformats.org/drawingml/2006/main">
               <a:ext uri="{FF2B5EF4-FFF2-40B4-BE49-F238E27FC236}">
-                <a16:creationId xmlns:a16="http://schemas.microsoft.com/office/drawing/2014/main" id="{D89FEAB9-1752-42F1-A6B9-DB7E94F5A12A}"/>
+                <a16:creationId xmlns:a16="http://schemas.microsoft.com/office/drawing/2014/main" id="{43A5D6B5-ABF1-40C8-A324-EFEB8676D386}"/>
               </a:ext>
             </a:extLst>
           </p:cNvPr>
@@ -724,14 +724,14 @@
       </p:sp>
       <p:pic>
         <p:nvPicPr>
-          <p:cNvPr id="10" name=""/>
+          <p:cNvPr id="11" name=""/>
           <p:cNvPicPr>
             <a:picLocks xmlns:a="http://schemas.openxmlformats.org/drawingml/2006/main" noChangeAspect="1"/>
           </p:cNvPicPr>
           <p:nvPr/>
         </p:nvPicPr>
         <p:blipFill>
-          <a:blip xmlns:r="http://schemas.openxmlformats.org/officeDocument/2006/relationships" xmlns:a="http://schemas.openxmlformats.org/drawingml/2006/main" r:embed="Rf27b915d9ec443ba"/>
+          <a:blip xmlns:r="http://schemas.openxmlformats.org/officeDocument/2006/relationships" xmlns:a="http://schemas.openxmlformats.org/drawingml/2006/main" r:embed="R13f6ce79f1b14235"/>
           <a:stretch xmlns:a="http://schemas.openxmlformats.org/drawingml/2006/main"/>
         </p:blipFill>
         <p:spPr>
@@ -749,19 +749,19 @@
           <p:cNvPr id="4" name="">
             <a:extLst xmlns:a="http://schemas.openxmlformats.org/drawingml/2006/main">
               <a:ext uri="{FF2B5EF4-FFF2-40B4-BE49-F238E27FC236}">
-                <a16:creationId xmlns:a16="http://schemas.microsoft.com/office/drawing/2014/main" id="{F4B771CA-56FF-4E47-BDDF-9E8F1E4ADB3B}"/>
-              </a:ext>
-            </a:extLst>
-          </p:cNvPr>
-          <p:cNvSpPr>
-            <a:spLocks xmlns:a="http://schemas.openxmlformats.org/drawingml/2006/main" noGrp="1"/>
-          </p:cNvSpPr>
-          <p:nvPr/>
-        </p:nvSpPr>
-        <p:spPr>
-          <a:xfrm xmlns:a="http://schemas.openxmlformats.org/drawingml/2006/main">
-            <a:off x="609600" y="857250"/>
-            <a:ext cx="9429750" cy="714375"/>
+                <a16:creationId xmlns:a16="http://schemas.microsoft.com/office/drawing/2014/main" id="{FB4E3250-B00A-4443-A1CD-DB2AD3563D51}"/>
+              </a:ext>
+            </a:extLst>
+          </p:cNvPr>
+          <p:cNvSpPr>
+            <a:spLocks xmlns:a="http://schemas.openxmlformats.org/drawingml/2006/main" noGrp="1"/>
+          </p:cNvSpPr>
+          <p:nvPr/>
+        </p:nvSpPr>
+        <p:spPr>
+          <a:xfrm xmlns:a="http://schemas.openxmlformats.org/drawingml/2006/main">
+            <a:off x="609600" y="933450"/>
+            <a:ext cx="9429750" cy="952500"/>
           </a:xfrm>
           <a:prstGeom xmlns:a="http://schemas.openxmlformats.org/drawingml/2006/main" prst="rect">
             <a:avLst/>
@@ -796,109 +796,149 @@
                 <a:ea typeface="Arial"/>
                 <a:cs typeface="Arial"/>
               </a:rPr>
-              <a:t>Infrastruktura e ushtrimit të javës 4</a:t>
-            </a:r>
-          </a:p>
-        </p:txBody>
-      </p:sp>
-      <p:pic>
-        <p:nvPicPr>
-          <p:cNvPr id="12" name=""/>
-          <p:cNvPicPr>
-            <a:picLocks xmlns:a="http://schemas.openxmlformats.org/drawingml/2006/main" noChangeAspect="1"/>
-          </p:cNvPicPr>
-          <p:nvPr/>
-        </p:nvPicPr>
-        <p:blipFill>
-          <a:blip xmlns:r="http://schemas.openxmlformats.org/officeDocument/2006/relationships" xmlns:a="http://schemas.openxmlformats.org/drawingml/2006/main" r:embed="R051daa573b0a4278"/>
-          <a:stretch xmlns:a="http://schemas.openxmlformats.org/drawingml/2006/main"/>
-        </p:blipFill>
-        <p:spPr>
-          <a:xfrm xmlns:a="http://schemas.openxmlformats.org/drawingml/2006/main">
-            <a:off x="609600" y="1770063"/>
-            <a:ext cx="10953750" cy="3651250"/>
-          </a:xfrm>
-          <a:prstGeom xmlns:a="http://schemas.openxmlformats.org/drawingml/2006/main" prst="rect">
-            <a:avLst/>
-          </a:prstGeom>
-        </p:spPr>
-      </p:pic>
+              <a:t>Një ndryshim ore, dy ekrane për ta provuar</a:t>
+            </a:r>
+          </a:p>
+        </p:txBody>
+      </p:sp>
+      <p:sp>
+        <p:nvSpPr>
+          <p:cNvPr id="5" name="">
+            <a:extLst xmlns:a="http://schemas.openxmlformats.org/drawingml/2006/main">
+              <a:ext uri="{FF2B5EF4-FFF2-40B4-BE49-F238E27FC236}">
+                <a16:creationId xmlns:a16="http://schemas.microsoft.com/office/drawing/2014/main" id="{CB2C0062-5C44-4AFE-82D1-4310282A297E}"/>
+              </a:ext>
+            </a:extLst>
+          </p:cNvPr>
+          <p:cNvSpPr>
+            <a:spLocks xmlns:a="http://schemas.openxmlformats.org/drawingml/2006/main" noGrp="1"/>
+          </p:cNvSpPr>
+          <p:nvPr/>
+        </p:nvSpPr>
+        <p:spPr>
+          <a:xfrm xmlns:a="http://schemas.openxmlformats.org/drawingml/2006/main">
+            <a:off x="609600" y="1952625"/>
+            <a:ext cx="10953750" cy="1666875"/>
+          </a:xfrm>
+          <a:prstGeom xmlns:a="http://schemas.openxmlformats.org/drawingml/2006/main" prst="rect">
+            <a:avLst/>
+          </a:prstGeom>
+          <a:noFill xmlns:a="http://schemas.openxmlformats.org/drawingml/2006/main"/>
+          <a:ln xmlns:a="http://schemas.openxmlformats.org/drawingml/2006/main" w="0">
+            <a:noFill/>
+          </a:ln>
+        </p:spPr>
+        <p:txBody>
+          <a:bodyPr xmlns:a="http://schemas.openxmlformats.org/drawingml/2006/main">
+            <a:noAutofit/>
+          </a:bodyPr>
+          <a:lstStyle xmlns:a="http://schemas.openxmlformats.org/drawingml/2006/main"/>
+          <a:p xmlns:a="http://schemas.openxmlformats.org/drawingml/2006/main">
+            <a:pPr>
+              <a:defRPr sz="2025" b="0">
+                <a:solidFill>
+                  <a:srgbClr val="EAF1FF"/>
+                </a:solidFill>
+                <a:latin typeface="Arial"/>
+                <a:ea typeface="Arial"/>
+                <a:cs typeface="Arial"/>
+              </a:defRPr>
+            </a:pPr>
+            <a:r>
+              <a:rPr sz="2025" b="0">
+                <a:solidFill>
+                  <a:srgbClr val="EAF1FF"/>
+                </a:solidFill>
+                <a:latin typeface="Arial"/>
+                <a:ea typeface="Arial"/>
+                <a:cs typeface="Arial"/>
+              </a:rPr>
+              <a:t>Sot RideShare për Prishtinë–AAB do t’i lexojë udhëtimet nga Neon.</a:t>
+            </a:r>
+          </a:p>
+          <a:p xmlns:a="http://schemas.openxmlformats.org/drawingml/2006/main">
+            <a:r>
+              <a:t/>
+            </a:r>
+          </a:p>
+          <a:p xmlns:a="http://schemas.openxmlformats.org/drawingml/2006/main">
+            <a:pPr>
+              <a:defRPr sz="2025" b="0">
+                <a:solidFill>
+                  <a:srgbClr val="EAF1FF"/>
+                </a:solidFill>
+                <a:latin typeface="Arial"/>
+                <a:ea typeface="Arial"/>
+                <a:cs typeface="Arial"/>
+              </a:defRPr>
+            </a:pPr>
+            <a:r>
+              <a:rPr sz="2025" b="0">
+                <a:solidFill>
+                  <a:srgbClr val="EAF1FF"/>
+                </a:solidFill>
+                <a:latin typeface="Arial"/>
+                <a:ea typeface="Arial"/>
+                <a:cs typeface="Arial"/>
+              </a:rPr>
+              <a:t>Ora në databazë ndryshon nga 08:15 në 08:25. Telefoni ende nuk është rifreskuar.</a:t>
+            </a:r>
+          </a:p>
+        </p:txBody>
+      </p:sp>
       <p:sp>
         <p:nvSpPr>
           <p:cNvPr id="6" name="">
             <a:extLst xmlns:a="http://schemas.openxmlformats.org/drawingml/2006/main">
               <a:ext uri="{FF2B5EF4-FFF2-40B4-BE49-F238E27FC236}">
-                <a16:creationId xmlns:a16="http://schemas.microsoft.com/office/drawing/2014/main" id="{FCC556C1-0C46-47CF-AA35-D3A8C8B591BC}"/>
-              </a:ext>
-            </a:extLst>
-          </p:cNvPr>
-          <p:cNvSpPr>
-            <a:spLocks xmlns:a="http://schemas.openxmlformats.org/drawingml/2006/main" noGrp="1"/>
-          </p:cNvSpPr>
-          <p:nvPr/>
-        </p:nvSpPr>
-        <p:spPr>
-          <a:xfrm xmlns:a="http://schemas.openxmlformats.org/drawingml/2006/main">
-            <a:off x="609600" y="5667375"/>
-            <a:ext cx="10953750" cy="619125"/>
-          </a:xfrm>
-          <a:prstGeom xmlns:a="http://schemas.openxmlformats.org/drawingml/2006/main" prst="rect">
-            <a:avLst/>
-          </a:prstGeom>
-          <a:noFill xmlns:a="http://schemas.openxmlformats.org/drawingml/2006/main"/>
-          <a:ln xmlns:a="http://schemas.openxmlformats.org/drawingml/2006/main" w="0">
-            <a:noFill/>
-          </a:ln>
-        </p:spPr>
-        <p:txBody>
-          <a:bodyPr xmlns:a="http://schemas.openxmlformats.org/drawingml/2006/main">
-            <a:noAutofit/>
-          </a:bodyPr>
-          <a:lstStyle xmlns:a="http://schemas.openxmlformats.org/drawingml/2006/main"/>
-          <a:p xmlns:a="http://schemas.openxmlformats.org/drawingml/2006/main">
-            <a:pPr>
-              <a:defRPr sz="1725" b="0">
-                <a:solidFill>
-                  <a:srgbClr val="EAF1FF"/>
-                </a:solidFill>
-                <a:latin typeface="Arial"/>
-                <a:ea typeface="Arial"/>
-                <a:cs typeface="Arial"/>
-              </a:defRPr>
-            </a:pPr>
-            <a:r>
-              <a:rPr sz="1725" b="0">
-                <a:solidFill>
-                  <a:srgbClr val="EAF1FF"/>
-                </a:solidFill>
-                <a:latin typeface="Arial"/>
-                <a:ea typeface="Arial"/>
-                <a:cs typeface="Arial"/>
-              </a:rPr>
-              <a:t>Zhvillojmë lokalisht, publikojmë në Vercel dhe lexojmë të dhënat në Neon.</a:t>
-            </a:r>
-          </a:p>
-          <a:p xmlns:a="http://schemas.openxmlformats.org/drawingml/2006/main">
-            <a:pPr>
-              <a:defRPr sz="1725" b="0">
-                <a:solidFill>
-                  <a:srgbClr val="EAF1FF"/>
-                </a:solidFill>
-                <a:latin typeface="Arial"/>
-                <a:ea typeface="Arial"/>
-                <a:cs typeface="Arial"/>
-              </a:defRPr>
-            </a:pPr>
-            <a:r>
-              <a:rPr sz="1725" b="0">
-                <a:solidFill>
-                  <a:srgbClr val="EAF1FF"/>
-                </a:solidFill>
-                <a:latin typeface="Arial"/>
-                <a:ea typeface="Arial"/>
-                <a:cs typeface="Arial"/>
-              </a:rPr>
-              <a:t>Ndryshimi i orës shihet pas rifreskimit të listës dhe detajeve.</a:t>
+                <a16:creationId xmlns:a16="http://schemas.microsoft.com/office/drawing/2014/main" id="{96C8BFE1-0BE4-4DB6-A89C-62996056DF51}"/>
+              </a:ext>
+            </a:extLst>
+          </p:cNvPr>
+          <p:cNvSpPr>
+            <a:spLocks xmlns:a="http://schemas.openxmlformats.org/drawingml/2006/main" noGrp="1"/>
+          </p:cNvSpPr>
+          <p:nvPr/>
+        </p:nvSpPr>
+        <p:spPr>
+          <a:xfrm xmlns:a="http://schemas.openxmlformats.org/drawingml/2006/main">
+            <a:off x="609600" y="3714750"/>
+            <a:ext cx="10953750" cy="666750"/>
+          </a:xfrm>
+          <a:prstGeom xmlns:a="http://schemas.openxmlformats.org/drawingml/2006/main" prst="rect">
+            <a:avLst/>
+          </a:prstGeom>
+          <a:noFill xmlns:a="http://schemas.openxmlformats.org/drawingml/2006/main"/>
+          <a:ln xmlns:a="http://schemas.openxmlformats.org/drawingml/2006/main" w="0">
+            <a:noFill/>
+          </a:ln>
+        </p:spPr>
+        <p:txBody>
+          <a:bodyPr xmlns:a="http://schemas.openxmlformats.org/drawingml/2006/main">
+            <a:noAutofit/>
+          </a:bodyPr>
+          <a:lstStyle xmlns:a="http://schemas.openxmlformats.org/drawingml/2006/main"/>
+          <a:p xmlns:a="http://schemas.openxmlformats.org/drawingml/2006/main">
+            <a:pPr>
+              <a:defRPr sz="2100" b="1">
+                <a:solidFill>
+                  <a:srgbClr val="89DDFF"/>
+                </a:solidFill>
+                <a:latin typeface="Arial"/>
+                <a:ea typeface="Arial"/>
+                <a:cs typeface="Arial"/>
+              </a:defRPr>
+            </a:pPr>
+            <a:r>
+              <a:rPr sz="2100" b="1">
+                <a:solidFill>
+                  <a:srgbClr val="89DDFF"/>
+                </a:solidFill>
+                <a:latin typeface="Arial"/>
+                <a:ea typeface="Arial"/>
+                <a:cs typeface="Arial"/>
+              </a:rPr>
+              <a:t>Çfarë prisni në ekran para rifreskimit?</a:t>
             </a:r>
           </a:p>
         </p:txBody>
@@ -908,54 +948,167 @@
           <p:cNvPr id="7" name="">
             <a:extLst xmlns:a="http://schemas.openxmlformats.org/drawingml/2006/main">
               <a:ext uri="{FF2B5EF4-FFF2-40B4-BE49-F238E27FC236}">
-                <a16:creationId xmlns:a16="http://schemas.microsoft.com/office/drawing/2014/main" id="{001A7120-BB15-4684-87A5-63E851F646BE}"/>
-              </a:ext>
-            </a:extLst>
-          </p:cNvPr>
-          <p:cNvSpPr>
-            <a:spLocks xmlns:a="http://schemas.openxmlformats.org/drawingml/2006/main" noGrp="1"/>
-          </p:cNvSpPr>
-          <p:nvPr/>
-        </p:nvSpPr>
-        <p:spPr>
-          <a:xfrm xmlns:a="http://schemas.openxmlformats.org/drawingml/2006/main">
-            <a:off x="609600" y="6315075"/>
-            <a:ext cx="10953750" cy="285750"/>
-          </a:xfrm>
-          <a:prstGeom xmlns:a="http://schemas.openxmlformats.org/drawingml/2006/main" prst="rect">
-            <a:avLst/>
-          </a:prstGeom>
-          <a:noFill xmlns:a="http://schemas.openxmlformats.org/drawingml/2006/main"/>
-          <a:ln xmlns:a="http://schemas.openxmlformats.org/drawingml/2006/main" w="0">
-            <a:noFill/>
-          </a:ln>
-        </p:spPr>
-        <p:txBody>
-          <a:bodyPr xmlns:a="http://schemas.openxmlformats.org/drawingml/2006/main">
-            <a:noAutofit/>
-          </a:bodyPr>
-          <a:lstStyle xmlns:a="http://schemas.openxmlformats.org/drawingml/2006/main"/>
-          <a:p xmlns:a="http://schemas.openxmlformats.org/drawingml/2006/main">
-            <a:pPr>
-              <a:defRPr sz="1350" b="0">
-                <a:solidFill>
-                  <a:srgbClr val="89DDFF"/>
-                </a:solidFill>
-                <a:latin typeface="Arial"/>
-                <a:ea typeface="Arial"/>
-                <a:cs typeface="Arial"/>
-              </a:defRPr>
-            </a:pPr>
-            <a:r>
-              <a:rPr sz="1350" b="0">
-                <a:solidFill>
-                  <a:srgbClr val="89DDFF"/>
-                </a:solidFill>
-                <a:latin typeface="Arial"/>
-                <a:ea typeface="Arial"/>
-                <a:cs typeface="Arial"/>
-              </a:rPr>
-              <a:t>Në faqe: Hap udhëzimin me kod ↗</a:t>
+                <a16:creationId xmlns:a16="http://schemas.microsoft.com/office/drawing/2014/main" id="{529BFD39-633A-4507-869A-A8F235DD4E1A}"/>
+              </a:ext>
+            </a:extLst>
+          </p:cNvPr>
+          <p:cNvSpPr>
+            <a:spLocks xmlns:a="http://schemas.openxmlformats.org/drawingml/2006/main" noGrp="1"/>
+          </p:cNvSpPr>
+          <p:nvPr/>
+        </p:nvSpPr>
+        <p:spPr>
+          <a:xfrm xmlns:a="http://schemas.openxmlformats.org/drawingml/2006/main">
+            <a:off x="609600" y="4429125"/>
+            <a:ext cx="10953750" cy="1381125"/>
+          </a:xfrm>
+          <a:prstGeom xmlns:a="http://schemas.openxmlformats.org/drawingml/2006/main" prst="rect">
+            <a:avLst/>
+          </a:prstGeom>
+          <a:noFill xmlns:a="http://schemas.openxmlformats.org/drawingml/2006/main"/>
+          <a:ln xmlns:a="http://schemas.openxmlformats.org/drawingml/2006/main" w="0">
+            <a:noFill/>
+          </a:ln>
+        </p:spPr>
+        <p:txBody>
+          <a:bodyPr xmlns:a="http://schemas.openxmlformats.org/drawingml/2006/main">
+            <a:noAutofit/>
+          </a:bodyPr>
+          <a:lstStyle xmlns:a="http://schemas.openxmlformats.org/drawingml/2006/main"/>
+          <a:p xmlns:a="http://schemas.openxmlformats.org/drawingml/2006/main">
+            <a:pPr>
+              <a:defRPr sz="1875" b="0">
+                <a:solidFill>
+                  <a:srgbClr val="EAF1FF"/>
+                </a:solidFill>
+                <a:latin typeface="Arial"/>
+                <a:ea typeface="Arial"/>
+                <a:cs typeface="Arial"/>
+              </a:defRPr>
+            </a:pPr>
+            <a:r>
+              <a:rPr sz="1875" b="0">
+                <a:solidFill>
+                  <a:srgbClr val="EAF1FF"/>
+                </a:solidFill>
+                <a:latin typeface="Arial"/>
+                <a:ea typeface="Arial"/>
+                <a:cs typeface="Arial"/>
+              </a:rPr>
+              <a:t>A · Shfaqet vetvetiu ora 08:25.</a:t>
+            </a:r>
+          </a:p>
+          <a:p xmlns:a="http://schemas.openxmlformats.org/drawingml/2006/main">
+            <a:r>
+              <a:t/>
+            </a:r>
+          </a:p>
+          <a:p xmlns:a="http://schemas.openxmlformats.org/drawingml/2006/main">
+            <a:pPr>
+              <a:defRPr sz="1875" b="0">
+                <a:solidFill>
+                  <a:srgbClr val="EAF1FF"/>
+                </a:solidFill>
+                <a:latin typeface="Arial"/>
+                <a:ea typeface="Arial"/>
+                <a:cs typeface="Arial"/>
+              </a:defRPr>
+            </a:pPr>
+            <a:r>
+              <a:rPr sz="1875" b="0">
+                <a:solidFill>
+                  <a:srgbClr val="EAF1FF"/>
+                </a:solidFill>
+                <a:latin typeface="Arial"/>
+                <a:ea typeface="Arial"/>
+                <a:cs typeface="Arial"/>
+              </a:rPr>
+              <a:t>B · Mbetet pamja e mëparshme derisa të rifreskojmë.</a:t>
+            </a:r>
+          </a:p>
+          <a:p xmlns:a="http://schemas.openxmlformats.org/drawingml/2006/main">
+            <a:r>
+              <a:t/>
+            </a:r>
+          </a:p>
+          <a:p xmlns:a="http://schemas.openxmlformats.org/drawingml/2006/main">
+            <a:pPr>
+              <a:defRPr sz="1875" b="0">
+                <a:solidFill>
+                  <a:srgbClr val="EAF1FF"/>
+                </a:solidFill>
+                <a:latin typeface="Arial"/>
+                <a:ea typeface="Arial"/>
+                <a:cs typeface="Arial"/>
+              </a:defRPr>
+            </a:pPr>
+            <a:r>
+              <a:rPr sz="1875" b="0">
+                <a:solidFill>
+                  <a:srgbClr val="EAF1FF"/>
+                </a:solidFill>
+                <a:latin typeface="Arial"/>
+                <a:ea typeface="Arial"/>
+                <a:cs typeface="Arial"/>
+              </a:rPr>
+              <a:t>C · Duhet Push në GitHub për ndryshimin e orës në Neon.</a:t>
+            </a:r>
+          </a:p>
+        </p:txBody>
+      </p:sp>
+      <p:sp>
+        <p:nvSpPr>
+          <p:cNvPr id="8" name="">
+            <a:extLst xmlns:a="http://schemas.openxmlformats.org/drawingml/2006/main">
+              <a:ext uri="{FF2B5EF4-FFF2-40B4-BE49-F238E27FC236}">
+                <a16:creationId xmlns:a16="http://schemas.microsoft.com/office/drawing/2014/main" id="{424AFDF5-9642-44E9-B74A-366414F7EFF9}"/>
+              </a:ext>
+            </a:extLst>
+          </p:cNvPr>
+          <p:cNvSpPr>
+            <a:spLocks xmlns:a="http://schemas.openxmlformats.org/drawingml/2006/main" noGrp="1"/>
+          </p:cNvSpPr>
+          <p:nvPr/>
+        </p:nvSpPr>
+        <p:spPr>
+          <a:xfrm xmlns:a="http://schemas.openxmlformats.org/drawingml/2006/main">
+            <a:off x="609600" y="5953125"/>
+            <a:ext cx="10953750" cy="381000"/>
+          </a:xfrm>
+          <a:prstGeom xmlns:a="http://schemas.openxmlformats.org/drawingml/2006/main" prst="rect">
+            <a:avLst/>
+          </a:prstGeom>
+          <a:noFill xmlns:a="http://schemas.openxmlformats.org/drawingml/2006/main"/>
+          <a:ln xmlns:a="http://schemas.openxmlformats.org/drawingml/2006/main" w="0">
+            <a:noFill/>
+          </a:ln>
+        </p:spPr>
+        <p:txBody>
+          <a:bodyPr xmlns:a="http://schemas.openxmlformats.org/drawingml/2006/main">
+            <a:noAutofit/>
+          </a:bodyPr>
+          <a:lstStyle xmlns:a="http://schemas.openxmlformats.org/drawingml/2006/main"/>
+          <a:p xmlns:a="http://schemas.openxmlformats.org/drawingml/2006/main">
+            <a:pPr>
+              <a:defRPr sz="1650" b="0">
+                <a:solidFill>
+                  <a:srgbClr val="8EE9D1"/>
+                </a:solidFill>
+                <a:latin typeface="Arial"/>
+                <a:ea typeface="Arial"/>
+                <a:cs typeface="Arial"/>
+              </a:defRPr>
+            </a:pPr>
+            <a:r>
+              <a:rPr sz="1650" b="0">
+                <a:solidFill>
+                  <a:srgbClr val="8EE9D1"/>
+                </a:solidFill>
+                <a:latin typeface="Arial"/>
+                <a:ea typeface="Arial"/>
+                <a:cs typeface="Arial"/>
+              </a:rPr>
+              <a:t>Votoni, krahasoni arsyetimet dhe hapni përgjigjen në versionin interaktiv.</a:t>
             </a:r>
           </a:p>
         </p:txBody>
@@ -963,7 +1116,7 @@
     </p:spTree>
     <p:extLst>
       <p:ext uri="{BB962C8B-B14F-4D97-AF65-F5344CB8AC3E}">
-        <p14:creationId xmlns:p14="http://schemas.microsoft.com/office/powerpoint/2010/main" val="787711310"/>
+        <p14:creationId xmlns:p14="http://schemas.microsoft.com/office/powerpoint/2010/main" val="180375183"/>
       </p:ext>
     </p:extLst>
   </p:cSld>
@@ -994,7 +1147,7 @@
           <p:cNvPr id="7" name="">
             <a:extLst xmlns:a="http://schemas.openxmlformats.org/drawingml/2006/main">
               <a:ext uri="{FF2B5EF4-FFF2-40B4-BE49-F238E27FC236}">
-                <a16:creationId xmlns:a16="http://schemas.microsoft.com/office/drawing/2014/main" id="{3CFF681C-4D02-4D99-8944-5143629EDF2D}"/>
+                <a16:creationId xmlns:a16="http://schemas.microsoft.com/office/drawing/2014/main" id="{F806FF4E-18E9-4824-955C-63CB247DD2CE}"/>
               </a:ext>
             </a:extLst>
           </p:cNvPr>
@@ -1051,7 +1204,7 @@
           <p:cNvPr id="2" name="">
             <a:extLst xmlns:a="http://schemas.openxmlformats.org/drawingml/2006/main">
               <a:ext uri="{FF2B5EF4-FFF2-40B4-BE49-F238E27FC236}">
-                <a16:creationId xmlns:a16="http://schemas.microsoft.com/office/drawing/2014/main" id="{026F9C7E-A52A-49B2-8038-937AA7763E23}"/>
+                <a16:creationId xmlns:a16="http://schemas.microsoft.com/office/drawing/2014/main" id="{4D241A41-FAB1-461B-9A1D-1F150356A6C1}"/>
               </a:ext>
             </a:extLst>
           </p:cNvPr>
@@ -1108,7 +1261,7 @@
           <p:cNvPr id="3" name="">
             <a:extLst xmlns:a="http://schemas.openxmlformats.org/drawingml/2006/main">
               <a:ext uri="{FF2B5EF4-FFF2-40B4-BE49-F238E27FC236}">
-                <a16:creationId xmlns:a16="http://schemas.microsoft.com/office/drawing/2014/main" id="{6BB8C469-E4F8-4A83-B04B-D5F771341ED5}"/>
+                <a16:creationId xmlns:a16="http://schemas.microsoft.com/office/drawing/2014/main" id="{FDD9737A-B068-444D-90D0-B1B6A5BA12BF}"/>
               </a:ext>
             </a:extLst>
           </p:cNvPr>
@@ -1165,7 +1318,7 @@
           <p:cNvPr id="4" name="">
             <a:extLst xmlns:a="http://schemas.openxmlformats.org/drawingml/2006/main">
               <a:ext uri="{FF2B5EF4-FFF2-40B4-BE49-F238E27FC236}">
-                <a16:creationId xmlns:a16="http://schemas.microsoft.com/office/drawing/2014/main" id="{17F5016D-2BEF-4526-9934-69BE7BCAD1FF}"/>
+                <a16:creationId xmlns:a16="http://schemas.microsoft.com/office/drawing/2014/main" id="{15EBFE3E-C63F-47C1-A7ED-8408C615ED44}"/>
               </a:ext>
             </a:extLst>
           </p:cNvPr>
@@ -1306,7 +1459,7 @@
           <p:cNvPr id="5" name="">
             <a:extLst xmlns:a="http://schemas.openxmlformats.org/drawingml/2006/main">
               <a:ext uri="{FF2B5EF4-FFF2-40B4-BE49-F238E27FC236}">
-                <a16:creationId xmlns:a16="http://schemas.microsoft.com/office/drawing/2014/main" id="{9AFA3CA3-7F02-4057-8E54-1C924A536376}"/>
+                <a16:creationId xmlns:a16="http://schemas.microsoft.com/office/drawing/2014/main" id="{907E618A-E301-40F4-BF1C-89A7A1CDF1D1}"/>
               </a:ext>
             </a:extLst>
           </p:cNvPr>
@@ -1363,7 +1516,7 @@
           <p:cNvPr id="6" name="">
             <a:extLst xmlns:a="http://schemas.openxmlformats.org/drawingml/2006/main">
               <a:ext uri="{FF2B5EF4-FFF2-40B4-BE49-F238E27FC236}">
-                <a16:creationId xmlns:a16="http://schemas.microsoft.com/office/drawing/2014/main" id="{598DAFCA-9F05-4259-8150-32AD1D4DE852}"/>
+                <a16:creationId xmlns:a16="http://schemas.microsoft.com/office/drawing/2014/main" id="{07CE5D57-4567-4F79-8F63-62B3CD7A7B04}"/>
               </a:ext>
             </a:extLst>
           </p:cNvPr>
@@ -1418,7 +1571,7 @@
     </p:spTree>
     <p:extLst>
       <p:ext uri="{BB962C8B-B14F-4D97-AF65-F5344CB8AC3E}">
-        <p14:creationId xmlns:p14="http://schemas.microsoft.com/office/powerpoint/2010/main" val="1161871516"/>
+        <p14:creationId xmlns:p14="http://schemas.microsoft.com/office/powerpoint/2010/main" val="27560539"/>
       </p:ext>
     </p:extLst>
   </p:cSld>
@@ -1449,7 +1602,7 @@
           <p:cNvPr id="5" name="">
             <a:extLst xmlns:a="http://schemas.openxmlformats.org/drawingml/2006/main">
               <a:ext uri="{FF2B5EF4-FFF2-40B4-BE49-F238E27FC236}">
-                <a16:creationId xmlns:a16="http://schemas.microsoft.com/office/drawing/2014/main" id="{0785E32D-EDEE-4863-996F-4CBA6FF086E1}"/>
+                <a16:creationId xmlns:a16="http://schemas.microsoft.com/office/drawing/2014/main" id="{88411E42-717D-4576-8412-070BF5D3390A}"/>
               </a:ext>
             </a:extLst>
           </p:cNvPr>
@@ -1506,7 +1659,7 @@
           <p:cNvPr id="2" name="">
             <a:extLst xmlns:a="http://schemas.openxmlformats.org/drawingml/2006/main">
               <a:ext uri="{FF2B5EF4-FFF2-40B4-BE49-F238E27FC236}">
-                <a16:creationId xmlns:a16="http://schemas.microsoft.com/office/drawing/2014/main" id="{22EA28EA-F615-4123-A831-27FFCE17D30A}"/>
+                <a16:creationId xmlns:a16="http://schemas.microsoft.com/office/drawing/2014/main" id="{D799E128-4EE1-4DF6-AAD1-9E355D63A18A}"/>
               </a:ext>
             </a:extLst>
           </p:cNvPr>
@@ -1563,7 +1716,7 @@
           <p:cNvPr id="3" name="">
             <a:extLst xmlns:a="http://schemas.openxmlformats.org/drawingml/2006/main">
               <a:ext uri="{FF2B5EF4-FFF2-40B4-BE49-F238E27FC236}">
-                <a16:creationId xmlns:a16="http://schemas.microsoft.com/office/drawing/2014/main" id="{802AC75B-CE66-4B74-BBBD-739531F2DA0E}"/>
+                <a16:creationId xmlns:a16="http://schemas.microsoft.com/office/drawing/2014/main" id="{E74FC42A-9435-4D4C-BE2A-B0A2093351B7}"/>
               </a:ext>
             </a:extLst>
           </p:cNvPr>
@@ -1620,7 +1773,7 @@
           <p:cNvPr id="4" name="">
             <a:extLst xmlns:a="http://schemas.openxmlformats.org/drawingml/2006/main">
               <a:ext uri="{FF2B5EF4-FFF2-40B4-BE49-F238E27FC236}">
-                <a16:creationId xmlns:a16="http://schemas.microsoft.com/office/drawing/2014/main" id="{FEEA261B-B6E1-4661-95E6-7F1810F565FB}"/>
+                <a16:creationId xmlns:a16="http://schemas.microsoft.com/office/drawing/2014/main" id="{FC4ABD37-A1C8-4463-8DA0-04F9B518D16A}"/>
               </a:ext>
             </a:extLst>
           </p:cNvPr>
@@ -1759,7 +1912,7 @@
     </p:spTree>
     <p:extLst>
       <p:ext uri="{BB962C8B-B14F-4D97-AF65-F5344CB8AC3E}">
-        <p14:creationId xmlns:p14="http://schemas.microsoft.com/office/powerpoint/2010/main" val="1127157747"/>
+        <p14:creationId xmlns:p14="http://schemas.microsoft.com/office/powerpoint/2010/main" val="2133495048"/>
       </p:ext>
     </p:extLst>
   </p:cSld>
@@ -1790,7 +1943,7 @@
           <p:cNvPr id="6" name="">
             <a:extLst xmlns:a="http://schemas.openxmlformats.org/drawingml/2006/main">
               <a:ext uri="{FF2B5EF4-FFF2-40B4-BE49-F238E27FC236}">
-                <a16:creationId xmlns:a16="http://schemas.microsoft.com/office/drawing/2014/main" id="{E742A94C-B1BD-48EC-87B8-5199E191EC1F}"/>
+                <a16:creationId xmlns:a16="http://schemas.microsoft.com/office/drawing/2014/main" id="{5A0F9A2D-B7FC-4CEC-A27D-43A0261F444A}"/>
               </a:ext>
             </a:extLst>
           </p:cNvPr>
@@ -1847,7 +2000,7 @@
           <p:cNvPr id="2" name="">
             <a:extLst xmlns:a="http://schemas.openxmlformats.org/drawingml/2006/main">
               <a:ext uri="{FF2B5EF4-FFF2-40B4-BE49-F238E27FC236}">
-                <a16:creationId xmlns:a16="http://schemas.microsoft.com/office/drawing/2014/main" id="{36B9FFCB-9647-4CAE-8A9D-EABC8CD3C2F3}"/>
+                <a16:creationId xmlns:a16="http://schemas.microsoft.com/office/drawing/2014/main" id="{10426AB5-675D-4AB3-90BD-0B4C8F5FA040}"/>
               </a:ext>
             </a:extLst>
           </p:cNvPr>
@@ -1904,7 +2057,7 @@
           <p:cNvPr id="3" name="">
             <a:extLst xmlns:a="http://schemas.openxmlformats.org/drawingml/2006/main">
               <a:ext uri="{FF2B5EF4-FFF2-40B4-BE49-F238E27FC236}">
-                <a16:creationId xmlns:a16="http://schemas.microsoft.com/office/drawing/2014/main" id="{32FA8346-C214-4C57-8297-1D70755161A4}"/>
+                <a16:creationId xmlns:a16="http://schemas.microsoft.com/office/drawing/2014/main" id="{F0BDE231-363F-46A4-8838-1751716AF252}"/>
               </a:ext>
             </a:extLst>
           </p:cNvPr>
@@ -1961,7 +2114,7 @@
           <p:cNvPr id="4" name="">
             <a:extLst xmlns:a="http://schemas.openxmlformats.org/drawingml/2006/main">
               <a:ext uri="{FF2B5EF4-FFF2-40B4-BE49-F238E27FC236}">
-                <a16:creationId xmlns:a16="http://schemas.microsoft.com/office/drawing/2014/main" id="{82111B20-E2C2-45C9-968D-DE6C4A823BA3}"/>
+                <a16:creationId xmlns:a16="http://schemas.microsoft.com/office/drawing/2014/main" id="{2CBFB77C-8C24-4929-A2AE-FC5D33E9DAAA}"/>
               </a:ext>
             </a:extLst>
           </p:cNvPr>
@@ -2102,7 +2255,7 @@
           <p:cNvPr id="5" name="">
             <a:extLst xmlns:a="http://schemas.openxmlformats.org/drawingml/2006/main">
               <a:ext uri="{FF2B5EF4-FFF2-40B4-BE49-F238E27FC236}">
-                <a16:creationId xmlns:a16="http://schemas.microsoft.com/office/drawing/2014/main" id="{37B1804D-938A-4933-A795-104C3F64BEE8}"/>
+                <a16:creationId xmlns:a16="http://schemas.microsoft.com/office/drawing/2014/main" id="{FF4808F2-D4BD-4773-B7DF-1B6AC8534032}"/>
               </a:ext>
             </a:extLst>
           </p:cNvPr>
@@ -2157,7 +2310,7 @@
     </p:spTree>
     <p:extLst>
       <p:ext uri="{BB962C8B-B14F-4D97-AF65-F5344CB8AC3E}">
-        <p14:creationId xmlns:p14="http://schemas.microsoft.com/office/powerpoint/2010/main" val="268719916"/>
+        <p14:creationId xmlns:p14="http://schemas.microsoft.com/office/powerpoint/2010/main" val="409333197"/>
       </p:ext>
     </p:extLst>
   </p:cSld>
@@ -2188,7 +2341,7 @@
           <p:cNvPr id="6" name="">
             <a:extLst xmlns:a="http://schemas.openxmlformats.org/drawingml/2006/main">
               <a:ext uri="{FF2B5EF4-FFF2-40B4-BE49-F238E27FC236}">
-                <a16:creationId xmlns:a16="http://schemas.microsoft.com/office/drawing/2014/main" id="{E8B2E8B9-745F-49FA-B2CC-B17BED420476}"/>
+                <a16:creationId xmlns:a16="http://schemas.microsoft.com/office/drawing/2014/main" id="{519101C2-9EB5-4BBA-8D33-BCFDC9470064}"/>
               </a:ext>
             </a:extLst>
           </p:cNvPr>
@@ -2245,7 +2398,7 @@
           <p:cNvPr id="2" name="">
             <a:extLst xmlns:a="http://schemas.openxmlformats.org/drawingml/2006/main">
               <a:ext uri="{FF2B5EF4-FFF2-40B4-BE49-F238E27FC236}">
-                <a16:creationId xmlns:a16="http://schemas.microsoft.com/office/drawing/2014/main" id="{6E0D8A6D-B60B-4DF9-965D-55048251F444}"/>
+                <a16:creationId xmlns:a16="http://schemas.microsoft.com/office/drawing/2014/main" id="{92C9CA23-49F4-4CE6-9819-47B17A6FFA1D}"/>
               </a:ext>
             </a:extLst>
           </p:cNvPr>
@@ -2302,7 +2455,7 @@
           <p:cNvPr id="3" name="">
             <a:extLst xmlns:a="http://schemas.openxmlformats.org/drawingml/2006/main">
               <a:ext uri="{FF2B5EF4-FFF2-40B4-BE49-F238E27FC236}">
-                <a16:creationId xmlns:a16="http://schemas.microsoft.com/office/drawing/2014/main" id="{630B9D9B-329D-4CDA-BB71-1FFB489AE91D}"/>
+                <a16:creationId xmlns:a16="http://schemas.microsoft.com/office/drawing/2014/main" id="{4F887C44-A2E5-44FF-AD56-880049CB41C4}"/>
               </a:ext>
             </a:extLst>
           </p:cNvPr>
@@ -2359,7 +2512,7 @@
           <p:cNvPr id="4" name="">
             <a:extLst xmlns:a="http://schemas.openxmlformats.org/drawingml/2006/main">
               <a:ext uri="{FF2B5EF4-FFF2-40B4-BE49-F238E27FC236}">
-                <a16:creationId xmlns:a16="http://schemas.microsoft.com/office/drawing/2014/main" id="{17D6B6F9-D236-4A39-A0F4-EAD86F287E15}"/>
+                <a16:creationId xmlns:a16="http://schemas.microsoft.com/office/drawing/2014/main" id="{6D2635F7-E698-4DDE-A5D6-CE5B1915D98E}"/>
               </a:ext>
             </a:extLst>
           </p:cNvPr>
@@ -2500,7 +2653,7 @@
           <p:cNvPr id="5" name="">
             <a:extLst xmlns:a="http://schemas.openxmlformats.org/drawingml/2006/main">
               <a:ext uri="{FF2B5EF4-FFF2-40B4-BE49-F238E27FC236}">
-                <a16:creationId xmlns:a16="http://schemas.microsoft.com/office/drawing/2014/main" id="{064F9414-DCD8-40DB-A8E1-46A5D942F97A}"/>
+                <a16:creationId xmlns:a16="http://schemas.microsoft.com/office/drawing/2014/main" id="{8FA50863-2332-4D61-BABB-A2299E5DBEA1}"/>
               </a:ext>
             </a:extLst>
           </p:cNvPr>
@@ -2555,7 +2708,7 @@
     </p:spTree>
     <p:extLst>
       <p:ext uri="{BB962C8B-B14F-4D97-AF65-F5344CB8AC3E}">
-        <p14:creationId xmlns:p14="http://schemas.microsoft.com/office/powerpoint/2010/main" val="761097468"/>
+        <p14:creationId xmlns:p14="http://schemas.microsoft.com/office/powerpoint/2010/main" val="801979536"/>
       </p:ext>
     </p:extLst>
   </p:cSld>
@@ -2583,10 +2736,10 @@
       </p:grpSpPr>
       <p:sp>
         <p:nvSpPr>
-          <p:cNvPr id="5" name="">
-            <a:extLst xmlns:a="http://schemas.openxmlformats.org/drawingml/2006/main">
-              <a:ext uri="{FF2B5EF4-FFF2-40B4-BE49-F238E27FC236}">
-                <a16:creationId xmlns:a16="http://schemas.microsoft.com/office/drawing/2014/main" id="{AF92DE81-0CD5-463D-8A41-0E162FEAF61A}"/>
+          <p:cNvPr id="8" name="">
+            <a:extLst xmlns:a="http://schemas.openxmlformats.org/drawingml/2006/main">
+              <a:ext uri="{FF2B5EF4-FFF2-40B4-BE49-F238E27FC236}">
+                <a16:creationId xmlns:a16="http://schemas.microsoft.com/office/drawing/2014/main" id="{CF0045CB-1D44-4868-972F-E6CE24483687}"/>
               </a:ext>
             </a:extLst>
           </p:cNvPr>
@@ -2633,7 +2786,7 @@
                 <a:ea typeface="Arial"/>
                 <a:cs typeface="Arial"/>
               </a:rPr>
-              <a:t>PLANI</a:t>
+              <a:t>KONTROLL NË ÇIFT · BRENDA 0–10 MIN</a:t>
             </a:r>
           </a:p>
         </p:txBody>
@@ -2643,7 +2796,7 @@
           <p:cNvPr id="2" name="">
             <a:extLst xmlns:a="http://schemas.openxmlformats.org/drawingml/2006/main">
               <a:ext uri="{FF2B5EF4-FFF2-40B4-BE49-F238E27FC236}">
-                <a16:creationId xmlns:a16="http://schemas.microsoft.com/office/drawing/2014/main" id="{C0FCC13D-A6BD-4254-8355-F04AF1E40246}"/>
+                <a16:creationId xmlns:a16="http://schemas.microsoft.com/office/drawing/2014/main" id="{6C733BD0-BBA3-4ABC-AF91-85F391CABEC1}"/>
               </a:ext>
             </a:extLst>
           </p:cNvPr>
@@ -2700,7 +2853,7 @@
           <p:cNvPr id="3" name="">
             <a:extLst xmlns:a="http://schemas.openxmlformats.org/drawingml/2006/main">
               <a:ext uri="{FF2B5EF4-FFF2-40B4-BE49-F238E27FC236}">
-                <a16:creationId xmlns:a16="http://schemas.microsoft.com/office/drawing/2014/main" id="{7F74C979-B3DE-42D6-84A3-6E8805DB6B07}"/>
+                <a16:creationId xmlns:a16="http://schemas.microsoft.com/office/drawing/2014/main" id="{A7C8FA20-8EEE-426F-A5FC-60B4DAFF71F4}"/>
               </a:ext>
             </a:extLst>
           </p:cNvPr>
@@ -2747,7 +2900,7 @@
                 <a:ea typeface="Arial"/>
                 <a:cs typeface="Arial"/>
               </a:rPr>
-              <a:t>90 minuta me kohë për korrigjime</a:t>
+              <a:t>Java 3 është pika jonë e nisjes</a:t>
             </a:r>
           </a:p>
         </p:txBody>
@@ -2757,54 +2910,54 @@
           <p:cNvPr id="4" name="">
             <a:extLst xmlns:a="http://schemas.openxmlformats.org/drawingml/2006/main">
               <a:ext uri="{FF2B5EF4-FFF2-40B4-BE49-F238E27FC236}">
-                <a16:creationId xmlns:a16="http://schemas.microsoft.com/office/drawing/2014/main" id="{3E265D0A-3D07-4343-991A-05BAC1EBF0A2}"/>
-              </a:ext>
-            </a:extLst>
-          </p:cNvPr>
-          <p:cNvSpPr>
-            <a:spLocks xmlns:a="http://schemas.openxmlformats.org/drawingml/2006/main" noGrp="1"/>
-          </p:cNvSpPr>
-          <p:nvPr/>
-        </p:nvSpPr>
-        <p:spPr>
-          <a:xfrm xmlns:a="http://schemas.openxmlformats.org/drawingml/2006/main">
-            <a:off x="609600" y="2047875"/>
-            <a:ext cx="10953750" cy="3048000"/>
-          </a:xfrm>
-          <a:prstGeom xmlns:a="http://schemas.openxmlformats.org/drawingml/2006/main" prst="rect">
-            <a:avLst/>
-          </a:prstGeom>
-          <a:noFill xmlns:a="http://schemas.openxmlformats.org/drawingml/2006/main"/>
-          <a:ln xmlns:a="http://schemas.openxmlformats.org/drawingml/2006/main" w="0">
-            <a:noFill/>
-          </a:ln>
-        </p:spPr>
-        <p:txBody>
-          <a:bodyPr xmlns:a="http://schemas.openxmlformats.org/drawingml/2006/main">
-            <a:noAutofit/>
-          </a:bodyPr>
-          <a:lstStyle xmlns:a="http://schemas.openxmlformats.org/drawingml/2006/main"/>
-          <a:p xmlns:a="http://schemas.openxmlformats.org/drawingml/2006/main">
-            <a:pPr>
-              <a:defRPr sz="2175" b="0">
-                <a:solidFill>
-                  <a:srgbClr val="EAF1FF"/>
-                </a:solidFill>
-                <a:latin typeface="Arial"/>
-                <a:ea typeface="Arial"/>
-                <a:cs typeface="Arial"/>
-              </a:defRPr>
-            </a:pPr>
-            <a:r>
-              <a:rPr sz="2175" b="0">
-                <a:solidFill>
-                  <a:srgbClr val="EAF1FF"/>
-                </a:solidFill>
-                <a:latin typeface="Arial"/>
-                <a:ea typeface="Arial"/>
-                <a:cs typeface="Arial"/>
-              </a:rPr>
-              <a:t>0–10: projekt + raport. 10–25: Neon. 25–35: tabela.</a:t>
+                <a16:creationId xmlns:a16="http://schemas.microsoft.com/office/drawing/2014/main" id="{1EF71C0E-1CE7-48E4-ADCA-36D095B8CFD4}"/>
+              </a:ext>
+            </a:extLst>
+          </p:cNvPr>
+          <p:cNvSpPr>
+            <a:spLocks xmlns:a="http://schemas.openxmlformats.org/drawingml/2006/main" noGrp="1"/>
+          </p:cNvSpPr>
+          <p:nvPr/>
+        </p:nvSpPr>
+        <p:spPr>
+          <a:xfrm xmlns:a="http://schemas.openxmlformats.org/drawingml/2006/main">
+            <a:off x="609600" y="1952625"/>
+            <a:ext cx="10953750" cy="1714500"/>
+          </a:xfrm>
+          <a:prstGeom xmlns:a="http://schemas.openxmlformats.org/drawingml/2006/main" prst="rect">
+            <a:avLst/>
+          </a:prstGeom>
+          <a:noFill xmlns:a="http://schemas.openxmlformats.org/drawingml/2006/main"/>
+          <a:ln xmlns:a="http://schemas.openxmlformats.org/drawingml/2006/main" w="0">
+            <a:noFill/>
+          </a:ln>
+        </p:spPr>
+        <p:txBody>
+          <a:bodyPr xmlns:a="http://schemas.openxmlformats.org/drawingml/2006/main">
+            <a:noAutofit/>
+          </a:bodyPr>
+          <a:lstStyle xmlns:a="http://schemas.openxmlformats.org/drawingml/2006/main"/>
+          <a:p xmlns:a="http://schemas.openxmlformats.org/drawingml/2006/main">
+            <a:pPr>
+              <a:defRPr sz="2025" b="0">
+                <a:solidFill>
+                  <a:srgbClr val="EAF1FF"/>
+                </a:solidFill>
+                <a:latin typeface="Arial"/>
+                <a:ea typeface="Arial"/>
+                <a:cs typeface="Arial"/>
+              </a:defRPr>
+            </a:pPr>
+            <a:r>
+              <a:rPr sz="2025" b="0">
+                <a:solidFill>
+                  <a:srgbClr val="EAF1FF"/>
+                </a:solidFill>
+                <a:latin typeface="Arial"/>
+                <a:ea typeface="Arial"/>
+                <a:cs typeface="Arial"/>
+              </a:rPr>
+              <a:t>Hap projektin e Javës 3 në VS Code. Në Terminal, brenda aplikacioni/ nëse kodi është aty, ekzekuto npm run dev.</a:t>
             </a:r>
           </a:p>
           <a:p xmlns:a="http://schemas.openxmlformats.org/drawingml/2006/main">
@@ -2814,25 +2967,82 @@
           </a:p>
           <a:p xmlns:a="http://schemas.openxmlformats.org/drawingml/2006/main">
             <a:pPr>
-              <a:defRPr sz="2175" b="0">
-                <a:solidFill>
-                  <a:srgbClr val="EAF1FF"/>
-                </a:solidFill>
-                <a:latin typeface="Arial"/>
-                <a:ea typeface="Arial"/>
-                <a:cs typeface="Arial"/>
-              </a:defRPr>
-            </a:pPr>
-            <a:r>
-              <a:rPr sz="2175" b="0">
-                <a:solidFill>
-                  <a:srgbClr val="EAF1FF"/>
-                </a:solidFill>
-                <a:latin typeface="Arial"/>
-                <a:ea typeface="Arial"/>
-                <a:cs typeface="Arial"/>
-              </a:rPr>
-              <a:t>35–55: kod. 55–70: prova + Push. 70–90: dorëzim + korrigjime.</a:t>
+              <a:defRPr sz="2025" b="0">
+                <a:solidFill>
+                  <a:srgbClr val="EAF1FF"/>
+                </a:solidFill>
+                <a:latin typeface="Arial"/>
+                <a:ea typeface="Arial"/>
+                <a:cs typeface="Arial"/>
+              </a:defRPr>
+            </a:pPr>
+            <a:r>
+              <a:rPr sz="2025" b="0">
+                <a:solidFill>
+                  <a:srgbClr val="EAF1FF"/>
+                </a:solidFill>
+                <a:latin typeface="Arial"/>
+                <a:ea typeface="Arial"/>
+                <a:cs typeface="Arial"/>
+              </a:rPr>
+              <a:t>Njëri hap ekranet, tjetri i kontrollon. Shënoni vetëm atë që e shihni duke funksionuar.</a:t>
+            </a:r>
+          </a:p>
+        </p:txBody>
+      </p:sp>
+      <p:sp>
+        <p:nvSpPr>
+          <p:cNvPr id="5" name="">
+            <a:extLst xmlns:a="http://schemas.openxmlformats.org/drawingml/2006/main">
+              <a:ext uri="{FF2B5EF4-FFF2-40B4-BE49-F238E27FC236}">
+                <a16:creationId xmlns:a16="http://schemas.microsoft.com/office/drawing/2014/main" id="{AD41C1CD-C0BD-4EDE-B267-99C7FC951B0C}"/>
+              </a:ext>
+            </a:extLst>
+          </p:cNvPr>
+          <p:cNvSpPr>
+            <a:spLocks xmlns:a="http://schemas.openxmlformats.org/drawingml/2006/main" noGrp="1"/>
+          </p:cNvSpPr>
+          <p:nvPr/>
+        </p:nvSpPr>
+        <p:spPr>
+          <a:xfrm xmlns:a="http://schemas.openxmlformats.org/drawingml/2006/main">
+            <a:off x="609600" y="3810000"/>
+            <a:ext cx="10953750" cy="1428750"/>
+          </a:xfrm>
+          <a:prstGeom xmlns:a="http://schemas.openxmlformats.org/drawingml/2006/main" prst="rect">
+            <a:avLst/>
+          </a:prstGeom>
+          <a:noFill xmlns:a="http://schemas.openxmlformats.org/drawingml/2006/main"/>
+          <a:ln xmlns:a="http://schemas.openxmlformats.org/drawingml/2006/main" w="0">
+            <a:noFill/>
+          </a:ln>
+        </p:spPr>
+        <p:txBody>
+          <a:bodyPr xmlns:a="http://schemas.openxmlformats.org/drawingml/2006/main">
+            <a:noAutofit/>
+          </a:bodyPr>
+          <a:lstStyle xmlns:a="http://schemas.openxmlformats.org/drawingml/2006/main"/>
+          <a:p xmlns:a="http://schemas.openxmlformats.org/drawingml/2006/main">
+            <a:pPr>
+              <a:defRPr sz="2025" b="0">
+                <a:solidFill>
+                  <a:srgbClr val="89DDFF"/>
+                </a:solidFill>
+                <a:latin typeface="Arial"/>
+                <a:ea typeface="Arial"/>
+                <a:cs typeface="Arial"/>
+              </a:defRPr>
+            </a:pPr>
+            <a:r>
+              <a:rPr sz="2025" b="0">
+                <a:solidFill>
+                  <a:srgbClr val="89DDFF"/>
+                </a:solidFill>
+                <a:latin typeface="Arial"/>
+                <a:ea typeface="Arial"/>
+                <a:cs typeface="Arial"/>
+              </a:rPr>
+              <a:t>□ Lista shfaq tri kartat e udhëtimeve.</a:t>
             </a:r>
           </a:p>
           <a:p xmlns:a="http://schemas.openxmlformats.org/drawingml/2006/main">
@@ -2842,25 +3052,167 @@
           </a:p>
           <a:p xmlns:a="http://schemas.openxmlformats.org/drawingml/2006/main">
             <a:pPr>
-              <a:defRPr sz="2175" b="0">
-                <a:solidFill>
-                  <a:srgbClr val="EAF1FF"/>
-                </a:solidFill>
-                <a:latin typeface="Arial"/>
-                <a:ea typeface="Arial"/>
-                <a:cs typeface="Arial"/>
-              </a:defRPr>
-            </a:pPr>
-            <a:r>
-              <a:rPr sz="2175" b="0">
-                <a:solidFill>
-                  <a:srgbClr val="EAF1FF"/>
-                </a:solidFill>
-                <a:latin typeface="Arial"/>
-                <a:ea typeface="Arial"/>
-                <a:cs typeface="Arial"/>
-              </a:rPr>
-              <a:t>Në çift: njëri vepron, tjetri lexon rezultatin e pritur. Ndërroni rolet te minutat 35 dhe 55.</a:t>
+              <a:defRPr sz="2025" b="0">
+                <a:solidFill>
+                  <a:srgbClr val="89DDFF"/>
+                </a:solidFill>
+                <a:latin typeface="Arial"/>
+                <a:ea typeface="Arial"/>
+                <a:cs typeface="Arial"/>
+              </a:defRPr>
+            </a:pPr>
+            <a:r>
+              <a:rPr sz="2025" b="0">
+                <a:solidFill>
+                  <a:srgbClr val="89DDFF"/>
+                </a:solidFill>
+                <a:latin typeface="Arial"/>
+                <a:ea typeface="Arial"/>
+                <a:cs typeface="Arial"/>
+              </a:rPr>
+              <a:t>□ Karta hap detajet e udhëtimit me ID 2.</a:t>
+            </a:r>
+          </a:p>
+          <a:p xmlns:a="http://schemas.openxmlformats.org/drawingml/2006/main">
+            <a:r>
+              <a:t/>
+            </a:r>
+          </a:p>
+          <a:p xmlns:a="http://schemas.openxmlformats.org/drawingml/2006/main">
+            <a:pPr>
+              <a:defRPr sz="2025" b="0">
+                <a:solidFill>
+                  <a:srgbClr val="89DDFF"/>
+                </a:solidFill>
+                <a:latin typeface="Arial"/>
+                <a:ea typeface="Arial"/>
+                <a:cs typeface="Arial"/>
+              </a:defRPr>
+            </a:pPr>
+            <a:r>
+              <a:rPr sz="2025" b="0">
+                <a:solidFill>
+                  <a:srgbClr val="89DDFF"/>
+                </a:solidFill>
+                <a:latin typeface="Arial"/>
+                <a:ea typeface="Arial"/>
+                <a:cs typeface="Arial"/>
+              </a:rPr>
+              <a:t>□ Nga detajet hapet simulimi i kërkesës.</a:t>
+            </a:r>
+          </a:p>
+        </p:txBody>
+      </p:sp>
+      <p:sp>
+        <p:nvSpPr>
+          <p:cNvPr id="6" name="">
+            <a:extLst xmlns:a="http://schemas.openxmlformats.org/drawingml/2006/main">
+              <a:ext uri="{FF2B5EF4-FFF2-40B4-BE49-F238E27FC236}">
+                <a16:creationId xmlns:a16="http://schemas.microsoft.com/office/drawing/2014/main" id="{4050F5E0-FAAC-4377-9A79-528E85506522}"/>
+              </a:ext>
+            </a:extLst>
+          </p:cNvPr>
+          <p:cNvSpPr>
+            <a:spLocks xmlns:a="http://schemas.openxmlformats.org/drawingml/2006/main" noGrp="1"/>
+          </p:cNvSpPr>
+          <p:nvPr/>
+        </p:nvSpPr>
+        <p:spPr>
+          <a:xfrm xmlns:a="http://schemas.openxmlformats.org/drawingml/2006/main">
+            <a:off x="609600" y="5381625"/>
+            <a:ext cx="10953750" cy="714375"/>
+          </a:xfrm>
+          <a:prstGeom xmlns:a="http://schemas.openxmlformats.org/drawingml/2006/main" prst="rect">
+            <a:avLst/>
+          </a:prstGeom>
+          <a:noFill xmlns:a="http://schemas.openxmlformats.org/drawingml/2006/main"/>
+          <a:ln xmlns:a="http://schemas.openxmlformats.org/drawingml/2006/main" w="0">
+            <a:noFill/>
+          </a:ln>
+        </p:spPr>
+        <p:txBody>
+          <a:bodyPr xmlns:a="http://schemas.openxmlformats.org/drawingml/2006/main">
+            <a:noAutofit/>
+          </a:bodyPr>
+          <a:lstStyle xmlns:a="http://schemas.openxmlformats.org/drawingml/2006/main"/>
+          <a:p xmlns:a="http://schemas.openxmlformats.org/drawingml/2006/main">
+            <a:pPr>
+              <a:defRPr sz="1800" b="0">
+                <a:solidFill>
+                  <a:srgbClr val="8EE9D1"/>
+                </a:solidFill>
+                <a:latin typeface="Arial"/>
+                <a:ea typeface="Arial"/>
+                <a:cs typeface="Arial"/>
+              </a:defRPr>
+            </a:pPr>
+            <a:r>
+              <a:rPr sz="1800" b="0">
+                <a:solidFill>
+                  <a:srgbClr val="8EE9D1"/>
+                </a:solidFill>
+                <a:latin typeface="Arial"/>
+                <a:ea typeface="Arial"/>
+                <a:cs typeface="Arial"/>
+              </a:rPr>
+              <a:t>Gati për Neon. Shkarko raportin dhe ruaje si java-04.md pranë README, jashtë aplikacioni/.</a:t>
+            </a:r>
+          </a:p>
+        </p:txBody>
+      </p:sp>
+      <p:sp>
+        <p:nvSpPr>
+          <p:cNvPr id="7" name="">
+            <a:extLst xmlns:a="http://schemas.openxmlformats.org/drawingml/2006/main">
+              <a:ext uri="{FF2B5EF4-FFF2-40B4-BE49-F238E27FC236}">
+                <a16:creationId xmlns:a16="http://schemas.microsoft.com/office/drawing/2014/main" id="{06F37C46-D69D-41EE-AF63-C6621B8CD753}"/>
+              </a:ext>
+            </a:extLst>
+          </p:cNvPr>
+          <p:cNvSpPr>
+            <a:spLocks xmlns:a="http://schemas.openxmlformats.org/drawingml/2006/main" noGrp="1"/>
+          </p:cNvSpPr>
+          <p:nvPr/>
+        </p:nvSpPr>
+        <p:spPr>
+          <a:xfrm xmlns:a="http://schemas.openxmlformats.org/drawingml/2006/main">
+            <a:off x="609600" y="6315075"/>
+            <a:ext cx="10953750" cy="285750"/>
+          </a:xfrm>
+          <a:prstGeom xmlns:a="http://schemas.openxmlformats.org/drawingml/2006/main" prst="rect">
+            <a:avLst/>
+          </a:prstGeom>
+          <a:noFill xmlns:a="http://schemas.openxmlformats.org/drawingml/2006/main"/>
+          <a:ln xmlns:a="http://schemas.openxmlformats.org/drawingml/2006/main" w="0">
+            <a:noFill/>
+          </a:ln>
+        </p:spPr>
+        <p:txBody>
+          <a:bodyPr xmlns:a="http://schemas.openxmlformats.org/drawingml/2006/main">
+            <a:noAutofit/>
+          </a:bodyPr>
+          <a:lstStyle xmlns:a="http://schemas.openxmlformats.org/drawingml/2006/main"/>
+          <a:p xmlns:a="http://schemas.openxmlformats.org/drawingml/2006/main">
+            <a:pPr>
+              <a:defRPr sz="1350" b="0">
+                <a:solidFill>
+                  <a:srgbClr val="89DDFF"/>
+                </a:solidFill>
+                <a:latin typeface="Arial"/>
+                <a:ea typeface="Arial"/>
+                <a:cs typeface="Arial"/>
+              </a:defRPr>
+            </a:pPr>
+            <a:r>
+              <a:rPr sz="1350" b="0">
+                <a:solidFill>
+                  <a:srgbClr val="89DDFF"/>
+                </a:solidFill>
+                <a:latin typeface="Arial"/>
+                <a:ea typeface="Arial"/>
+                <a:cs typeface="Arial"/>
+              </a:rPr>
+              <a:t>Në faqe: Shkarko raportin java-04.md</a:t>
             </a:r>
           </a:p>
         </p:txBody>
@@ -2868,7 +3220,7 @@
     </p:spTree>
     <p:extLst>
       <p:ext uri="{BB962C8B-B14F-4D97-AF65-F5344CB8AC3E}">
-        <p14:creationId xmlns:p14="http://schemas.microsoft.com/office/powerpoint/2010/main" val="558049447"/>
+        <p14:creationId xmlns:p14="http://schemas.microsoft.com/office/powerpoint/2010/main" val="2014686452"/>
       </p:ext>
     </p:extLst>
   </p:cSld>
@@ -2896,10 +3248,10 @@
       </p:grpSpPr>
       <p:sp>
         <p:nvSpPr>
-          <p:cNvPr id="6" name="">
-            <a:extLst xmlns:a="http://schemas.openxmlformats.org/drawingml/2006/main">
-              <a:ext uri="{FF2B5EF4-FFF2-40B4-BE49-F238E27FC236}">
-                <a16:creationId xmlns:a16="http://schemas.microsoft.com/office/drawing/2014/main" id="{DA1FBBC8-D8A8-4E97-9AB4-B616F8304D53}"/>
+          <p:cNvPr id="8" name="">
+            <a:extLst xmlns:a="http://schemas.openxmlformats.org/drawingml/2006/main">
+              <a:ext uri="{FF2B5EF4-FFF2-40B4-BE49-F238E27FC236}">
+                <a16:creationId xmlns:a16="http://schemas.microsoft.com/office/drawing/2014/main" id="{929433E8-4893-49E7-B9E7-68E566C9D2A3}"/>
               </a:ext>
             </a:extLst>
           </p:cNvPr>
@@ -2946,7 +3298,7 @@
                 <a:ea typeface="Arial"/>
                 <a:cs typeface="Arial"/>
               </a:rPr>
-              <a:t>0–10 MIN</a:t>
+              <a:t>REZULTATI I USHTRIMIT · HARTA E INFRASTRUKTURËS</a:t>
             </a:r>
           </a:p>
         </p:txBody>
@@ -2956,7 +3308,7 @@
           <p:cNvPr id="2" name="">
             <a:extLst xmlns:a="http://schemas.openxmlformats.org/drawingml/2006/main">
               <a:ext uri="{FF2B5EF4-FFF2-40B4-BE49-F238E27FC236}">
-                <a16:creationId xmlns:a16="http://schemas.microsoft.com/office/drawing/2014/main" id="{24E8089E-64E2-46BE-B394-677A06FC400E}"/>
+                <a16:creationId xmlns:a16="http://schemas.microsoft.com/office/drawing/2014/main" id="{94364473-ECC1-4485-9105-B6BEB63653E6}"/>
               </a:ext>
             </a:extLst>
           </p:cNvPr>
@@ -3008,24 +3360,46 @@
           </a:p>
         </p:txBody>
       </p:sp>
-      <p:sp>
-        <p:nvSpPr>
-          <p:cNvPr id="3" name="">
-            <a:extLst xmlns:a="http://schemas.openxmlformats.org/drawingml/2006/main">
-              <a:ext uri="{FF2B5EF4-FFF2-40B4-BE49-F238E27FC236}">
-                <a16:creationId xmlns:a16="http://schemas.microsoft.com/office/drawing/2014/main" id="{05F22069-88D7-498E-A1B4-7810CFEB0251}"/>
-              </a:ext>
-            </a:extLst>
-          </p:cNvPr>
-          <p:cNvSpPr>
-            <a:spLocks xmlns:a="http://schemas.openxmlformats.org/drawingml/2006/main" noGrp="1"/>
-          </p:cNvSpPr>
-          <p:nvPr/>
-        </p:nvSpPr>
-        <p:spPr>
-          <a:xfrm xmlns:a="http://schemas.openxmlformats.org/drawingml/2006/main">
-            <a:off x="609600" y="933450"/>
-            <a:ext cx="10953750" cy="952500"/>
+      <p:pic>
+        <p:nvPicPr>
+          <p:cNvPr id="10" name=""/>
+          <p:cNvPicPr>
+            <a:picLocks xmlns:a="http://schemas.openxmlformats.org/drawingml/2006/main" noChangeAspect="1"/>
+          </p:cNvPicPr>
+          <p:nvPr/>
+        </p:nvPicPr>
+        <p:blipFill>
+          <a:blip xmlns:r="http://schemas.openxmlformats.org/officeDocument/2006/relationships" xmlns:a="http://schemas.openxmlformats.org/drawingml/2006/main" r:embed="Rfb61fabd89564a57"/>
+          <a:stretch xmlns:a="http://schemas.openxmlformats.org/drawingml/2006/main"/>
+        </p:blipFill>
+        <p:spPr>
+          <a:xfrm xmlns:a="http://schemas.openxmlformats.org/drawingml/2006/main">
+            <a:off x="10287000" y="925435"/>
+            <a:ext cx="1238250" cy="244630"/>
+          </a:xfrm>
+          <a:prstGeom xmlns:a="http://schemas.openxmlformats.org/drawingml/2006/main" prst="rect">
+            <a:avLst/>
+          </a:prstGeom>
+        </p:spPr>
+      </p:pic>
+      <p:sp>
+        <p:nvSpPr>
+          <p:cNvPr id="4" name="">
+            <a:extLst xmlns:a="http://schemas.openxmlformats.org/drawingml/2006/main">
+              <a:ext uri="{FF2B5EF4-FFF2-40B4-BE49-F238E27FC236}">
+                <a16:creationId xmlns:a16="http://schemas.microsoft.com/office/drawing/2014/main" id="{45839DB5-868D-40E5-84F3-30446D29A6C3}"/>
+              </a:ext>
+            </a:extLst>
+          </p:cNvPr>
+          <p:cNvSpPr>
+            <a:spLocks xmlns:a="http://schemas.openxmlformats.org/drawingml/2006/main" noGrp="1"/>
+          </p:cNvSpPr>
+          <p:nvPr/>
+        </p:nvSpPr>
+        <p:spPr>
+          <a:xfrm xmlns:a="http://schemas.openxmlformats.org/drawingml/2006/main">
+            <a:off x="609600" y="857250"/>
+            <a:ext cx="9429750" cy="714375"/>
           </a:xfrm>
           <a:prstGeom xmlns:a="http://schemas.openxmlformats.org/drawingml/2006/main" prst="rect">
             <a:avLst/>
@@ -3060,158 +3434,119 @@
                 <a:ea typeface="Arial"/>
                 <a:cs typeface="Arial"/>
               </a:rPr>
-              <a:t>1. Kontrollo pikën e nisjes</a:t>
-            </a:r>
-          </a:p>
-        </p:txBody>
-      </p:sp>
-      <p:sp>
-        <p:nvSpPr>
-          <p:cNvPr id="4" name="">
-            <a:extLst xmlns:a="http://schemas.openxmlformats.org/drawingml/2006/main">
-              <a:ext uri="{FF2B5EF4-FFF2-40B4-BE49-F238E27FC236}">
-                <a16:creationId xmlns:a16="http://schemas.microsoft.com/office/drawing/2014/main" id="{AA59E28C-21B1-4393-B295-767AE5264D16}"/>
-              </a:ext>
-            </a:extLst>
-          </p:cNvPr>
-          <p:cNvSpPr>
-            <a:spLocks xmlns:a="http://schemas.openxmlformats.org/drawingml/2006/main" noGrp="1"/>
-          </p:cNvSpPr>
-          <p:nvPr/>
-        </p:nvSpPr>
-        <p:spPr>
-          <a:xfrm xmlns:a="http://schemas.openxmlformats.org/drawingml/2006/main">
-            <a:off x="609600" y="2047875"/>
-            <a:ext cx="10953750" cy="3048000"/>
-          </a:xfrm>
-          <a:prstGeom xmlns:a="http://schemas.openxmlformats.org/drawingml/2006/main" prst="rect">
-            <a:avLst/>
-          </a:prstGeom>
-          <a:noFill xmlns:a="http://schemas.openxmlformats.org/drawingml/2006/main"/>
-          <a:ln xmlns:a="http://schemas.openxmlformats.org/drawingml/2006/main" w="0">
-            <a:noFill/>
-          </a:ln>
-        </p:spPr>
-        <p:txBody>
-          <a:bodyPr xmlns:a="http://schemas.openxmlformats.org/drawingml/2006/main">
-            <a:noAutofit/>
-          </a:bodyPr>
-          <a:lstStyle xmlns:a="http://schemas.openxmlformats.org/drawingml/2006/main"/>
-          <a:p xmlns:a="http://schemas.openxmlformats.org/drawingml/2006/main">
-            <a:pPr>
-              <a:defRPr sz="2175" b="0">
-                <a:solidFill>
-                  <a:srgbClr val="EAF1FF"/>
-                </a:solidFill>
-                <a:latin typeface="Arial"/>
-                <a:ea typeface="Arial"/>
-                <a:cs typeface="Arial"/>
-              </a:defRPr>
-            </a:pPr>
-            <a:r>
-              <a:rPr sz="2175" b="0">
-                <a:solidFill>
-                  <a:srgbClr val="EAF1FF"/>
-                </a:solidFill>
-                <a:latin typeface="Arial"/>
-                <a:ea typeface="Arial"/>
-                <a:cs typeface="Arial"/>
-              </a:rPr>
-              <a:t>Ku: repository yt personal → VS Code → Terminal.</a:t>
-            </a:r>
-          </a:p>
-          <a:p xmlns:a="http://schemas.openxmlformats.org/drawingml/2006/main">
-            <a:r>
-              <a:t/>
-            </a:r>
-          </a:p>
-          <a:p xmlns:a="http://schemas.openxmlformats.org/drawingml/2006/main">
-            <a:pPr>
-              <a:defRPr sz="2175" b="0">
-                <a:solidFill>
-                  <a:srgbClr val="EAF1FF"/>
-                </a:solidFill>
-                <a:latin typeface="Arial"/>
-                <a:ea typeface="Arial"/>
-                <a:cs typeface="Arial"/>
-              </a:defRPr>
-            </a:pPr>
-            <a:r>
-              <a:rPr sz="2175" b="0">
-                <a:solidFill>
-                  <a:srgbClr val="EAF1FF"/>
-                </a:solidFill>
-                <a:latin typeface="Arial"/>
-                <a:ea typeface="Arial"/>
-                <a:cs typeface="Arial"/>
-              </a:rPr>
-              <a:t>Bëj: cd aplikacioni nëse kodi është aty; npm run dev.</a:t>
-            </a:r>
-          </a:p>
-          <a:p xmlns:a="http://schemas.openxmlformats.org/drawingml/2006/main">
-            <a:r>
-              <a:t/>
-            </a:r>
-          </a:p>
-          <a:p xmlns:a="http://schemas.openxmlformats.org/drawingml/2006/main">
-            <a:pPr>
-              <a:defRPr sz="2175" b="0">
-                <a:solidFill>
-                  <a:srgbClr val="EAF1FF"/>
-                </a:solidFill>
-                <a:latin typeface="Arial"/>
-                <a:ea typeface="Arial"/>
-                <a:cs typeface="Arial"/>
-              </a:defRPr>
-            </a:pPr>
-            <a:r>
-              <a:rPr sz="2175" b="0">
-                <a:solidFill>
-                  <a:srgbClr val="EAF1FF"/>
-                </a:solidFill>
-                <a:latin typeface="Arial"/>
-                <a:ea typeface="Arial"/>
-                <a:cs typeface="Arial"/>
-              </a:rPr>
-              <a:t>Kontrollo: shfaqen tri kartat e Javës 3.</a:t>
-            </a:r>
-          </a:p>
-          <a:p xmlns:a="http://schemas.openxmlformats.org/drawingml/2006/main">
-            <a:r>
-              <a:t/>
-            </a:r>
-          </a:p>
-          <a:p xmlns:a="http://schemas.openxmlformats.org/drawingml/2006/main">
-            <a:pPr>
-              <a:defRPr sz="2175" b="0">
-                <a:solidFill>
-                  <a:srgbClr val="EAF1FF"/>
-                </a:solidFill>
-                <a:latin typeface="Arial"/>
-                <a:ea typeface="Arial"/>
-                <a:cs typeface="Arial"/>
-              </a:defRPr>
-            </a:pPr>
-            <a:r>
-              <a:rPr sz="2175" b="0">
-                <a:solidFill>
-                  <a:srgbClr val="EAF1FF"/>
-                </a:solidFill>
-                <a:latin typeface="Arial"/>
-                <a:ea typeface="Arial"/>
-                <a:cs typeface="Arial"/>
-              </a:rPr>
-              <a:t>Shkarko java-04.md dhe ruaje pranë README, jashtë aplikacioni/.</a:t>
-            </a:r>
-          </a:p>
-        </p:txBody>
-      </p:sp>
-      <p:sp>
-        <p:nvSpPr>
-          <p:cNvPr id="5" name="">
-            <a:extLst xmlns:a="http://schemas.openxmlformats.org/drawingml/2006/main">
-              <a:ext uri="{FF2B5EF4-FFF2-40B4-BE49-F238E27FC236}">
-                <a16:creationId xmlns:a16="http://schemas.microsoft.com/office/drawing/2014/main" id="{B02C6D1E-78FF-44C4-BF9A-12C8007FADEB}"/>
+              <a:t>Harta e punës sonë sot</a:t>
+            </a:r>
+          </a:p>
+        </p:txBody>
+      </p:sp>
+      <p:pic>
+        <p:nvPicPr>
+          <p:cNvPr id="12" name=""/>
+          <p:cNvPicPr>
+            <a:picLocks xmlns:a="http://schemas.openxmlformats.org/drawingml/2006/main" noChangeAspect="1"/>
+          </p:cNvPicPr>
+          <p:nvPr/>
+        </p:nvPicPr>
+        <p:blipFill>
+          <a:blip xmlns:r="http://schemas.openxmlformats.org/officeDocument/2006/relationships" xmlns:a="http://schemas.openxmlformats.org/drawingml/2006/main" r:embed="Rebc642757ca04d40"/>
+          <a:stretch xmlns:a="http://schemas.openxmlformats.org/drawingml/2006/main"/>
+        </p:blipFill>
+        <p:spPr>
+          <a:xfrm xmlns:a="http://schemas.openxmlformats.org/drawingml/2006/main">
+            <a:off x="609600" y="1770063"/>
+            <a:ext cx="10953750" cy="3651250"/>
+          </a:xfrm>
+          <a:prstGeom xmlns:a="http://schemas.openxmlformats.org/drawingml/2006/main" prst="rect">
+            <a:avLst/>
+          </a:prstGeom>
+        </p:spPr>
+      </p:pic>
+      <p:sp>
+        <p:nvSpPr>
+          <p:cNvPr id="6" name="">
+            <a:extLst xmlns:a="http://schemas.openxmlformats.org/drawingml/2006/main">
+              <a:ext uri="{FF2B5EF4-FFF2-40B4-BE49-F238E27FC236}">
+                <a16:creationId xmlns:a16="http://schemas.microsoft.com/office/drawing/2014/main" id="{A2872303-EEF3-401C-AE38-B672D6B0D54E}"/>
+              </a:ext>
+            </a:extLst>
+          </p:cNvPr>
+          <p:cNvSpPr>
+            <a:spLocks xmlns:a="http://schemas.openxmlformats.org/drawingml/2006/main" noGrp="1"/>
+          </p:cNvSpPr>
+          <p:nvPr/>
+        </p:nvSpPr>
+        <p:spPr>
+          <a:xfrm xmlns:a="http://schemas.openxmlformats.org/drawingml/2006/main">
+            <a:off x="609600" y="5667375"/>
+            <a:ext cx="10953750" cy="619125"/>
+          </a:xfrm>
+          <a:prstGeom xmlns:a="http://schemas.openxmlformats.org/drawingml/2006/main" prst="rect">
+            <a:avLst/>
+          </a:prstGeom>
+          <a:noFill xmlns:a="http://schemas.openxmlformats.org/drawingml/2006/main"/>
+          <a:ln xmlns:a="http://schemas.openxmlformats.org/drawingml/2006/main" w="0">
+            <a:noFill/>
+          </a:ln>
+        </p:spPr>
+        <p:txBody>
+          <a:bodyPr xmlns:a="http://schemas.openxmlformats.org/drawingml/2006/main">
+            <a:noAutofit/>
+          </a:bodyPr>
+          <a:lstStyle xmlns:a="http://schemas.openxmlformats.org/drawingml/2006/main"/>
+          <a:p xmlns:a="http://schemas.openxmlformats.org/drawingml/2006/main">
+            <a:pPr>
+              <a:defRPr sz="1725" b="0">
+                <a:solidFill>
+                  <a:srgbClr val="EAF1FF"/>
+                </a:solidFill>
+                <a:latin typeface="Arial"/>
+                <a:ea typeface="Arial"/>
+                <a:cs typeface="Arial"/>
+              </a:defRPr>
+            </a:pPr>
+            <a:r>
+              <a:rPr sz="1725" b="0">
+                <a:solidFill>
+                  <a:srgbClr val="EAF1FF"/>
+                </a:solidFill>
+                <a:latin typeface="Arial"/>
+                <a:ea typeface="Arial"/>
+                <a:cs typeface="Arial"/>
+              </a:rPr>
+              <a:t>Lidhim Neon, zëvendësojmë vargun me lexim SQL dhe provojmë listën e detajet.</a:t>
+            </a:r>
+          </a:p>
+          <a:p xmlns:a="http://schemas.openxmlformats.org/drawingml/2006/main">
+            <a:pPr>
+              <a:defRPr sz="1725" b="0">
+                <a:solidFill>
+                  <a:srgbClr val="EAF1FF"/>
+                </a:solidFill>
+                <a:latin typeface="Arial"/>
+                <a:ea typeface="Arial"/>
+                <a:cs typeface="Arial"/>
+              </a:defRPr>
+            </a:pPr>
+            <a:r>
+              <a:rPr sz="1725" b="0">
+                <a:solidFill>
+                  <a:srgbClr val="EAF1FF"/>
+                </a:solidFill>
+                <a:latin typeface="Arial"/>
+                <a:ea typeface="Arial"/>
+                <a:cs typeface="Arial"/>
+              </a:rPr>
+              <a:t>Suksesi: ndryshojmë orën një herë, rifreskojmë të dy ekranet dhe shpjegojmë rezultatin.</a:t>
+            </a:r>
+          </a:p>
+        </p:txBody>
+      </p:sp>
+      <p:sp>
+        <p:nvSpPr>
+          <p:cNvPr id="7" name="">
+            <a:extLst xmlns:a="http://schemas.openxmlformats.org/drawingml/2006/main">
+              <a:ext uri="{FF2B5EF4-FFF2-40B4-BE49-F238E27FC236}">
+                <a16:creationId xmlns:a16="http://schemas.microsoft.com/office/drawing/2014/main" id="{3C27E7EE-521A-4CB5-B654-3A31BBBDD1F6}"/>
               </a:ext>
             </a:extLst>
           </p:cNvPr>
@@ -3258,7 +3593,7 @@
                 <a:ea typeface="Arial"/>
                 <a:cs typeface="Arial"/>
               </a:rPr>
-              <a:t>Në faqe: Shkarko raportin java-04.md</a:t>
+              <a:t>Në faqe: Hap udhëzimin me kod ↗</a:t>
             </a:r>
           </a:p>
         </p:txBody>
@@ -3266,7 +3601,7 @@
     </p:spTree>
     <p:extLst>
       <p:ext uri="{BB962C8B-B14F-4D97-AF65-F5344CB8AC3E}">
-        <p14:creationId xmlns:p14="http://schemas.microsoft.com/office/powerpoint/2010/main" val="1135461271"/>
+        <p14:creationId xmlns:p14="http://schemas.microsoft.com/office/powerpoint/2010/main" val="272563909"/>
       </p:ext>
     </p:extLst>
   </p:cSld>
@@ -3294,10 +3629,10 @@
       </p:grpSpPr>
       <p:sp>
         <p:nvSpPr>
-          <p:cNvPr id="7" name="">
-            <a:extLst xmlns:a="http://schemas.openxmlformats.org/drawingml/2006/main">
-              <a:ext uri="{FF2B5EF4-FFF2-40B4-BE49-F238E27FC236}">
-                <a16:creationId xmlns:a16="http://schemas.microsoft.com/office/drawing/2014/main" id="{DB7147A2-F8B8-4F9F-A965-F46363D0D9D9}"/>
+          <p:cNvPr id="5" name="">
+            <a:extLst xmlns:a="http://schemas.openxmlformats.org/drawingml/2006/main">
+              <a:ext uri="{FF2B5EF4-FFF2-40B4-BE49-F238E27FC236}">
+                <a16:creationId xmlns:a16="http://schemas.microsoft.com/office/drawing/2014/main" id="{F77C0C53-56BB-4DC5-8538-9108C2E47A36}"/>
               </a:ext>
             </a:extLst>
           </p:cNvPr>
@@ -3344,7 +3679,7 @@
                 <a:ea typeface="Arial"/>
                 <a:cs typeface="Arial"/>
               </a:rPr>
-              <a:t>HARTA E APLIKACIONIT</a:t>
+              <a:t>PLANI</a:t>
             </a:r>
           </a:p>
         </p:txBody>
@@ -3354,7 +3689,7 @@
           <p:cNvPr id="2" name="">
             <a:extLst xmlns:a="http://schemas.openxmlformats.org/drawingml/2006/main">
               <a:ext uri="{FF2B5EF4-FFF2-40B4-BE49-F238E27FC236}">
-                <a16:creationId xmlns:a16="http://schemas.microsoft.com/office/drawing/2014/main" id="{6E5F6C22-BDF5-4E24-BA3B-C953EE39B9A5}"/>
+                <a16:creationId xmlns:a16="http://schemas.microsoft.com/office/drawing/2014/main" id="{12E5A867-C5C3-4E98-AAAB-84588FDDB336}"/>
               </a:ext>
             </a:extLst>
           </p:cNvPr>
@@ -3411,36 +3746,36 @@
           <p:cNvPr id="3" name="">
             <a:extLst xmlns:a="http://schemas.openxmlformats.org/drawingml/2006/main">
               <a:ext uri="{FF2B5EF4-FFF2-40B4-BE49-F238E27FC236}">
-                <a16:creationId xmlns:a16="http://schemas.microsoft.com/office/drawing/2014/main" id="{10B355E9-D125-4B9E-9C19-BB5022EBE621}"/>
-              </a:ext>
-            </a:extLst>
-          </p:cNvPr>
-          <p:cNvSpPr>
-            <a:spLocks xmlns:a="http://schemas.openxmlformats.org/drawingml/2006/main" noGrp="1"/>
-          </p:cNvSpPr>
-          <p:nvPr/>
-        </p:nvSpPr>
-        <p:spPr>
-          <a:xfrm xmlns:a="http://schemas.openxmlformats.org/drawingml/2006/main">
-            <a:off x="609600" y="762000"/>
-            <a:ext cx="10953750" cy="714375"/>
-          </a:xfrm>
-          <a:prstGeom xmlns:a="http://schemas.openxmlformats.org/drawingml/2006/main" prst="rect">
-            <a:avLst/>
-          </a:prstGeom>
-          <a:noFill xmlns:a="http://schemas.openxmlformats.org/drawingml/2006/main"/>
-          <a:ln xmlns:a="http://schemas.openxmlformats.org/drawingml/2006/main" w="0">
-            <a:noFill/>
-          </a:ln>
-        </p:spPr>
-        <p:txBody>
-          <a:bodyPr xmlns:a="http://schemas.openxmlformats.org/drawingml/2006/main">
-            <a:noAutofit/>
-          </a:bodyPr>
-          <a:lstStyle xmlns:a="http://schemas.openxmlformats.org/drawingml/2006/main"/>
-          <a:p xmlns:a="http://schemas.openxmlformats.org/drawingml/2006/main">
-            <a:pPr>
-              <a:defRPr sz="3150" b="1">
+                <a16:creationId xmlns:a16="http://schemas.microsoft.com/office/drawing/2014/main" id="{8654FB5B-DFE9-4D02-9950-B41600C9CADB}"/>
+              </a:ext>
+            </a:extLst>
+          </p:cNvPr>
+          <p:cNvSpPr>
+            <a:spLocks xmlns:a="http://schemas.openxmlformats.org/drawingml/2006/main" noGrp="1"/>
+          </p:cNvSpPr>
+          <p:nvPr/>
+        </p:nvSpPr>
+        <p:spPr>
+          <a:xfrm xmlns:a="http://schemas.openxmlformats.org/drawingml/2006/main">
+            <a:off x="609600" y="933450"/>
+            <a:ext cx="10953750" cy="952500"/>
+          </a:xfrm>
+          <a:prstGeom xmlns:a="http://schemas.openxmlformats.org/drawingml/2006/main" prst="rect">
+            <a:avLst/>
+          </a:prstGeom>
+          <a:noFill xmlns:a="http://schemas.openxmlformats.org/drawingml/2006/main"/>
+          <a:ln xmlns:a="http://schemas.openxmlformats.org/drawingml/2006/main" w="0">
+            <a:noFill/>
+          </a:ln>
+        </p:spPr>
+        <p:txBody>
+          <a:bodyPr xmlns:a="http://schemas.openxmlformats.org/drawingml/2006/main">
+            <a:noAutofit/>
+          </a:bodyPr>
+          <a:lstStyle xmlns:a="http://schemas.openxmlformats.org/drawingml/2006/main"/>
+          <a:p xmlns:a="http://schemas.openxmlformats.org/drawingml/2006/main">
+            <a:pPr>
+              <a:defRPr sz="3300" b="1">
                 <a:solidFill>
                   <a:srgbClr val="FFFFFF"/>
                 </a:solidFill>
@@ -3450,7 +3785,7 @@
               </a:defRPr>
             </a:pPr>
             <a:r>
-              <a:rPr sz="3150" b="1">
+              <a:rPr sz="3300" b="1">
                 <a:solidFill>
                   <a:srgbClr val="FFFFFF"/>
                 </a:solidFill>
@@ -3458,143 +3793,120 @@
                 <a:ea typeface="Arial"/>
                 <a:cs typeface="Arial"/>
               </a:rPr>
-              <a:t>Ku jeton kodi? Ku jetojnë të dhënat?</a:t>
-            </a:r>
-          </a:p>
-        </p:txBody>
-      </p:sp>
-      <p:pic>
-        <p:nvPicPr>
-          <p:cNvPr id="10" name=""/>
-          <p:cNvPicPr>
-            <a:picLocks xmlns:a="http://schemas.openxmlformats.org/drawingml/2006/main" noChangeAspect="1"/>
-          </p:cNvPicPr>
-          <p:nvPr/>
-        </p:nvPicPr>
-        <p:blipFill>
-          <a:blip xmlns:r="http://schemas.openxmlformats.org/officeDocument/2006/relationships" xmlns:a="http://schemas.openxmlformats.org/drawingml/2006/main" r:embed="Rdca3715ab4124dac"/>
-          <a:stretch xmlns:a="http://schemas.openxmlformats.org/drawingml/2006/main"/>
-        </p:blipFill>
-        <p:spPr>
-          <a:xfrm xmlns:a="http://schemas.openxmlformats.org/drawingml/2006/main">
-            <a:off x="2288024" y="1524000"/>
-            <a:ext cx="7615951" cy="4286250"/>
-          </a:xfrm>
-          <a:prstGeom xmlns:a="http://schemas.openxmlformats.org/drawingml/2006/main" prst="rect">
-            <a:avLst/>
-          </a:prstGeom>
-        </p:spPr>
-      </p:pic>
-      <p:sp>
-        <p:nvSpPr>
-          <p:cNvPr id="5" name="">
-            <a:extLst xmlns:a="http://schemas.openxmlformats.org/drawingml/2006/main">
-              <a:ext uri="{FF2B5EF4-FFF2-40B4-BE49-F238E27FC236}">
-                <a16:creationId xmlns:a16="http://schemas.microsoft.com/office/drawing/2014/main" id="{18E35075-A359-43AB-B75E-37E08B432019}"/>
-              </a:ext>
-            </a:extLst>
-          </p:cNvPr>
-          <p:cNvSpPr>
-            <a:spLocks xmlns:a="http://schemas.openxmlformats.org/drawingml/2006/main" noGrp="1"/>
-          </p:cNvSpPr>
-          <p:nvPr/>
-        </p:nvSpPr>
-        <p:spPr>
-          <a:xfrm xmlns:a="http://schemas.openxmlformats.org/drawingml/2006/main">
-            <a:off x="609600" y="5924550"/>
-            <a:ext cx="10953750" cy="342900"/>
-          </a:xfrm>
-          <a:prstGeom xmlns:a="http://schemas.openxmlformats.org/drawingml/2006/main" prst="rect">
-            <a:avLst/>
-          </a:prstGeom>
-          <a:noFill xmlns:a="http://schemas.openxmlformats.org/drawingml/2006/main"/>
-          <a:ln xmlns:a="http://schemas.openxmlformats.org/drawingml/2006/main" w="0">
-            <a:noFill/>
-          </a:ln>
-        </p:spPr>
-        <p:txBody>
-          <a:bodyPr xmlns:a="http://schemas.openxmlformats.org/drawingml/2006/main">
-            <a:noAutofit/>
-          </a:bodyPr>
-          <a:lstStyle xmlns:a="http://schemas.openxmlformats.org/drawingml/2006/main"/>
-          <a:p xmlns:a="http://schemas.openxmlformats.org/drawingml/2006/main">
-            <a:pPr>
-              <a:defRPr sz="1650" b="0">
-                <a:solidFill>
-                  <a:srgbClr val="EAF1FF"/>
-                </a:solidFill>
-                <a:latin typeface="Arial"/>
-                <a:ea typeface="Arial"/>
-                <a:cs typeface="Arial"/>
-              </a:defRPr>
-            </a:pPr>
-            <a:r>
-              <a:rPr sz="1650" b="0">
-                <a:solidFill>
-                  <a:srgbClr val="EAF1FF"/>
-                </a:solidFill>
-                <a:latin typeface="Arial"/>
-                <a:ea typeface="Arial"/>
-                <a:cs typeface="Arial"/>
-              </a:rPr>
-              <a:t>Nëse ndryshon ora në Neon, a duhet Push në GitHub? Parashiko para përgjigjes.</a:t>
-            </a:r>
-          </a:p>
-        </p:txBody>
-      </p:sp>
-      <p:sp>
-        <p:nvSpPr>
-          <p:cNvPr id="6" name="">
-            <a:extLst xmlns:a="http://schemas.openxmlformats.org/drawingml/2006/main">
-              <a:ext uri="{FF2B5EF4-FFF2-40B4-BE49-F238E27FC236}">
-                <a16:creationId xmlns:a16="http://schemas.microsoft.com/office/drawing/2014/main" id="{91581363-858F-41D4-B56B-B35AC028C95C}"/>
-              </a:ext>
-            </a:extLst>
-          </p:cNvPr>
-          <p:cNvSpPr>
-            <a:spLocks xmlns:a="http://schemas.openxmlformats.org/drawingml/2006/main" noGrp="1"/>
-          </p:cNvSpPr>
-          <p:nvPr/>
-        </p:nvSpPr>
-        <p:spPr>
-          <a:xfrm xmlns:a="http://schemas.openxmlformats.org/drawingml/2006/main">
-            <a:off x="609600" y="6362700"/>
-            <a:ext cx="10953750" cy="419100"/>
-          </a:xfrm>
-          <a:prstGeom xmlns:a="http://schemas.openxmlformats.org/drawingml/2006/main" prst="rect">
-            <a:avLst/>
-          </a:prstGeom>
-          <a:noFill xmlns:a="http://schemas.openxmlformats.org/drawingml/2006/main"/>
-          <a:ln xmlns:a="http://schemas.openxmlformats.org/drawingml/2006/main" w="0">
-            <a:noFill/>
-          </a:ln>
-        </p:spPr>
-        <p:txBody>
-          <a:bodyPr xmlns:a="http://schemas.openxmlformats.org/drawingml/2006/main">
-            <a:noAutofit/>
-          </a:bodyPr>
-          <a:lstStyle xmlns:a="http://schemas.openxmlformats.org/drawingml/2006/main"/>
-          <a:p xmlns:a="http://schemas.openxmlformats.org/drawingml/2006/main">
-            <a:pPr>
-              <a:defRPr sz="1275" b="0">
-                <a:solidFill>
-                  <a:srgbClr val="8EE9D1"/>
-                </a:solidFill>
-                <a:latin typeface="Arial"/>
-                <a:ea typeface="Arial"/>
-                <a:cs typeface="Arial"/>
-              </a:defRPr>
-            </a:pPr>
-            <a:r>
-              <a:rPr sz="1275" b="0">
-                <a:solidFill>
-                  <a:srgbClr val="8EE9D1"/>
-                </a:solidFill>
-                <a:latin typeface="Arial"/>
-                <a:ea typeface="Arial"/>
-                <a:cs typeface="Arial"/>
-              </a:rPr>
-              <a:t>Përgjigjja: Jo. Push nevojitet për ndryshimet e kodit. Ndryshimi i një rreshti në Neon lexohet kur aplikacioni e pyet databazën përsëri.</a:t>
+              <a:t>90 minuta me kohë për korrigjime</a:t>
+            </a:r>
+          </a:p>
+        </p:txBody>
+      </p:sp>
+      <p:sp>
+        <p:nvSpPr>
+          <p:cNvPr id="4" name="">
+            <a:extLst xmlns:a="http://schemas.openxmlformats.org/drawingml/2006/main">
+              <a:ext uri="{FF2B5EF4-FFF2-40B4-BE49-F238E27FC236}">
+                <a16:creationId xmlns:a16="http://schemas.microsoft.com/office/drawing/2014/main" id="{31416CE2-8FA7-4240-A378-649E7CBADE33}"/>
+              </a:ext>
+            </a:extLst>
+          </p:cNvPr>
+          <p:cNvSpPr>
+            <a:spLocks xmlns:a="http://schemas.openxmlformats.org/drawingml/2006/main" noGrp="1"/>
+          </p:cNvSpPr>
+          <p:nvPr/>
+        </p:nvSpPr>
+        <p:spPr>
+          <a:xfrm xmlns:a="http://schemas.openxmlformats.org/drawingml/2006/main">
+            <a:off x="609600" y="2047875"/>
+            <a:ext cx="10953750" cy="3048000"/>
+          </a:xfrm>
+          <a:prstGeom xmlns:a="http://schemas.openxmlformats.org/drawingml/2006/main" prst="rect">
+            <a:avLst/>
+          </a:prstGeom>
+          <a:noFill xmlns:a="http://schemas.openxmlformats.org/drawingml/2006/main"/>
+          <a:ln xmlns:a="http://schemas.openxmlformats.org/drawingml/2006/main" w="0">
+            <a:noFill/>
+          </a:ln>
+        </p:spPr>
+        <p:txBody>
+          <a:bodyPr xmlns:a="http://schemas.openxmlformats.org/drawingml/2006/main">
+            <a:noAutofit/>
+          </a:bodyPr>
+          <a:lstStyle xmlns:a="http://schemas.openxmlformats.org/drawingml/2006/main"/>
+          <a:p xmlns:a="http://schemas.openxmlformats.org/drawingml/2006/main">
+            <a:pPr>
+              <a:defRPr sz="2175" b="0">
+                <a:solidFill>
+                  <a:srgbClr val="EAF1FF"/>
+                </a:solidFill>
+                <a:latin typeface="Arial"/>
+                <a:ea typeface="Arial"/>
+                <a:cs typeface="Arial"/>
+              </a:defRPr>
+            </a:pPr>
+            <a:r>
+              <a:rPr sz="2175" b="0">
+                <a:solidFill>
+                  <a:srgbClr val="EAF1FF"/>
+                </a:solidFill>
+                <a:latin typeface="Arial"/>
+                <a:ea typeface="Arial"/>
+                <a:cs typeface="Arial"/>
+              </a:rPr>
+              <a:t>0–10: rikujtim + projekt + raport. 10–25: Neon. 25–35: tabela.</a:t>
+            </a:r>
+          </a:p>
+          <a:p xmlns:a="http://schemas.openxmlformats.org/drawingml/2006/main">
+            <a:r>
+              <a:t/>
+            </a:r>
+          </a:p>
+          <a:p xmlns:a="http://schemas.openxmlformats.org/drawingml/2006/main">
+            <a:pPr>
+              <a:defRPr sz="2175" b="0">
+                <a:solidFill>
+                  <a:srgbClr val="EAF1FF"/>
+                </a:solidFill>
+                <a:latin typeface="Arial"/>
+                <a:ea typeface="Arial"/>
+                <a:cs typeface="Arial"/>
+              </a:defRPr>
+            </a:pPr>
+            <a:r>
+              <a:rPr sz="2175" b="0">
+                <a:solidFill>
+                  <a:srgbClr val="EAF1FF"/>
+                </a:solidFill>
+                <a:latin typeface="Arial"/>
+                <a:ea typeface="Arial"/>
+                <a:cs typeface="Arial"/>
+              </a:rPr>
+              <a:t>35–55: kod. 55–70: prova + Push. 70–90: dorëzim + korrigjime.</a:t>
+            </a:r>
+          </a:p>
+          <a:p xmlns:a="http://schemas.openxmlformats.org/drawingml/2006/main">
+            <a:r>
+              <a:t/>
+            </a:r>
+          </a:p>
+          <a:p xmlns:a="http://schemas.openxmlformats.org/drawingml/2006/main">
+            <a:pPr>
+              <a:defRPr sz="2175" b="0">
+                <a:solidFill>
+                  <a:srgbClr val="EAF1FF"/>
+                </a:solidFill>
+                <a:latin typeface="Arial"/>
+                <a:ea typeface="Arial"/>
+                <a:cs typeface="Arial"/>
+              </a:defRPr>
+            </a:pPr>
+            <a:r>
+              <a:rPr sz="2175" b="0">
+                <a:solidFill>
+                  <a:srgbClr val="EAF1FF"/>
+                </a:solidFill>
+                <a:latin typeface="Arial"/>
+                <a:ea typeface="Arial"/>
+                <a:cs typeface="Arial"/>
+              </a:rPr>
+              <a:t>Në çift: njëri vepron, tjetri parashikon dhe kontrollon. Ndërroni rolet te minutat 35 dhe 55.</a:t>
             </a:r>
           </a:p>
         </p:txBody>
@@ -3602,7 +3914,7 @@
     </p:spTree>
     <p:extLst>
       <p:ext uri="{BB962C8B-B14F-4D97-AF65-F5344CB8AC3E}">
-        <p14:creationId xmlns:p14="http://schemas.microsoft.com/office/powerpoint/2010/main" val="833343398"/>
+        <p14:creationId xmlns:p14="http://schemas.microsoft.com/office/powerpoint/2010/main" val="1203114846"/>
       </p:ext>
     </p:extLst>
   </p:cSld>
@@ -3633,7 +3945,7 @@
           <p:cNvPr id="7" name="">
             <a:extLst xmlns:a="http://schemas.openxmlformats.org/drawingml/2006/main">
               <a:ext uri="{FF2B5EF4-FFF2-40B4-BE49-F238E27FC236}">
-                <a16:creationId xmlns:a16="http://schemas.microsoft.com/office/drawing/2014/main" id="{5A5EE4AD-7980-44C5-9724-F8CCA972DB2E}"/>
+                <a16:creationId xmlns:a16="http://schemas.microsoft.com/office/drawing/2014/main" id="{9AC5D61C-8DAA-41E0-B9B0-DAC793CE1764}"/>
               </a:ext>
             </a:extLst>
           </p:cNvPr>
@@ -3690,7 +4002,7 @@
           <p:cNvPr id="2" name="">
             <a:extLst xmlns:a="http://schemas.openxmlformats.org/drawingml/2006/main">
               <a:ext uri="{FF2B5EF4-FFF2-40B4-BE49-F238E27FC236}">
-                <a16:creationId xmlns:a16="http://schemas.microsoft.com/office/drawing/2014/main" id="{F8484376-302B-44C4-A8B4-C0D8B9C56EF8}"/>
+                <a16:creationId xmlns:a16="http://schemas.microsoft.com/office/drawing/2014/main" id="{E69D3AA7-B6F6-45C9-97D8-8969AB4BECCD}"/>
               </a:ext>
             </a:extLst>
           </p:cNvPr>
@@ -3747,7 +4059,7 @@
           <p:cNvPr id="3" name="">
             <a:extLst xmlns:a="http://schemas.openxmlformats.org/drawingml/2006/main">
               <a:ext uri="{FF2B5EF4-FFF2-40B4-BE49-F238E27FC236}">
-                <a16:creationId xmlns:a16="http://schemas.microsoft.com/office/drawing/2014/main" id="{00278A39-4A72-4808-B11B-8E1CE918AF1B}"/>
+                <a16:creationId xmlns:a16="http://schemas.microsoft.com/office/drawing/2014/main" id="{C596FFC1-5363-43C6-A336-C968AFDE24BA}"/>
               </a:ext>
             </a:extLst>
           </p:cNvPr>
@@ -3804,7 +4116,7 @@
           <p:cNvPr id="4" name="">
             <a:extLst xmlns:a="http://schemas.openxmlformats.org/drawingml/2006/main">
               <a:ext uri="{FF2B5EF4-FFF2-40B4-BE49-F238E27FC236}">
-                <a16:creationId xmlns:a16="http://schemas.microsoft.com/office/drawing/2014/main" id="{CB5F4152-2708-4414-AC8D-BF7EB351C2F9}"/>
+                <a16:creationId xmlns:a16="http://schemas.microsoft.com/office/drawing/2014/main" id="{71C3F672-E882-4FF2-A1F3-BD23E6383EBB}"/>
               </a:ext>
             </a:extLst>
           </p:cNvPr>
@@ -3945,7 +4257,7 @@
           <p:cNvPr id="5" name="">
             <a:extLst xmlns:a="http://schemas.openxmlformats.org/drawingml/2006/main">
               <a:ext uri="{FF2B5EF4-FFF2-40B4-BE49-F238E27FC236}">
-                <a16:creationId xmlns:a16="http://schemas.microsoft.com/office/drawing/2014/main" id="{3F782F03-58B6-4EF6-AD9F-F97BD51406B8}"/>
+                <a16:creationId xmlns:a16="http://schemas.microsoft.com/office/drawing/2014/main" id="{7A9AB002-118F-495D-854C-3681211C6403}"/>
               </a:ext>
             </a:extLst>
           </p:cNvPr>
@@ -4002,7 +4314,7 @@
           <p:cNvPr id="6" name="">
             <a:extLst xmlns:a="http://schemas.openxmlformats.org/drawingml/2006/main">
               <a:ext uri="{FF2B5EF4-FFF2-40B4-BE49-F238E27FC236}">
-                <a16:creationId xmlns:a16="http://schemas.microsoft.com/office/drawing/2014/main" id="{44875FD4-5FC7-4120-8D52-368568FD6C7C}"/>
+                <a16:creationId xmlns:a16="http://schemas.microsoft.com/office/drawing/2014/main" id="{31EFC5DB-7E53-4A93-B8FF-12EF257DED71}"/>
               </a:ext>
             </a:extLst>
           </p:cNvPr>
@@ -4057,7 +4369,7 @@
     </p:spTree>
     <p:extLst>
       <p:ext uri="{BB962C8B-B14F-4D97-AF65-F5344CB8AC3E}">
-        <p14:creationId xmlns:p14="http://schemas.microsoft.com/office/powerpoint/2010/main" val="121650410"/>
+        <p14:creationId xmlns:p14="http://schemas.microsoft.com/office/powerpoint/2010/main" val="1931183944"/>
       </p:ext>
     </p:extLst>
   </p:cSld>
@@ -4088,7 +4400,7 @@
           <p:cNvPr id="7" name="">
             <a:extLst xmlns:a="http://schemas.openxmlformats.org/drawingml/2006/main">
               <a:ext uri="{FF2B5EF4-FFF2-40B4-BE49-F238E27FC236}">
-                <a16:creationId xmlns:a16="http://schemas.microsoft.com/office/drawing/2014/main" id="{BD2EAC46-DEB8-4B00-AA9F-0AA22D2897E5}"/>
+                <a16:creationId xmlns:a16="http://schemas.microsoft.com/office/drawing/2014/main" id="{DFB73E09-7A7C-420A-8B1E-CF837928B91C}"/>
               </a:ext>
             </a:extLst>
           </p:cNvPr>
@@ -4145,7 +4457,7 @@
           <p:cNvPr id="2" name="">
             <a:extLst xmlns:a="http://schemas.openxmlformats.org/drawingml/2006/main">
               <a:ext uri="{FF2B5EF4-FFF2-40B4-BE49-F238E27FC236}">
-                <a16:creationId xmlns:a16="http://schemas.microsoft.com/office/drawing/2014/main" id="{BD89A791-F0B2-4D93-88DC-CEE2120065AF}"/>
+                <a16:creationId xmlns:a16="http://schemas.microsoft.com/office/drawing/2014/main" id="{897045DF-C609-4644-84AF-BFAA4EF00304}"/>
               </a:ext>
             </a:extLst>
           </p:cNvPr>
@@ -4202,7 +4514,7 @@
           <p:cNvPr id="3" name="">
             <a:extLst xmlns:a="http://schemas.openxmlformats.org/drawingml/2006/main">
               <a:ext uri="{FF2B5EF4-FFF2-40B4-BE49-F238E27FC236}">
-                <a16:creationId xmlns:a16="http://schemas.microsoft.com/office/drawing/2014/main" id="{0EA866EC-5A28-44DA-9C0D-02CB2472EE8D}"/>
+                <a16:creationId xmlns:a16="http://schemas.microsoft.com/office/drawing/2014/main" id="{F676C1EC-89C6-41D7-8BAA-BB1E6FCAA76F}"/>
               </a:ext>
             </a:extLst>
           </p:cNvPr>
@@ -4259,7 +4571,7 @@
           <p:cNvPr id="4" name="">
             <a:extLst xmlns:a="http://schemas.openxmlformats.org/drawingml/2006/main">
               <a:ext uri="{FF2B5EF4-FFF2-40B4-BE49-F238E27FC236}">
-                <a16:creationId xmlns:a16="http://schemas.microsoft.com/office/drawing/2014/main" id="{940CC4D4-BC93-4265-89FF-FE34B69A8686}"/>
+                <a16:creationId xmlns:a16="http://schemas.microsoft.com/office/drawing/2014/main" id="{9D6AAA17-E245-4DE8-B079-0A0B828F496E}"/>
               </a:ext>
             </a:extLst>
           </p:cNvPr>
@@ -4400,7 +4712,7 @@
           <p:cNvPr id="5" name="">
             <a:extLst xmlns:a="http://schemas.openxmlformats.org/drawingml/2006/main">
               <a:ext uri="{FF2B5EF4-FFF2-40B4-BE49-F238E27FC236}">
-                <a16:creationId xmlns:a16="http://schemas.microsoft.com/office/drawing/2014/main" id="{5B2F3C51-0C92-4546-882E-4126711237D1}"/>
+                <a16:creationId xmlns:a16="http://schemas.microsoft.com/office/drawing/2014/main" id="{59AD188A-C135-4E96-8627-6E3483AAE273}"/>
               </a:ext>
             </a:extLst>
           </p:cNvPr>
@@ -4457,7 +4769,7 @@
           <p:cNvPr id="6" name="">
             <a:extLst xmlns:a="http://schemas.openxmlformats.org/drawingml/2006/main">
               <a:ext uri="{FF2B5EF4-FFF2-40B4-BE49-F238E27FC236}">
-                <a16:creationId xmlns:a16="http://schemas.microsoft.com/office/drawing/2014/main" id="{CC4862B7-83AC-4BDF-8DED-05636FFB1683}"/>
+                <a16:creationId xmlns:a16="http://schemas.microsoft.com/office/drawing/2014/main" id="{1795ABEB-BBE9-4ED9-A03B-739D4AB1ECAB}"/>
               </a:ext>
             </a:extLst>
           </p:cNvPr>
@@ -4512,7 +4824,7 @@
     </p:spTree>
     <p:extLst>
       <p:ext uri="{BB962C8B-B14F-4D97-AF65-F5344CB8AC3E}">
-        <p14:creationId xmlns:p14="http://schemas.microsoft.com/office/powerpoint/2010/main" val="1922317704"/>
+        <p14:creationId xmlns:p14="http://schemas.microsoft.com/office/powerpoint/2010/main" val="1372085706"/>
       </p:ext>
     </p:extLst>
   </p:cSld>
@@ -4543,7 +4855,7 @@
           <p:cNvPr id="7" name="">
             <a:extLst xmlns:a="http://schemas.openxmlformats.org/drawingml/2006/main">
               <a:ext uri="{FF2B5EF4-FFF2-40B4-BE49-F238E27FC236}">
-                <a16:creationId xmlns:a16="http://schemas.microsoft.com/office/drawing/2014/main" id="{079738BB-8634-4F02-883D-A3E15BA51A0B}"/>
+                <a16:creationId xmlns:a16="http://schemas.microsoft.com/office/drawing/2014/main" id="{D2F15A28-E851-41CE-AD6D-F36D07C2849A}"/>
               </a:ext>
             </a:extLst>
           </p:cNvPr>
@@ -4600,7 +4912,7 @@
           <p:cNvPr id="2" name="">
             <a:extLst xmlns:a="http://schemas.openxmlformats.org/drawingml/2006/main">
               <a:ext uri="{FF2B5EF4-FFF2-40B4-BE49-F238E27FC236}">
-                <a16:creationId xmlns:a16="http://schemas.microsoft.com/office/drawing/2014/main" id="{797582E7-F890-4942-B465-977FA9748EDB}"/>
+                <a16:creationId xmlns:a16="http://schemas.microsoft.com/office/drawing/2014/main" id="{5343E93D-9900-4AC7-8FEE-32C93D967CD6}"/>
               </a:ext>
             </a:extLst>
           </p:cNvPr>
@@ -4657,7 +4969,7 @@
           <p:cNvPr id="3" name="">
             <a:extLst xmlns:a="http://schemas.openxmlformats.org/drawingml/2006/main">
               <a:ext uri="{FF2B5EF4-FFF2-40B4-BE49-F238E27FC236}">
-                <a16:creationId xmlns:a16="http://schemas.microsoft.com/office/drawing/2014/main" id="{B2339612-A8A4-47AE-962E-D6B828F7711F}"/>
+                <a16:creationId xmlns:a16="http://schemas.microsoft.com/office/drawing/2014/main" id="{0BB05A64-9CDE-48AB-9113-816886090C9B}"/>
               </a:ext>
             </a:extLst>
           </p:cNvPr>
@@ -4714,7 +5026,7 @@
           <p:cNvPr id="4" name="">
             <a:extLst xmlns:a="http://schemas.openxmlformats.org/drawingml/2006/main">
               <a:ext uri="{FF2B5EF4-FFF2-40B4-BE49-F238E27FC236}">
-                <a16:creationId xmlns:a16="http://schemas.microsoft.com/office/drawing/2014/main" id="{0D318B5D-7E47-49C0-A550-6A8403213AB2}"/>
+                <a16:creationId xmlns:a16="http://schemas.microsoft.com/office/drawing/2014/main" id="{D04AE840-5A58-4311-8E5C-B8AD13B316BA}"/>
               </a:ext>
             </a:extLst>
           </p:cNvPr>
@@ -4827,7 +5139,7 @@
           <p:cNvPr id="5" name="">
             <a:extLst xmlns:a="http://schemas.openxmlformats.org/drawingml/2006/main">
               <a:ext uri="{FF2B5EF4-FFF2-40B4-BE49-F238E27FC236}">
-                <a16:creationId xmlns:a16="http://schemas.microsoft.com/office/drawing/2014/main" id="{C058EF28-E4B2-4193-AAD2-95AC9120CC50}"/>
+                <a16:creationId xmlns:a16="http://schemas.microsoft.com/office/drawing/2014/main" id="{743B0448-F7B9-43E4-AC1D-533FCC811F58}"/>
               </a:ext>
             </a:extLst>
           </p:cNvPr>
@@ -4884,7 +5196,7 @@
           <p:cNvPr id="6" name="">
             <a:extLst xmlns:a="http://schemas.openxmlformats.org/drawingml/2006/main">
               <a:ext uri="{FF2B5EF4-FFF2-40B4-BE49-F238E27FC236}">
-                <a16:creationId xmlns:a16="http://schemas.microsoft.com/office/drawing/2014/main" id="{8D89909A-8457-4E3B-9D3F-5E66C1A375A3}"/>
+                <a16:creationId xmlns:a16="http://schemas.microsoft.com/office/drawing/2014/main" id="{860C6E02-A887-4F40-ABED-74EBD206FC63}"/>
               </a:ext>
             </a:extLst>
           </p:cNvPr>
@@ -4939,7 +5251,7 @@
     </p:spTree>
     <p:extLst>
       <p:ext uri="{BB962C8B-B14F-4D97-AF65-F5344CB8AC3E}">
-        <p14:creationId xmlns:p14="http://schemas.microsoft.com/office/powerpoint/2010/main" val="1268335996"/>
+        <p14:creationId xmlns:p14="http://schemas.microsoft.com/office/powerpoint/2010/main" val="106097992"/>
       </p:ext>
     </p:extLst>
   </p:cSld>
@@ -4970,7 +5282,7 @@
           <p:cNvPr id="6" name="">
             <a:extLst xmlns:a="http://schemas.openxmlformats.org/drawingml/2006/main">
               <a:ext uri="{FF2B5EF4-FFF2-40B4-BE49-F238E27FC236}">
-                <a16:creationId xmlns:a16="http://schemas.microsoft.com/office/drawing/2014/main" id="{912E3ECD-D829-4D5B-92D6-D8FFC95457A8}"/>
+                <a16:creationId xmlns:a16="http://schemas.microsoft.com/office/drawing/2014/main" id="{6577BCB0-B906-4045-81C7-1AFD723348B3}"/>
               </a:ext>
             </a:extLst>
           </p:cNvPr>
@@ -5027,7 +5339,7 @@
           <p:cNvPr id="2" name="">
             <a:extLst xmlns:a="http://schemas.openxmlformats.org/drawingml/2006/main">
               <a:ext uri="{FF2B5EF4-FFF2-40B4-BE49-F238E27FC236}">
-                <a16:creationId xmlns:a16="http://schemas.microsoft.com/office/drawing/2014/main" id="{43D41F7F-7047-4F1C-A079-814FA00521E5}"/>
+                <a16:creationId xmlns:a16="http://schemas.microsoft.com/office/drawing/2014/main" id="{CFE6BCD0-ABE5-407A-ADB7-23CEE0974692}"/>
               </a:ext>
             </a:extLst>
           </p:cNvPr>
@@ -5084,7 +5396,7 @@
           <p:cNvPr id="3" name="">
             <a:extLst xmlns:a="http://schemas.openxmlformats.org/drawingml/2006/main">
               <a:ext uri="{FF2B5EF4-FFF2-40B4-BE49-F238E27FC236}">
-                <a16:creationId xmlns:a16="http://schemas.microsoft.com/office/drawing/2014/main" id="{6DCB97ED-8E1C-4BC8-B08F-42C007B8ADC2}"/>
+                <a16:creationId xmlns:a16="http://schemas.microsoft.com/office/drawing/2014/main" id="{EBB10CD7-EA8C-43B4-BE1A-79BAE3CBCEC0}"/>
               </a:ext>
             </a:extLst>
           </p:cNvPr>
@@ -5141,7 +5453,7 @@
           <p:cNvPr id="4" name="">
             <a:extLst xmlns:a="http://schemas.openxmlformats.org/drawingml/2006/main">
               <a:ext uri="{FF2B5EF4-FFF2-40B4-BE49-F238E27FC236}">
-                <a16:creationId xmlns:a16="http://schemas.microsoft.com/office/drawing/2014/main" id="{45B95C63-61CA-452F-AA34-9D12C0C8766D}"/>
+                <a16:creationId xmlns:a16="http://schemas.microsoft.com/office/drawing/2014/main" id="{719E2543-6B3F-4242-9EC3-4E03CC849077}"/>
               </a:ext>
             </a:extLst>
           </p:cNvPr>
@@ -5282,7 +5594,7 @@
           <p:cNvPr id="5" name="">
             <a:extLst xmlns:a="http://schemas.openxmlformats.org/drawingml/2006/main">
               <a:ext uri="{FF2B5EF4-FFF2-40B4-BE49-F238E27FC236}">
-                <a16:creationId xmlns:a16="http://schemas.microsoft.com/office/drawing/2014/main" id="{97FFF9EB-360F-4D1C-9820-9A4B3AD0237D}"/>
+                <a16:creationId xmlns:a16="http://schemas.microsoft.com/office/drawing/2014/main" id="{E2A29D78-64BF-4C13-B299-7CC4EE966B1E}"/>
               </a:ext>
             </a:extLst>
           </p:cNvPr>
@@ -5337,7 +5649,7 @@
     </p:spTree>
     <p:extLst>
       <p:ext uri="{BB962C8B-B14F-4D97-AF65-F5344CB8AC3E}">
-        <p14:creationId xmlns:p14="http://schemas.microsoft.com/office/powerpoint/2010/main" val="1958526874"/>
+        <p14:creationId xmlns:p14="http://schemas.microsoft.com/office/powerpoint/2010/main" val="1447772162"/>
       </p:ext>
     </p:extLst>
   </p:cSld>
@@ -5368,7 +5680,7 @@
           <p:cNvPr id="8" name="">
             <a:extLst xmlns:a="http://schemas.openxmlformats.org/drawingml/2006/main">
               <a:ext uri="{FF2B5EF4-FFF2-40B4-BE49-F238E27FC236}">
-                <a16:creationId xmlns:a16="http://schemas.microsoft.com/office/drawing/2014/main" id="{AE126FAC-AE24-4B55-931F-06D4BF803093}"/>
+                <a16:creationId xmlns:a16="http://schemas.microsoft.com/office/drawing/2014/main" id="{AC361494-7EF8-4820-87EE-FC35E6B974AB}"/>
               </a:ext>
             </a:extLst>
           </p:cNvPr>
@@ -5425,7 +5737,7 @@
           <p:cNvPr id="2" name="">
             <a:extLst xmlns:a="http://schemas.openxmlformats.org/drawingml/2006/main">
               <a:ext uri="{FF2B5EF4-FFF2-40B4-BE49-F238E27FC236}">
-                <a16:creationId xmlns:a16="http://schemas.microsoft.com/office/drawing/2014/main" id="{BC357784-D2E5-4E54-9441-FA74B61392BD}"/>
+                <a16:creationId xmlns:a16="http://schemas.microsoft.com/office/drawing/2014/main" id="{F8A7AE3B-6170-41A2-9FC2-19835044B30F}"/>
               </a:ext>
             </a:extLst>
           </p:cNvPr>
@@ -5482,7 +5794,7 @@
           <p:cNvPr id="3" name="">
             <a:extLst xmlns:a="http://schemas.openxmlformats.org/drawingml/2006/main">
               <a:ext uri="{FF2B5EF4-FFF2-40B4-BE49-F238E27FC236}">
-                <a16:creationId xmlns:a16="http://schemas.microsoft.com/office/drawing/2014/main" id="{29627D60-F27F-4A03-80F5-286BACCB392F}"/>
+                <a16:creationId xmlns:a16="http://schemas.microsoft.com/office/drawing/2014/main" id="{D38C0ADE-9F2D-4F39-B9CF-171D4C157497}"/>
               </a:ext>
             </a:extLst>
           </p:cNvPr>
@@ -5539,7 +5851,7 @@
           <p:cNvPr id="4" name="">
             <a:extLst xmlns:a="http://schemas.openxmlformats.org/drawingml/2006/main">
               <a:ext uri="{FF2B5EF4-FFF2-40B4-BE49-F238E27FC236}">
-                <a16:creationId xmlns:a16="http://schemas.microsoft.com/office/drawing/2014/main" id="{FFA42CC0-1CFE-4A8D-91BC-F5E2D23BABEF}"/>
+                <a16:creationId xmlns:a16="http://schemas.microsoft.com/office/drawing/2014/main" id="{8CEFD6F7-D4E1-4590-9630-210CE5CBCAC9}"/>
               </a:ext>
             </a:extLst>
           </p:cNvPr>
@@ -5652,7 +5964,7 @@
           <p:cNvPr id="5" name="">
             <a:extLst xmlns:a="http://schemas.openxmlformats.org/drawingml/2006/main">
               <a:ext uri="{FF2B5EF4-FFF2-40B4-BE49-F238E27FC236}">
-                <a16:creationId xmlns:a16="http://schemas.microsoft.com/office/drawing/2014/main" id="{0085C520-EE1C-4C25-9B2E-5A8A33269B4C}"/>
+                <a16:creationId xmlns:a16="http://schemas.microsoft.com/office/drawing/2014/main" id="{50CF198E-ED1D-4CEB-B251-4E58DB86CA5C}"/>
               </a:ext>
             </a:extLst>
           </p:cNvPr>
@@ -5709,7 +6021,7 @@
           <p:cNvPr id="6" name="">
             <a:extLst xmlns:a="http://schemas.openxmlformats.org/drawingml/2006/main">
               <a:ext uri="{FF2B5EF4-FFF2-40B4-BE49-F238E27FC236}">
-                <a16:creationId xmlns:a16="http://schemas.microsoft.com/office/drawing/2014/main" id="{9A39AF1A-4B87-4FA2-8F47-EFEA51F73FB7}"/>
+                <a16:creationId xmlns:a16="http://schemas.microsoft.com/office/drawing/2014/main" id="{ABF69A17-2F4F-4A75-A958-58C6C09BC012}"/>
               </a:ext>
             </a:extLst>
           </p:cNvPr>
@@ -5766,7 +6078,7 @@
           <p:cNvPr id="7" name="">
             <a:extLst xmlns:a="http://schemas.openxmlformats.org/drawingml/2006/main">
               <a:ext uri="{FF2B5EF4-FFF2-40B4-BE49-F238E27FC236}">
-                <a16:creationId xmlns:a16="http://schemas.microsoft.com/office/drawing/2014/main" id="{92B5DDBC-AB4A-423C-A7CB-0533901C4740}"/>
+                <a16:creationId xmlns:a16="http://schemas.microsoft.com/office/drawing/2014/main" id="{E7B2D93C-8A77-468A-9396-7971AE868F08}"/>
               </a:ext>
             </a:extLst>
           </p:cNvPr>
@@ -5821,7 +6133,7 @@
     </p:spTree>
     <p:extLst>
       <p:ext uri="{BB962C8B-B14F-4D97-AF65-F5344CB8AC3E}">
-        <p14:creationId xmlns:p14="http://schemas.microsoft.com/office/powerpoint/2010/main" val="2140802432"/>
+        <p14:creationId xmlns:p14="http://schemas.microsoft.com/office/powerpoint/2010/main" val="2047788115"/>
       </p:ext>
     </p:extLst>
   </p:cSld>
